--- a/manaberu/slides/manaberu-11-operation-security.pptx
+++ b/manaberu/slides/manaberu-11-operation-security.pptx
@@ -114,13 +114,13 @@
   <p:extLst>
     <p:ext uri="{521415D9-36F7-43E2-AB2F-B90AF26B5E84}">
       <p14:sectionLst xmlns:p14="http://schemas.microsoft.com/office/powerpoint/2010/main">
-        <p14:section name="導入" id="{b103ff11-bfe0-eacd-598b-8114c6f0873e}">
+        <p14:section name="導入" id="{f5852acf-16bc-b426-951e-92a4c0075c1a}">
           <p14:sldIdLst>
             <p14:sldId id="256"/>
             <p14:sldId id="257"/>
           </p14:sldIdLst>
         </p14:section>
-        <p14:section name="本編" id="{9eae28f6-f05e-7c75-83ac-86e98ccfa0b7}">
+        <p14:section name="本編" id="{d486efaf-40c0-f329-0920-e9a3f1297f09}">
           <p14:sldIdLst>
             <p14:sldId id="258"/>
             <p14:sldId id="259"/>
@@ -128,7 +128,7 @@
             <p14:sldId id="261"/>
           </p14:sldIdLst>
         </p14:section>
-        <p14:section name="まとめ" id="{e6487a30-b31a-339d-6798-511934c48d71}">
+        <p14:section name="まとめ" id="{bc3c016e-c515-91fe-8f84-a58af74cd579}">
           <p14:sldIdLst>
             <p14:sldId id="262"/>
             <p14:sldId id="263"/>
@@ -1228,12 +1228,19 @@
 
 <file path=ppt/slideLayouts/slideLayout2.xml><?xml version="1.0" encoding="utf-8"?>
 <p:sldLayout xmlns:a="http://schemas.openxmlformats.org/drawingml/2006/main" xmlns:r="http://schemas.openxmlformats.org/officeDocument/2006/relationships" xmlns:p="http://schemas.openxmlformats.org/presentationml/2006/main" preserve="1">
-  <p:cSld name="MANA_TITLE">
+  <p:cSld name="MANA_COVER">
     <p:bg>
       <p:bgPr>
-        <a:solidFill>
-          <a:srgbClr val="FFD600"/>
-        </a:solidFill>
+        <a:blipFill dpi="0" rotWithShape="1">
+          <a:blip r:embed="rId1">
+            <a:lum/>
+          </a:blip>
+          <a:srcRect/>
+          <a:stretch>
+            <a:fillRect/>
+          </a:stretch>
+        </a:blipFill>
+        <a:effectLst/>
       </p:bgPr>
     </p:bg>
     <p:spTree>
@@ -1250,156 +1257,6 @@
           <a:chExt cx="0" cy="0"/>
         </a:xfrm>
       </p:grpSpPr>
-      <p:sp>
-        <p:nvSpPr>
-          <p:cNvPr id="2" name="Text 0"/>
-          <p:cNvSpPr/>
-          <p:nvPr>
-            <p:ph idx="100" type="title" hasCustomPrompt="1"/>
-          </p:nvPr>
-        </p:nvSpPr>
-        <p:spPr>
-          <a:xfrm>
-            <a:off x="548640" y="1691640"/>
-            <a:ext cx="5852160" cy="1371600"/>
-          </a:xfrm>
-          <a:prstGeom prst="rect">
-            <a:avLst/>
-          </a:prstGeom>
-          <a:noFill/>
-          <a:ln/>
-        </p:spPr>
-        <p:txBody>
-          <a:bodyPr wrap="square" rtlCol="0"/>
-          <a:lstStyle>
-            <a:lvl1pPr algn="l" indent="0" marL="0">
-              <a:buNone/>
-              <a:defRPr lang="en-US" sz="3200" b="1" dirty="0">
-                <a:solidFill>
-                  <a:schemeClr val="tx1"/>
-                </a:solidFill>
-              </a:defRPr>
-            </a:lvl1pPr>
-          </a:lstStyle>
-          <a:p>
-            <a:pPr algn="l" indent="0" marL="0">
-              <a:buNone/>
-            </a:pPr>
-            <a:endParaRPr lang="en-US" sz="3200" dirty="0"/>
-          </a:p>
-        </p:txBody>
-      </p:sp>
-      <p:sp>
-        <p:nvSpPr>
-          <p:cNvPr id="3" name="Text 0"/>
-          <p:cNvSpPr/>
-          <p:nvPr>
-            <p:ph idx="101" type="body" hasCustomPrompt="1"/>
-          </p:nvPr>
-        </p:nvSpPr>
-        <p:spPr>
-          <a:xfrm>
-            <a:off x="548640" y="3246120"/>
-            <a:ext cx="5852160" cy="457200"/>
-          </a:xfrm>
-          <a:prstGeom prst="rect">
-            <a:avLst/>
-          </a:prstGeom>
-          <a:noFill/>
-          <a:ln/>
-        </p:spPr>
-        <p:txBody>
-          <a:bodyPr wrap="square" rtlCol="0"/>
-          <a:lstStyle>
-            <a:lvl1pPr indent="0" marL="0">
-              <a:buNone/>
-              <a:defRPr lang="en-US" sz="1400" dirty="0">
-                <a:solidFill>
-                  <a:schemeClr val="tx1"/>
-                </a:solidFill>
-              </a:defRPr>
-            </a:lvl1pPr>
-          </a:lstStyle>
-          <a:p>
-            <a:pPr indent="0" marL="0">
-              <a:buNone/>
-            </a:pPr>
-            <a:endParaRPr lang="en-US" sz="1400" dirty="0"/>
-          </a:p>
-        </p:txBody>
-      </p:sp>
-      <p:sp>
-        <p:nvSpPr>
-          <p:cNvPr id="4" name="Text 0"/>
-          <p:cNvSpPr/>
-          <p:nvPr/>
-        </p:nvSpPr>
-        <p:spPr>
-          <a:xfrm>
-            <a:off x="548640" y="4526280"/>
-            <a:ext cx="5486400" cy="274320"/>
-          </a:xfrm>
-          <a:prstGeom prst="rect">
-            <a:avLst/>
-          </a:prstGeom>
-          <a:noFill/>
-          <a:ln/>
-        </p:spPr>
-        <p:txBody>
-          <a:bodyPr wrap="square" lIns="0" tIns="0" rIns="0" bIns="0" rtlCol="0" anchor="ctr"/>
-          <a:lstStyle/>
-          <a:p>
-            <a:pPr indent="0" marL="0">
-              <a:buNone/>
-            </a:pPr>
-            <a:r>
-              <a:rPr lang="en-US" sz="1000" dirty="0">
-                <a:solidFill>
-                  <a:schemeClr val="tx1"/>
-                </a:solidFill>
-              </a:rPr>
-              <a:t>マナベル｜AI×Lark 構築者育成講座</a:t>
-            </a:r>
-            <a:endParaRPr lang="en-US" sz="1000" dirty="0"/>
-          </a:p>
-        </p:txBody>
-      </p:sp>
-      <p:sp>
-        <p:nvSpPr>
-          <p:cNvPr id="5" name="Text 1"/>
-          <p:cNvSpPr/>
-          <p:nvPr/>
-        </p:nvSpPr>
-        <p:spPr>
-          <a:xfrm>
-            <a:off x="6766560" y="4526280"/>
-            <a:ext cx="1828800" cy="274320"/>
-          </a:xfrm>
-          <a:prstGeom prst="rect">
-            <a:avLst/>
-          </a:prstGeom>
-          <a:noFill/>
-          <a:ln/>
-        </p:spPr>
-        <p:txBody>
-          <a:bodyPr wrap="square" lIns="0" tIns="0" rIns="0" bIns="0" rtlCol="0" anchor="ctr"/>
-          <a:lstStyle/>
-          <a:p>
-            <a:pPr algn="r" indent="0" marL="0">
-              <a:buNone/>
-            </a:pPr>
-            <a:r>
-              <a:rPr lang="en-US" sz="1000" b="1" dirty="0">
-                <a:solidFill>
-                  <a:schemeClr val="tx1"/>
-                </a:solidFill>
-              </a:rPr>
-              <a:t>ささエール</a:t>
-            </a:r>
-            <a:endParaRPr lang="en-US" sz="1000" dirty="0"/>
-          </a:p>
-        </p:txBody>
-      </p:sp>
     </p:spTree>
   </p:cSld>
   <p:clrMapOvr>
@@ -1413,9 +1270,16 @@
   <p:cSld name="MANA_CONTENT">
     <p:bg>
       <p:bgPr>
-        <a:solidFill>
-          <a:srgbClr val="FFFFFF"/>
-        </a:solidFill>
+        <a:blipFill dpi="0" rotWithShape="1">
+          <a:blip r:embed="rId1">
+            <a:lum/>
+          </a:blip>
+          <a:srcRect/>
+          <a:stretch>
+            <a:fillRect/>
+          </a:stretch>
+        </a:blipFill>
+        <a:effectLst/>
       </p:bgPr>
     </p:bg>
     <p:spTree>
@@ -1434,16 +1298,36 @@
       </p:grpSpPr>
       <p:sp>
         <p:nvSpPr>
-          <p:cNvPr id="2" name="Text 0"/>
+          <p:cNvPr id="2" name="Shape 0"/>
           <p:cNvSpPr/>
-          <p:nvPr>
-            <p:ph idx="100" type="title" hasCustomPrompt="1"/>
-          </p:nvPr>
-        </p:nvSpPr>
-        <p:spPr>
-          <a:xfrm>
-            <a:off x="548640" y="658368"/>
-            <a:ext cx="8046720" cy="566928"/>
+          <p:nvPr/>
+        </p:nvSpPr>
+        <p:spPr>
+          <a:xfrm>
+            <a:off x="6400800" y="4754880"/>
+            <a:ext cx="2423160" cy="274320"/>
+          </a:xfrm>
+          <a:prstGeom prst="rect">
+            <a:avLst>
+              <a:gd name="adj" fmla="val 50000"/>
+            </a:avLst>
+          </a:prstGeom>
+          <a:solidFill>
+            <a:srgbClr val="1A1A1A"/>
+          </a:solidFill>
+          <a:ln/>
+        </p:spPr>
+      </p:sp>
+      <p:sp>
+        <p:nvSpPr>
+          <p:cNvPr id="3" name="Text 1"/>
+          <p:cNvSpPr/>
+          <p:nvPr/>
+        </p:nvSpPr>
+        <p:spPr>
+          <a:xfrm>
+            <a:off x="6510528" y="4754880"/>
+            <a:ext cx="1828800" cy="274320"/>
           </a:xfrm>
           <a:prstGeom prst="rect">
             <a:avLst/>
@@ -1452,35 +1336,37 @@
           <a:ln/>
         </p:spPr>
         <p:txBody>
-          <a:bodyPr wrap="square" rtlCol="0"/>
-          <a:lstStyle>
-            <a:lvl1pPr algn="l" indent="0" marL="0">
-              <a:buNone/>
-              <a:defRPr lang="en-US" sz="2400" b="1" dirty="0">
-                <a:solidFill>
-                  <a:schemeClr val="tx1"/>
-                </a:solidFill>
-              </a:defRPr>
-            </a:lvl1pPr>
-          </a:lstStyle>
-          <a:p>
-            <a:pPr algn="l" indent="0" marL="0">
-              <a:buNone/>
-            </a:pPr>
-            <a:endParaRPr lang="en-US" sz="2400" dirty="0"/>
-          </a:p>
-        </p:txBody>
-      </p:sp>
-      <p:sp>
-        <p:nvSpPr>
-          <p:cNvPr id="3" name="Text 0"/>
+          <a:bodyPr wrap="square" lIns="0" tIns="0" rIns="0" bIns="0" rtlCol="0" anchor="ctr"/>
+          <a:lstStyle/>
+          <a:p>
+            <a:pPr indent="0" marL="0">
+              <a:buNone/>
+            </a:pPr>
+            <a:r>
+              <a:rPr lang="ja-JP" altLang="en-US" sz="850" b="1" dirty="0">
+                <a:solidFill>
+                  <a:srgbClr val="FFFFFF"/>
+                </a:solidFill>
+                <a:latin typeface="Noto Sans JP" pitchFamily="34" charset="0"/>
+                <a:ea typeface="Noto Sans JP" pitchFamily="34" charset="-122"/>
+                <a:cs typeface="Noto Sans JP" pitchFamily="34" charset="-120"/>
+              </a:rPr>
+              <a:t>ささエール｜OFFICE PLATA</a:t>
+            </a:r>
+            <a:endParaRPr lang="ja-JP" sz="850" dirty="0"/>
+          </a:p>
+        </p:txBody>
+      </p:sp>
+      <p:sp>
+        <p:nvSpPr>
+          <p:cNvPr id="4" name="Text 2"/>
           <p:cNvSpPr/>
           <p:nvPr/>
         </p:nvSpPr>
         <p:spPr>
           <a:xfrm>
-            <a:off x="548640" y="4773168"/>
-            <a:ext cx="6400800" cy="228600"/>
+            <a:off x="365760" y="4754880"/>
+            <a:ext cx="5852160" cy="274320"/>
           </a:xfrm>
           <a:prstGeom prst="rect">
             <a:avLst/>
@@ -1496,14 +1382,17 @@
               <a:buNone/>
             </a:pPr>
             <a:r>
-              <a:rPr lang="en-US" sz="900" dirty="0">
-                <a:solidFill>
-                  <a:schemeClr val="tx2"/>
-                </a:solidFill>
+              <a:rPr lang="ja-JP" altLang="en-US" sz="850" dirty="0">
+                <a:solidFill>
+                  <a:srgbClr val="1A1A1A"/>
+                </a:solidFill>
+                <a:latin typeface="Noto Sans JP Medium" pitchFamily="34" charset="0"/>
+                <a:ea typeface="Noto Sans JP Medium" pitchFamily="34" charset="-122"/>
+                <a:cs typeface="Noto Sans JP Medium" pitchFamily="34" charset="-120"/>
               </a:rPr>
               <a:t>マナベル　第11回　安全に運用・改善する</a:t>
             </a:r>
-            <a:endParaRPr lang="en-US" sz="900" dirty="0"/>
+            <a:endParaRPr lang="ja-JP" sz="850" dirty="0"/>
           </a:p>
         </p:txBody>
       </p:sp>
@@ -1519,8 +1408,8 @@
         </p:nvSpPr>
         <p:spPr>
           <a:xfrm>
-            <a:off x="8229600" y="4773168"/>
-            <a:ext cx="365760" cy="228600"/>
+            <a:off x="8366760" y="4754880"/>
+            <a:ext cx="365760" cy="274320"/>
           </a:xfrm>
           <a:prstGeom prst="rect">
             <a:avLst/>
@@ -1532,169 +1421,26 @@
           </a:extLst>
         </p:spPr>
         <p:txBody>
-          <a:bodyPr/>
+          <a:bodyPr anchor="ctr"/>
           <a:lstStyle>
             <a:lvl1pPr>
-              <a:defRPr sz="900">
-                <a:solidFill>
-                  <a:srgbClr val="5A6872"/>
-                </a:solidFill>
+              <a:defRPr sz="850">
+                <a:solidFill>
+                  <a:srgbClr val="FFFFFF"/>
+                </a:solidFill>
+                <a:latin typeface="Noto Sans JP"/>
+                <a:ea typeface="Noto Sans JP"/>
+                <a:cs typeface="Noto Sans JP"/>
               </a:defRPr>
             </a:lvl1pPr>
           </a:lstStyle>
           <a:p>
             <a:pPr algn="r"/>
             <a:fld id="{F7021451-1387-4CA6-816F-3879F97B5CBC}" type="slidenum">
-              <a:rPr b="0" lang="en-US"/>
+              <a:rPr b="1" lang="en-US"/>
               <a:t>1003</a:t>
             </a:fld>
             <a:endParaRPr lang="en-US"/>
-          </a:p>
-        </p:txBody>
-      </p:sp>
-    </p:spTree>
-  </p:cSld>
-  <p:clrMapOvr>
-    <a:masterClrMapping/>
-  </p:clrMapOvr>
-</p:sldLayout>
-</file>
-
-<file path=ppt/slideLayouts/slideLayout4.xml><?xml version="1.0" encoding="utf-8"?>
-<p:sldLayout xmlns:a="http://schemas.openxmlformats.org/drawingml/2006/main" xmlns:r="http://schemas.openxmlformats.org/officeDocument/2006/relationships" xmlns:p="http://schemas.openxmlformats.org/presentationml/2006/main" preserve="1">
-  <p:cSld name="MANA_DARK">
-    <p:bg>
-      <p:bgPr>
-        <a:solidFill>
-          <a:srgbClr val="1A1A1A"/>
-        </a:solidFill>
-      </p:bgPr>
-    </p:bg>
-    <p:spTree>
-      <p:nvGrpSpPr>
-        <p:cNvPr id="1" name=""/>
-        <p:cNvGrpSpPr/>
-        <p:nvPr/>
-      </p:nvGrpSpPr>
-      <p:grpSpPr>
-        <a:xfrm>
-          <a:off x="0" y="0"/>
-          <a:ext cx="0" cy="0"/>
-          <a:chOff x="0" y="0"/>
-          <a:chExt cx="0" cy="0"/>
-        </a:xfrm>
-      </p:grpSpPr>
-      <p:sp>
-        <p:nvSpPr>
-          <p:cNvPr id="2" name="Text 0"/>
-          <p:cNvSpPr/>
-          <p:nvPr>
-            <p:ph idx="100" type="title" hasCustomPrompt="1"/>
-          </p:nvPr>
-        </p:nvSpPr>
-        <p:spPr>
-          <a:xfrm>
-            <a:off x="548640" y="1463040"/>
-            <a:ext cx="8046720" cy="1005840"/>
-          </a:xfrm>
-          <a:prstGeom prst="rect">
-            <a:avLst/>
-          </a:prstGeom>
-          <a:noFill/>
-          <a:ln/>
-        </p:spPr>
-        <p:txBody>
-          <a:bodyPr wrap="square" rtlCol="0"/>
-          <a:lstStyle>
-            <a:lvl1pPr algn="l" indent="0" marL="0">
-              <a:buNone/>
-              <a:defRPr lang="en-US" sz="3000" b="1" dirty="0">
-                <a:solidFill>
-                  <a:schemeClr val="accent1"/>
-                </a:solidFill>
-              </a:defRPr>
-            </a:lvl1pPr>
-          </a:lstStyle>
-          <a:p>
-            <a:pPr algn="l" indent="0" marL="0">
-              <a:buNone/>
-            </a:pPr>
-            <a:endParaRPr lang="en-US" sz="3000" dirty="0"/>
-          </a:p>
-        </p:txBody>
-      </p:sp>
-      <p:sp>
-        <p:nvSpPr>
-          <p:cNvPr id="3" name="Text 0"/>
-          <p:cNvSpPr/>
-          <p:nvPr>
-            <p:ph idx="101" type="body" hasCustomPrompt="1"/>
-          </p:nvPr>
-        </p:nvSpPr>
-        <p:spPr>
-          <a:xfrm>
-            <a:off x="548640" y="2606040"/>
-            <a:ext cx="8046720" cy="1097280"/>
-          </a:xfrm>
-          <a:prstGeom prst="rect">
-            <a:avLst/>
-          </a:prstGeom>
-          <a:noFill/>
-          <a:ln/>
-        </p:spPr>
-        <p:txBody>
-          <a:bodyPr wrap="square" rtlCol="0"/>
-          <a:lstStyle>
-            <a:lvl1pPr indent="0" marL="0">
-              <a:buNone/>
-              <a:defRPr lang="en-US" sz="1500" dirty="0">
-                <a:solidFill>
-                  <a:schemeClr val="bg1"/>
-                </a:solidFill>
-              </a:defRPr>
-            </a:lvl1pPr>
-          </a:lstStyle>
-          <a:p>
-            <a:pPr indent="0" marL="0">
-              <a:buNone/>
-            </a:pPr>
-            <a:endParaRPr lang="en-US" sz="1500" dirty="0"/>
-          </a:p>
-        </p:txBody>
-      </p:sp>
-      <p:sp>
-        <p:nvSpPr>
-          <p:cNvPr id="4" name="Text 0"/>
-          <p:cNvSpPr/>
-          <p:nvPr/>
-        </p:nvSpPr>
-        <p:spPr>
-          <a:xfrm>
-            <a:off x="548640" y="4526280"/>
-            <a:ext cx="5486400" cy="274320"/>
-          </a:xfrm>
-          <a:prstGeom prst="rect">
-            <a:avLst/>
-          </a:prstGeom>
-          <a:noFill/>
-          <a:ln/>
-        </p:spPr>
-        <p:txBody>
-          <a:bodyPr wrap="square" lIns="0" tIns="0" rIns="0" bIns="0" rtlCol="0" anchor="ctr"/>
-          <a:lstStyle/>
-          <a:p>
-            <a:pPr indent="0" marL="0">
-              <a:buNone/>
-            </a:pPr>
-            <a:r>
-              <a:rPr lang="en-US" sz="1000" dirty="0">
-                <a:solidFill>
-                  <a:schemeClr val="bg1"/>
-                </a:solidFill>
-              </a:rPr>
-              <a:t>マナベル｜AI×Lark 構築者育成講座</a:t>
-            </a:r>
-            <a:endParaRPr lang="en-US" sz="1000" dirty="0"/>
           </a:p>
         </p:txBody>
       </p:sp>
@@ -1735,8 +1481,8 @@
         </p:nvSpPr>
         <p:spPr>
           <a:xfrm>
-            <a:off x="8229600" y="4773168"/>
-            <a:ext cx="365760" cy="228600"/>
+            <a:off x="8366760" y="4754880"/>
+            <a:ext cx="365760" cy="274320"/>
           </a:xfrm>
           <a:prstGeom prst="rect">
             <a:avLst/>
@@ -1748,20 +1494,23 @@
           </a:extLst>
         </p:spPr>
         <p:txBody>
-          <a:bodyPr/>
+          <a:bodyPr anchor="ctr"/>
           <a:lstStyle>
             <a:lvl1pPr>
-              <a:defRPr sz="900">
-                <a:solidFill>
-                  <a:srgbClr val="5A6872"/>
-                </a:solidFill>
+              <a:defRPr sz="850">
+                <a:solidFill>
+                  <a:srgbClr val="FFFFFF"/>
+                </a:solidFill>
+                <a:latin typeface="Noto Sans JP"/>
+                <a:ea typeface="Noto Sans JP"/>
+                <a:cs typeface="Noto Sans JP"/>
               </a:defRPr>
             </a:lvl1pPr>
           </a:lstStyle>
           <a:p>
             <a:pPr algn="r"/>
             <a:fld id="{F7021451-1387-4CA6-816F-3879F97B5CBC}" type="slidenum">
-              <a:rPr b="0" lang="en-US"/>
+              <a:rPr b="1" lang="en-US"/>
               <a:t>null</a:t>
             </a:fld>
             <a:endParaRPr lang="en-US"/>
@@ -1775,7 +1524,6 @@
     <p:sldLayoutId id="2147483649" r:id="rId1"/>
     <p:sldLayoutId id="2147483650" r:id="rId2"/>
     <p:sldLayoutId id="2147483651" r:id="rId3"/>
-    <p:sldLayoutId id="2147483652" r:id="rId4"/>
   </p:sldLayoutIdLst>
   <p:hf sldNum="0" hdr="0" ftr="0" dt="0"/>
   <p:txStyles>
@@ -2048,50 +1796,92 @@
           <a:chExt cx="0" cy="0"/>
         </a:xfrm>
       </p:grpSpPr>
-      <p:sp>
-        <p:nvSpPr>
-          <p:cNvPr id="2" name="lesson-badge"/>
-          <p:cNvSpPr/>
-          <p:nvPr/>
-        </p:nvSpPr>
-        <p:spPr>
-          <a:xfrm>
-            <a:off x="548640" y="822960"/>
-            <a:ext cx="1828800" cy="566928"/>
-          </a:xfrm>
-          <a:prstGeom prst="roundRect">
-            <a:avLst>
-              <a:gd name="adj" fmla="val 50000"/>
-            </a:avLst>
+      <p:pic>
+        <p:nvPicPr>
+          <p:cNvPr id="2" name="portrait" descr="講師 笹原彰朗">    </p:cNvPr>
+          <p:cNvPicPr>
+            <a:picLocks noChangeAspect="1"/>
+          </p:cNvPicPr>
+          <p:nvPr/>
+        </p:nvPicPr>
+        <p:blipFill>
+          <a:blip r:embed="rId1"/>
+          <a:stretch>
+            <a:fillRect/>
+          </a:stretch>
+        </p:blipFill>
+        <p:spPr>
+          <a:xfrm>
+            <a:off x="6003588" y="1211580"/>
+            <a:ext cx="2866092" cy="3931920"/>
+          </a:xfrm>
+          <a:prstGeom prst="rect">
+            <a:avLst/>
+          </a:prstGeom>
+        </p:spPr>
+      </p:pic>
+      <p:sp>
+        <p:nvSpPr>
+          <p:cNvPr id="3" name="Text 0"/>
+          <p:cNvSpPr txBox="1"/>
+          <p:nvPr/>
+        </p:nvSpPr>
+        <p:spPr>
+          <a:xfrm rot="-240000">
+            <a:off x="457200" y="411480"/>
+            <a:ext cx="1600200" cy="603504"/>
+          </a:xfrm>
+          <a:prstGeom prst="rect">
+            <a:avLst/>
           </a:prstGeom>
           <a:solidFill>
             <a:srgbClr val="1A1A1A"/>
           </a:solidFill>
-          <a:ln w="12700">
+          <a:ln>
             <a:solidFill>
               <a:srgbClr val="1A1A1A"/>
             </a:solidFill>
-            <a:prstDash val="solid"/>
           </a:ln>
           <a:effectLst>
             <a:outerShdw sx="100000" sy="100000" kx="0" ky="0" algn="bl" rotWithShape="0" blurRad="101600" dist="38100" dir="2700000">
-              <a:srgbClr val="000000">
-                <a:alpha val="18000"/>
+              <a:srgbClr val="1A1A1A">
+                <a:alpha val="100000"/>
               </a:srgbClr>
             </a:outerShdw>
           </a:effectLst>
         </p:spPr>
-      </p:sp>
-      <p:sp>
-        <p:nvSpPr>
-          <p:cNvPr id="3" name="Text 1"/>
+        <p:txBody>
+          <a:bodyPr wrap="square" lIns="0" tIns="0" rIns="0" bIns="0" rtlCol="0" anchor="ctr"/>
+          <a:lstStyle/>
+          <a:p>
+            <a:pPr algn="ctr" indent="0" marL="0">
+              <a:buNone/>
+            </a:pPr>
+            <a:r>
+              <a:rPr lang="ja-JP" altLang="en-US" sz="2200" dirty="0">
+                <a:solidFill>
+                  <a:srgbClr val="FFD600"/>
+                </a:solidFill>
+                <a:latin typeface="Dela Gothic One" pitchFamily="34" charset="0"/>
+                <a:ea typeface="けいふぉんと" pitchFamily="34" charset="-122"/>
+                <a:cs typeface="Dela Gothic One" pitchFamily="34" charset="-120"/>
+              </a:rPr>
+              <a:t>第11回</a:t>
+            </a:r>
+            <a:endParaRPr lang="ja-JP" sz="2200" dirty="0"/>
+          </a:p>
+        </p:txBody>
+      </p:sp>
+      <p:sp>
+        <p:nvSpPr>
+          <p:cNvPr id="4" name="Text 1"/>
           <p:cNvSpPr txBox="1"/>
           <p:nvPr/>
         </p:nvSpPr>
         <p:spPr>
           <a:xfrm>
-            <a:off x="548640" y="822960"/>
-            <a:ext cx="1828800" cy="566928"/>
+            <a:off x="457200" y="1188720"/>
+            <a:ext cx="6035040" cy="1600200"/>
           </a:xfrm>
           <a:prstGeom prst="rect">
             <a:avLst/>
@@ -2100,6 +1890,63 @@
           <a:ln/>
         </p:spPr>
         <p:txBody>
+          <a:bodyPr wrap="square" lIns="0" tIns="0" rIns="0" bIns="0" rtlCol="0" anchor="ctr">
+            <a:normAutofit/>
+          </a:bodyPr>
+          <a:lstStyle/>
+          <a:p>
+            <a:pPr indent="0" marL="0">
+              <a:lnSpc>
+                <a:spcPct val="105000"/>
+              </a:lnSpc>
+              <a:buNone/>
+            </a:pPr>
+            <a:r>
+              <a:rPr lang="ja-JP" altLang="en-US" sz="4000" dirty="0">
+                <a:solidFill>
+                  <a:srgbClr val="1A1A1A"/>
+                </a:solidFill>
+                <a:latin typeface="Dela Gothic One" pitchFamily="34" charset="0"/>
+                <a:ea typeface="けいふぉんと" pitchFamily="34" charset="-122"/>
+                <a:cs typeface="Dela Gothic One" pitchFamily="34" charset="-120"/>
+              </a:rPr>
+              <a:t>安全に運用・改善する</a:t>
+            </a:r>
+            <a:endParaRPr lang="ja-JP" sz="4000" dirty="0"/>
+          </a:p>
+        </p:txBody>
+      </p:sp>
+      <p:sp>
+        <p:nvSpPr>
+          <p:cNvPr id="5" name="Text 2"/>
+          <p:cNvSpPr txBox="1"/>
+          <p:nvPr/>
+        </p:nvSpPr>
+        <p:spPr>
+          <a:xfrm rot="-120000">
+            <a:off x="457200" y="2971800"/>
+            <a:ext cx="4937760" cy="502920"/>
+          </a:xfrm>
+          <a:prstGeom prst="rect">
+            <a:avLst/>
+          </a:prstGeom>
+          <a:solidFill>
+            <a:srgbClr val="DD6420"/>
+          </a:solidFill>
+          <a:ln w="19050">
+            <a:solidFill>
+              <a:srgbClr val="1A1A1A"/>
+            </a:solidFill>
+          </a:ln>
+          <a:effectLst>
+            <a:outerShdw sx="100000" sy="100000" kx="0" ky="0" algn="bl" rotWithShape="0" blurRad="101600" dist="38100" dir="2700000">
+              <a:srgbClr val="1A1A1A">
+                <a:alpha val="100000"/>
+              </a:srgbClr>
+            </a:outerShdw>
+          </a:effectLst>
+        </p:spPr>
+        <p:txBody>
           <a:bodyPr wrap="square" lIns="0" tIns="0" rIns="0" bIns="0" rtlCol="0" anchor="ctr"/>
           <a:lstStyle/>
           <a:p>
@@ -2107,109 +1954,38 @@
               <a:buNone/>
             </a:pPr>
             <a:r>
-              <a:rPr lang="en-US" sz="2200" b="1" dirty="0">
-                <a:solidFill>
-                  <a:schemeClr val="accent1"/>
-                </a:solidFill>
-              </a:rPr>
-              <a:t>第11回</a:t>
-            </a:r>
-            <a:endParaRPr lang="en-US" sz="2200" dirty="0"/>
-          </a:p>
-        </p:txBody>
-      </p:sp>
-      <p:sp>
-        <p:nvSpPr>
-          <p:cNvPr id="4" name="Text 0"/>
+              <a:rPr lang="ja-JP" altLang="en-US" sz="1600" b="1" dirty="0">
+                <a:solidFill>
+                  <a:srgbClr val="FFFFFF"/>
+                </a:solidFill>
+                <a:latin typeface="Noto Sans JP" pitchFamily="34" charset="0"/>
+                <a:ea typeface="Noto Sans JP" pitchFamily="34" charset="-122"/>
+                <a:cs typeface="Noto Sans JP" pitchFamily="34" charset="-120"/>
+              </a:rPr>
+              <a:t>フェーズ4 サービスにする｜第7週</a:t>
+            </a:r>
+            <a:endParaRPr lang="ja-JP" sz="1600" dirty="0"/>
+          </a:p>
+        </p:txBody>
+      </p:sp>
+      <p:sp>
+        <p:nvSpPr>
+          <p:cNvPr id="6" name="card"/>
           <p:cNvSpPr/>
-          <p:nvPr>
-            <p:ph idx="100" type="title" hasCustomPrompt="1"/>
-          </p:nvPr>
-        </p:nvSpPr>
-        <p:spPr>
-          <a:xfrm>
-            <a:off x="548640" y="1691640"/>
-            <a:ext cx="5852160" cy="1371600"/>
-          </a:xfrm>
-          <a:prstGeom prst="rect">
-            <a:avLst/>
-          </a:prstGeom>
-          <a:noFill/>
-          <a:ln/>
-        </p:spPr>
-        <p:txBody>
-          <a:bodyPr wrap="square" lIns="0" tIns="0" rIns="0" bIns="0" rtlCol="0" anchor="t"/>
-          <a:lstStyle/>
-          <a:p>
-            <a:pPr algn="l" indent="0" marL="0">
-              <a:buNone/>
-            </a:pPr>
-            <a:r>
-              <a:rPr lang="en-US" sz="3200" b="1" dirty="0">
-                <a:solidFill>
-                  <a:schemeClr val="tx1"/>
-                </a:solidFill>
-              </a:rPr>
-              <a:t>安全に運用・改善する</a:t>
-            </a:r>
-            <a:endParaRPr lang="en-US" sz="3200" dirty="0"/>
-          </a:p>
-        </p:txBody>
-      </p:sp>
-      <p:sp>
-        <p:nvSpPr>
-          <p:cNvPr id="5" name="Text 0"/>
-          <p:cNvSpPr/>
-          <p:nvPr>
-            <p:ph idx="101" type="body" hasCustomPrompt="1"/>
-          </p:nvPr>
-        </p:nvSpPr>
-        <p:spPr>
-          <a:xfrm>
-            <a:off x="548640" y="3246120"/>
-            <a:ext cx="5852160" cy="457200"/>
-          </a:xfrm>
-          <a:prstGeom prst="rect">
-            <a:avLst/>
-          </a:prstGeom>
-          <a:noFill/>
-          <a:ln/>
-        </p:spPr>
-        <p:txBody>
-          <a:bodyPr wrap="square" lIns="0" tIns="0" rIns="0" bIns="0" rtlCol="0"/>
-          <a:lstStyle/>
-          <a:p>
-            <a:pPr indent="0" marL="0">
-              <a:buNone/>
-            </a:pPr>
-            <a:r>
-              <a:rPr lang="en-US" sz="1400" dirty="0">
-                <a:solidFill>
-                  <a:schemeClr val="tx1"/>
-                </a:solidFill>
-              </a:rPr>
-              <a:t>フェーズ4 サービスにする　｜　第7週</a:t>
-            </a:r>
-            <a:endParaRPr lang="en-US" sz="1400" dirty="0"/>
-          </a:p>
-        </p:txBody>
-      </p:sp>
-      <p:sp>
-        <p:nvSpPr>
-          <p:cNvPr id="6" name="title-circle"/>
-          <p:cNvSpPr/>
-          <p:nvPr/>
-        </p:nvSpPr>
-        <p:spPr>
-          <a:xfrm>
-            <a:off x="6537960" y="1188720"/>
-            <a:ext cx="2103120" cy="2103120"/>
-          </a:xfrm>
-          <a:prstGeom prst="ellipse">
-            <a:avLst/>
-          </a:prstGeom>
-          <a:solidFill>
-            <a:schemeClr val="bg1"/>
+          <p:nvPr/>
+        </p:nvSpPr>
+        <p:spPr>
+          <a:xfrm>
+            <a:off x="457200" y="3730752"/>
+            <a:ext cx="4937760" cy="896112"/>
+          </a:xfrm>
+          <a:prstGeom prst="roundRect">
+            <a:avLst>
+              <a:gd name="adj" fmla="val 10204"/>
+            </a:avLst>
+          </a:prstGeom>
+          <a:solidFill>
+            <a:srgbClr val="FFFFFF"/>
           </a:solidFill>
           <a:ln w="25400">
             <a:solidFill>
@@ -2218,38 +1994,76 @@
             <a:prstDash val="solid"/>
           </a:ln>
           <a:effectLst>
-            <a:outerShdw sx="100000" sy="100000" kx="0" ky="0" algn="bl" rotWithShape="0" blurRad="101600" dist="38100" dir="2700000">
-              <a:srgbClr val="000000">
-                <a:alpha val="18000"/>
+            <a:outerShdw sx="100000" sy="100000" kx="0" ky="0" algn="bl" rotWithShape="0" blurRad="101600" dist="50800" dir="2700000">
+              <a:srgbClr val="1A1A1A">
+                <a:alpha val="100000"/>
               </a:srgbClr>
             </a:outerShdw>
           </a:effectLst>
         </p:spPr>
       </p:sp>
-      <p:pic>
-        <p:nvPicPr>
-          <p:cNvPr id="7" name="title-icon" descr="preencoded.png">    </p:cNvPr>
-          <p:cNvPicPr>
-            <a:picLocks noChangeAspect="1"/>
-          </p:cNvPicPr>
-          <p:nvPr/>
-        </p:nvPicPr>
-        <p:blipFill>
-          <a:blip r:embed="rId1"/>
-          <a:stretch>
-            <a:fillRect/>
-          </a:stretch>
-        </p:blipFill>
-        <p:spPr>
-          <a:xfrm>
-            <a:off x="7086600" y="1737360"/>
-            <a:ext cx="1005840" cy="1005840"/>
-          </a:xfrm>
-          <a:prstGeom prst="rect">
-            <a:avLst/>
-          </a:prstGeom>
-        </p:spPr>
-      </p:pic>
+      <p:sp>
+        <p:nvSpPr>
+          <p:cNvPr id="7" name="Text 4"/>
+          <p:cNvSpPr txBox="1"/>
+          <p:nvPr/>
+        </p:nvSpPr>
+        <p:spPr>
+          <a:xfrm>
+            <a:off x="658368" y="3767328"/>
+            <a:ext cx="4572000" cy="822960"/>
+          </a:xfrm>
+          <a:prstGeom prst="rect">
+            <a:avLst/>
+          </a:prstGeom>
+          <a:noFill/>
+          <a:ln/>
+        </p:spPr>
+        <p:txBody>
+          <a:bodyPr wrap="square" lIns="0" tIns="0" rIns="0" bIns="0" rtlCol="0" anchor="ctr"/>
+          <a:lstStyle/>
+          <a:p>
+            <a:pPr indent="0" marL="0">
+              <a:spcAft>
+                <a:spcPts val="200"/>
+              </a:spcAft>
+              <a:buNone/>
+            </a:pPr>
+            <a:r>
+              <a:rPr lang="ja-JP" altLang="en-US" sz="1500" b="1" dirty="0">
+                <a:solidFill>
+                  <a:srgbClr val="1A1A1A"/>
+                </a:solidFill>
+                <a:latin typeface="Noto Sans JP" pitchFamily="34" charset="0"/>
+                <a:ea typeface="Noto Sans JP" pitchFamily="34" charset="-122"/>
+                <a:cs typeface="Noto Sans JP" pitchFamily="34" charset="-120"/>
+              </a:rPr>
+              <a:t>マナベル｜AI×Lark 構築者育成講座</a:t>
+            </a:r>
+            <a:endParaRPr lang="ja-JP" sz="1500" dirty="0"/>
+          </a:p>
+          <a:p>
+            <a:pPr indent="0" marL="0">
+              <a:spcAft>
+                <a:spcPts val="200"/>
+              </a:spcAft>
+              <a:buNone/>
+            </a:pPr>
+            <a:r>
+              <a:rPr lang="ja-JP" altLang="en-US" sz="1150" b="1" dirty="0">
+                <a:solidFill>
+                  <a:srgbClr val="DD6420"/>
+                </a:solidFill>
+                <a:latin typeface="Noto Sans JP" pitchFamily="34" charset="0"/>
+                <a:ea typeface="Noto Sans JP" pitchFamily="34" charset="-122"/>
+                <a:cs typeface="Noto Sans JP" pitchFamily="34" charset="-120"/>
+              </a:rPr>
+              <a:t>ささエール ／ OFFICE PLATA　笹原 彰朗</a:t>
+            </a:r>
+            <a:endParaRPr lang="ja-JP" sz="1500" dirty="0"/>
+          </a:p>
+        </p:txBody>
+      </p:sp>
     </p:spTree>
   </p:cSld>
   <p:clrMapOvr>
@@ -2278,15 +2092,58 @@
       <p:sp>
         <p:nvSpPr>
           <p:cNvPr id="2" name="Text 0"/>
-          <p:cNvSpPr/>
-          <p:nvPr>
-            <p:ph idx="100" type="title" hasCustomPrompt="1"/>
-          </p:nvPr>
-        </p:nvSpPr>
-        <p:spPr>
-          <a:xfrm>
-            <a:off x="548640" y="658368"/>
-            <a:ext cx="8046720" cy="566928"/>
+          <p:cNvSpPr txBox="1"/>
+          <p:nvPr/>
+        </p:nvSpPr>
+        <p:spPr>
+          <a:xfrm rot="-180000">
+            <a:off x="411480" y="201168"/>
+            <a:ext cx="1040587" cy="352044"/>
+          </a:xfrm>
+          <a:prstGeom prst="rect">
+            <a:avLst/>
+          </a:prstGeom>
+          <a:solidFill>
+            <a:srgbClr val="1A1A1A"/>
+          </a:solidFill>
+          <a:ln>
+            <a:solidFill>
+              <a:srgbClr val="1A1A1A"/>
+            </a:solidFill>
+          </a:ln>
+        </p:spPr>
+        <p:txBody>
+          <a:bodyPr wrap="square" lIns="0" tIns="0" rIns="0" bIns="0" rtlCol="0" anchor="ctr"/>
+          <a:lstStyle/>
+          <a:p>
+            <a:pPr algn="ctr" indent="0" marL="0">
+              <a:buNone/>
+            </a:pPr>
+            <a:r>
+              <a:rPr lang="ja-JP" altLang="en-US" sz="1100" dirty="0">
+                <a:solidFill>
+                  <a:srgbClr val="FFFFFF"/>
+                </a:solidFill>
+                <a:latin typeface="Dela Gothic One" pitchFamily="34" charset="0"/>
+                <a:ea typeface="けいふぉんと" pitchFamily="34" charset="-122"/>
+                <a:cs typeface="Dela Gothic One" pitchFamily="34" charset="-120"/>
+              </a:rPr>
+              <a:t>はじめに</a:t>
+            </a:r>
+            <a:endParaRPr lang="ja-JP" sz="1100" dirty="0"/>
+          </a:p>
+        </p:txBody>
+      </p:sp>
+      <p:sp>
+        <p:nvSpPr>
+          <p:cNvPr id="3" name="Text 1"/>
+          <p:cNvSpPr txBox="1"/>
+          <p:nvPr/>
+        </p:nvSpPr>
+        <p:spPr>
+          <a:xfrm>
+            <a:off x="411480" y="502920"/>
+            <a:ext cx="8321040" cy="685800"/>
           </a:xfrm>
           <a:prstGeom prst="rect">
             <a:avLst/>
@@ -2295,105 +2152,79 @@
           <a:ln/>
         </p:spPr>
         <p:txBody>
-          <a:bodyPr wrap="square" lIns="0" tIns="0" rIns="0" bIns="0" rtlCol="0" anchor="ctr"/>
-          <a:lstStyle/>
-          <a:p>
-            <a:pPr algn="l" indent="0" marL="0">
-              <a:buNone/>
-            </a:pPr>
-            <a:r>
-              <a:rPr lang="en-US" sz="2400" b="1" dirty="0">
-                <a:solidFill>
-                  <a:schemeClr val="tx1"/>
-                </a:solidFill>
+          <a:bodyPr wrap="square" lIns="0" tIns="0" rIns="0" bIns="0" rtlCol="0" anchor="ctr">
+            <a:normAutofit/>
+          </a:bodyPr>
+          <a:lstStyle/>
+          <a:p>
+            <a:pPr indent="0" marL="0">
+              <a:buNone/>
+            </a:pPr>
+            <a:r>
+              <a:rPr lang="ja-JP" altLang="en-US" sz="2600" dirty="0">
+                <a:solidFill>
+                  <a:srgbClr val="1A1A1A"/>
+                </a:solidFill>
+                <a:latin typeface="Dela Gothic One" pitchFamily="34" charset="0"/>
+                <a:ea typeface="けいふぉんと" pitchFamily="34" charset="-122"/>
+                <a:cs typeface="Dela Gothic One" pitchFamily="34" charset="-120"/>
               </a:rPr>
               <a:t>今日のゴールと流れ</a:t>
             </a:r>
-            <a:endParaRPr lang="en-US" sz="2400" dirty="0"/>
-          </a:p>
-        </p:txBody>
-      </p:sp>
-      <p:sp>
-        <p:nvSpPr>
-          <p:cNvPr id="3" name="chip"/>
+            <a:endParaRPr lang="ja-JP" sz="2600" dirty="0"/>
+          </a:p>
+        </p:txBody>
+      </p:sp>
+      <p:sp>
+        <p:nvSpPr>
+          <p:cNvPr id="4" name="card"/>
           <p:cNvSpPr/>
           <p:nvPr/>
         </p:nvSpPr>
         <p:spPr>
           <a:xfrm>
-            <a:off x="548640" y="292608"/>
-            <a:ext cx="932688" cy="292608"/>
+            <a:off x="502920" y="1371600"/>
+            <a:ext cx="3941064" cy="1280160"/>
           </a:xfrm>
           <a:prstGeom prst="roundRect">
             <a:avLst>
-              <a:gd name="adj" fmla="val 50000"/>
+              <a:gd name="adj" fmla="val 7143"/>
             </a:avLst>
           </a:prstGeom>
           <a:solidFill>
-            <a:schemeClr val="tx1"/>
-          </a:solidFill>
-          <a:ln w="12700">
+            <a:srgbClr val="FFFFFF"/>
+          </a:solidFill>
+          <a:ln w="25400">
             <a:solidFill>
-              <a:schemeClr val="tx1"/>
+              <a:srgbClr val="1A1A1A"/>
             </a:solidFill>
             <a:prstDash val="solid"/>
           </a:ln>
-        </p:spPr>
-      </p:sp>
-      <p:sp>
-        <p:nvSpPr>
-          <p:cNvPr id="4" name="chip-text"/>
-          <p:cNvSpPr txBox="1"/>
-          <p:nvPr/>
-        </p:nvSpPr>
-        <p:spPr>
-          <a:xfrm>
-            <a:off x="548640" y="292608"/>
-            <a:ext cx="932688" cy="292608"/>
-          </a:xfrm>
-          <a:prstGeom prst="rect">
-            <a:avLst/>
-          </a:prstGeom>
-          <a:noFill/>
-          <a:ln/>
-        </p:spPr>
-        <p:txBody>
-          <a:bodyPr wrap="square" lIns="0" tIns="0" rIns="0" bIns="0" rtlCol="0" anchor="ctr"/>
-          <a:lstStyle/>
-          <a:p>
-            <a:pPr algn="ctr" indent="0" marL="0">
-              <a:buNone/>
-            </a:pPr>
-            <a:r>
-              <a:rPr lang="en-US" sz="1100" b="1" dirty="0">
-                <a:solidFill>
-                  <a:schemeClr val="accent1"/>
-                </a:solidFill>
-              </a:rPr>
-              <a:t>はじめに</a:t>
-            </a:r>
-            <a:endParaRPr lang="en-US" sz="1100" dirty="0"/>
-          </a:p>
-        </p:txBody>
-      </p:sp>
-      <p:sp>
-        <p:nvSpPr>
-          <p:cNvPr id="5" name="card"/>
+          <a:effectLst>
+            <a:outerShdw sx="100000" sy="100000" kx="0" ky="0" algn="bl" rotWithShape="0" blurRad="101600" dist="50800" dir="2700000">
+              <a:srgbClr val="1A1A1A">
+                <a:alpha val="100000"/>
+              </a:srgbClr>
+            </a:outerShdw>
+          </a:effectLst>
+        </p:spPr>
+      </p:sp>
+      <p:sp>
+        <p:nvSpPr>
+          <p:cNvPr id="5" name="icon-circle"/>
           <p:cNvSpPr/>
           <p:nvPr/>
         </p:nvSpPr>
         <p:spPr>
           <a:xfrm>
-            <a:off x="548640" y="1417320"/>
-            <a:ext cx="3909060" cy="1280160"/>
-          </a:xfrm>
-          <a:prstGeom prst="roundRect">
-            <a:avLst>
-              <a:gd name="adj" fmla="val 8571"/>
-            </a:avLst>
-          </a:prstGeom>
-          <a:solidFill>
-            <a:schemeClr val="bg2"/>
+            <a:off x="685800" y="1572768"/>
+            <a:ext cx="438912" cy="438912"/>
+          </a:xfrm>
+          <a:prstGeom prst="ellipse">
+            <a:avLst/>
+          </a:prstGeom>
+          <a:solidFill>
+            <a:srgbClr val="DD6420"/>
           </a:solidFill>
           <a:ln w="19050">
             <a:solidFill>
@@ -2401,43 +2232,11 @@
             </a:solidFill>
             <a:prstDash val="solid"/>
           </a:ln>
-          <a:effectLst>
-            <a:outerShdw sx="100000" sy="100000" kx="0" ky="0" algn="bl" rotWithShape="0" blurRad="101600" dist="38100" dir="2700000">
-              <a:srgbClr val="000000">
-                <a:alpha val="18000"/>
-              </a:srgbClr>
-            </a:outerShdw>
-          </a:effectLst>
-        </p:spPr>
-      </p:sp>
-      <p:sp>
-        <p:nvSpPr>
-          <p:cNvPr id="6" name="icon-circle"/>
-          <p:cNvSpPr/>
-          <p:nvPr/>
-        </p:nvSpPr>
-        <p:spPr>
-          <a:xfrm>
-            <a:off x="731520" y="1600200"/>
-            <a:ext cx="411480" cy="411480"/>
-          </a:xfrm>
-          <a:prstGeom prst="ellipse">
-            <a:avLst/>
-          </a:prstGeom>
-          <a:solidFill>
-            <a:schemeClr val="accent1"/>
-          </a:solidFill>
-          <a:ln w="15875">
-            <a:solidFill>
-              <a:srgbClr val="1A1A1A"/>
-            </a:solidFill>
-            <a:prstDash val="solid"/>
-          </a:ln>
         </p:spPr>
       </p:sp>
       <p:pic>
         <p:nvPicPr>
-          <p:cNvPr id="7" name="icon" descr="preencoded.png">    </p:cNvPr>
+          <p:cNvPr id="6" name="icon" descr="preencoded.png">    </p:cNvPr>
           <p:cNvPicPr>
             <a:picLocks noChangeAspect="1"/>
           </p:cNvPicPr>
@@ -2451,8 +2250,8 @@
         </p:blipFill>
         <p:spPr>
           <a:xfrm>
-            <a:off x="838505" y="1707185"/>
-            <a:ext cx="197510" cy="197510"/>
+            <a:off x="795528" y="1682496"/>
+            <a:ext cx="219456" cy="219456"/>
           </a:xfrm>
           <a:prstGeom prst="rect">
             <a:avLst/>
@@ -2461,14 +2260,14 @@
       </p:pic>
       <p:sp>
         <p:nvSpPr>
-          <p:cNvPr id="8" name="goal"/>
+          <p:cNvPr id="7" name="goal"/>
           <p:cNvSpPr txBox="1"/>
           <p:nvPr/>
         </p:nvSpPr>
         <p:spPr>
           <a:xfrm>
-            <a:off x="1280160" y="1508760"/>
-            <a:ext cx="2994660" cy="1097280"/>
+            <a:off x="1252728" y="1463040"/>
+            <a:ext cx="3026664" cy="1097280"/>
           </a:xfrm>
           <a:prstGeom prst="rect">
             <a:avLst/>
@@ -2477,42 +2276,79 @@
           <a:ln/>
         </p:spPr>
         <p:txBody>
-          <a:bodyPr wrap="square" lIns="0" tIns="0" rIns="0" bIns="0" rtlCol="0" anchor="ctr"/>
+          <a:bodyPr wrap="square" lIns="0" tIns="0" rIns="0" bIns="0" rtlCol="0" anchor="ctr">
+            <a:normAutofit/>
+          </a:bodyPr>
           <a:lstStyle/>
           <a:p>
             <a:pPr indent="0" marL="0">
               <a:buNone/>
             </a:pPr>
             <a:r>
-              <a:rPr lang="en-US" sz="1400" b="1" dirty="0">
-                <a:solidFill>
-                  <a:schemeClr val="tx1"/>
-                </a:solidFill>
+              <a:rPr lang="ja-JP" altLang="en-US" sz="1400" b="1" dirty="0">
+                <a:solidFill>
+                  <a:srgbClr val="1A1A1A"/>
+                </a:solidFill>
+                <a:latin typeface="Noto Sans JP" pitchFamily="34" charset="0"/>
+                <a:ea typeface="Noto Sans JP" pitchFamily="34" charset="-122"/>
+                <a:cs typeface="Noto Sans JP" pitchFamily="34" charset="-120"/>
               </a:rPr>
               <a:t>「止めない・漏らさない・直せる」運用ルールがある</a:t>
             </a:r>
-            <a:endParaRPr lang="en-US" sz="1400" dirty="0"/>
-          </a:p>
-        </p:txBody>
-      </p:sp>
-      <p:sp>
-        <p:nvSpPr>
-          <p:cNvPr id="9" name="card"/>
+            <a:endParaRPr lang="ja-JP" sz="1400" dirty="0"/>
+          </a:p>
+        </p:txBody>
+      </p:sp>
+      <p:sp>
+        <p:nvSpPr>
+          <p:cNvPr id="8" name="card"/>
           <p:cNvSpPr/>
           <p:nvPr/>
         </p:nvSpPr>
         <p:spPr>
           <a:xfrm>
-            <a:off x="4686300" y="1417320"/>
-            <a:ext cx="3909060" cy="1280160"/>
+            <a:off x="4700016" y="1371600"/>
+            <a:ext cx="3941064" cy="1280160"/>
           </a:xfrm>
           <a:prstGeom prst="roundRect">
             <a:avLst>
-              <a:gd name="adj" fmla="val 8571"/>
+              <a:gd name="adj" fmla="val 7143"/>
             </a:avLst>
           </a:prstGeom>
           <a:solidFill>
-            <a:schemeClr val="bg2"/>
+            <a:srgbClr val="FFFFFF"/>
+          </a:solidFill>
+          <a:ln w="25400">
+            <a:solidFill>
+              <a:srgbClr val="1A1A1A"/>
+            </a:solidFill>
+            <a:prstDash val="solid"/>
+          </a:ln>
+          <a:effectLst>
+            <a:outerShdw sx="100000" sy="100000" kx="0" ky="0" algn="bl" rotWithShape="0" blurRad="101600" dist="50800" dir="2700000">
+              <a:srgbClr val="1A1A1A">
+                <a:alpha val="100000"/>
+              </a:srgbClr>
+            </a:outerShdw>
+          </a:effectLst>
+        </p:spPr>
+      </p:sp>
+      <p:sp>
+        <p:nvSpPr>
+          <p:cNvPr id="9" name="icon-circle"/>
+          <p:cNvSpPr/>
+          <p:nvPr/>
+        </p:nvSpPr>
+        <p:spPr>
+          <a:xfrm>
+            <a:off x="4882896" y="1572768"/>
+            <a:ext cx="438912" cy="438912"/>
+          </a:xfrm>
+          <a:prstGeom prst="ellipse">
+            <a:avLst/>
+          </a:prstGeom>
+          <a:solidFill>
+            <a:srgbClr val="DD6420"/>
           </a:solidFill>
           <a:ln w="19050">
             <a:solidFill>
@@ -2520,43 +2356,11 @@
             </a:solidFill>
             <a:prstDash val="solid"/>
           </a:ln>
-          <a:effectLst>
-            <a:outerShdw sx="100000" sy="100000" kx="0" ky="0" algn="bl" rotWithShape="0" blurRad="101600" dist="38100" dir="2700000">
-              <a:srgbClr val="000000">
-                <a:alpha val="18000"/>
-              </a:srgbClr>
-            </a:outerShdw>
-          </a:effectLst>
-        </p:spPr>
-      </p:sp>
-      <p:sp>
-        <p:nvSpPr>
-          <p:cNvPr id="10" name="icon-circle"/>
-          <p:cNvSpPr/>
-          <p:nvPr/>
-        </p:nvSpPr>
-        <p:spPr>
-          <a:xfrm>
-            <a:off x="4869180" y="1600200"/>
-            <a:ext cx="411480" cy="411480"/>
-          </a:xfrm>
-          <a:prstGeom prst="ellipse">
-            <a:avLst/>
-          </a:prstGeom>
-          <a:solidFill>
-            <a:schemeClr val="accent1"/>
-          </a:solidFill>
-          <a:ln w="15875">
-            <a:solidFill>
-              <a:srgbClr val="1A1A1A"/>
-            </a:solidFill>
-            <a:prstDash val="solid"/>
-          </a:ln>
         </p:spPr>
       </p:sp>
       <p:pic>
         <p:nvPicPr>
-          <p:cNvPr id="11" name="icon" descr="preencoded.png">    </p:cNvPr>
+          <p:cNvPr id="10" name="icon" descr="preencoded.png">    </p:cNvPr>
           <p:cNvPicPr>
             <a:picLocks noChangeAspect="1"/>
           </p:cNvPicPr>
@@ -2570,8 +2374,8 @@
         </p:blipFill>
         <p:spPr>
           <a:xfrm>
-            <a:off x="4976165" y="1707185"/>
-            <a:ext cx="197510" cy="197510"/>
+            <a:off x="4992624" y="1682496"/>
+            <a:ext cx="219456" cy="219456"/>
           </a:xfrm>
           <a:prstGeom prst="rect">
             <a:avLst/>
@@ -2580,14 +2384,14 @@
       </p:pic>
       <p:sp>
         <p:nvSpPr>
-          <p:cNvPr id="12" name="goal"/>
+          <p:cNvPr id="11" name="goal"/>
           <p:cNvSpPr txBox="1"/>
           <p:nvPr/>
         </p:nvSpPr>
         <p:spPr>
           <a:xfrm>
-            <a:off x="5417820" y="1508760"/>
-            <a:ext cx="2994660" cy="1097280"/>
+            <a:off x="5449824" y="1463040"/>
+            <a:ext cx="3026664" cy="1097280"/>
           </a:xfrm>
           <a:prstGeom prst="rect">
             <a:avLst/>
@@ -2596,59 +2400,105 @@
           <a:ln/>
         </p:spPr>
         <p:txBody>
+          <a:bodyPr wrap="square" lIns="0" tIns="0" rIns="0" bIns="0" rtlCol="0" anchor="ctr">
+            <a:normAutofit/>
+          </a:bodyPr>
+          <a:lstStyle/>
+          <a:p>
+            <a:pPr indent="0" marL="0">
+              <a:buNone/>
+            </a:pPr>
+            <a:r>
+              <a:rPr lang="ja-JP" altLang="en-US" sz="1400" b="1" dirty="0">
+                <a:solidFill>
+                  <a:srgbClr val="1A1A1A"/>
+                </a:solidFill>
+                <a:latin typeface="Noto Sans JP" pitchFamily="34" charset="0"/>
+                <a:ea typeface="Noto Sans JP" pitchFamily="34" charset="-122"/>
+                <a:cs typeface="Noto Sans JP" pitchFamily="34" charset="-120"/>
+              </a:rPr>
+              <a:t>改善要望を1つ、Claude Codeで直して公開できている</a:t>
+            </a:r>
+            <a:endParaRPr lang="ja-JP" sz="1400" dirty="0"/>
+          </a:p>
+        </p:txBody>
+      </p:sp>
+      <p:sp>
+        <p:nvSpPr>
+          <p:cNvPr id="12" name="Text 8"/>
+          <p:cNvSpPr txBox="1"/>
+          <p:nvPr/>
+        </p:nvSpPr>
+        <p:spPr>
+          <a:xfrm rot="-120000">
+            <a:off x="457200" y="2907792"/>
+            <a:ext cx="1915668" cy="352044"/>
+          </a:xfrm>
+          <a:prstGeom prst="rect">
+            <a:avLst/>
+          </a:prstGeom>
+          <a:solidFill>
+            <a:srgbClr val="1A1A1A"/>
+          </a:solidFill>
+          <a:ln>
+            <a:solidFill>
+              <a:srgbClr val="1A1A1A"/>
+            </a:solidFill>
+          </a:ln>
+        </p:spPr>
+        <p:txBody>
           <a:bodyPr wrap="square" lIns="0" tIns="0" rIns="0" bIns="0" rtlCol="0" anchor="ctr"/>
           <a:lstStyle/>
           <a:p>
-            <a:pPr indent="0" marL="0">
-              <a:buNone/>
-            </a:pPr>
-            <a:r>
-              <a:rPr lang="en-US" sz="1400" b="1" dirty="0">
-                <a:solidFill>
-                  <a:schemeClr val="tx1"/>
-                </a:solidFill>
-              </a:rPr>
-              <a:t>改善要望を1つ、Claude Codeで直して公開できている</a:t>
-            </a:r>
-            <a:endParaRPr lang="en-US" sz="1400" dirty="0"/>
-          </a:p>
-        </p:txBody>
-      </p:sp>
-      <p:sp>
-        <p:nvSpPr>
-          <p:cNvPr id="13" name="Text 9"/>
-          <p:cNvSpPr txBox="1"/>
-          <p:nvPr/>
-        </p:nvSpPr>
-        <p:spPr>
-          <a:xfrm>
-            <a:off x="548640" y="2971800"/>
-            <a:ext cx="3657600" cy="320040"/>
-          </a:xfrm>
-          <a:prstGeom prst="rect">
-            <a:avLst/>
-          </a:prstGeom>
-          <a:noFill/>
-          <a:ln/>
-        </p:spPr>
-        <p:txBody>
-          <a:bodyPr wrap="square" lIns="0" tIns="0" rIns="0" bIns="0" rtlCol="0" anchor="ctr"/>
-          <a:lstStyle/>
-          <a:p>
-            <a:pPr indent="0" marL="0">
-              <a:buNone/>
-            </a:pPr>
-            <a:r>
-              <a:rPr lang="en-US" sz="1300" b="1" dirty="0">
-                <a:solidFill>
-                  <a:schemeClr val="tx1"/>
-                </a:solidFill>
+            <a:pPr algn="ctr" indent="0" marL="0">
+              <a:buNone/>
+            </a:pPr>
+            <a:r>
+              <a:rPr lang="ja-JP" altLang="en-US" sz="1100" dirty="0">
+                <a:solidFill>
+                  <a:srgbClr val="FFFFFF"/>
+                </a:solidFill>
+                <a:latin typeface="Dela Gothic One" pitchFamily="34" charset="0"/>
+                <a:ea typeface="けいふぉんと" pitchFamily="34" charset="-122"/>
+                <a:cs typeface="Dela Gothic One" pitchFamily="34" charset="-120"/>
               </a:rPr>
               <a:t>今日の流れ（90分）</a:t>
             </a:r>
-            <a:endParaRPr lang="en-US" sz="1300" dirty="0"/>
-          </a:p>
-        </p:txBody>
+            <a:endParaRPr lang="ja-JP" sz="1100" dirty="0"/>
+          </a:p>
+        </p:txBody>
+      </p:sp>
+      <p:sp>
+        <p:nvSpPr>
+          <p:cNvPr id="13" name="Shape 9"/>
+          <p:cNvSpPr/>
+          <p:nvPr/>
+        </p:nvSpPr>
+        <p:spPr>
+          <a:xfrm>
+            <a:off x="502920" y="3364992"/>
+            <a:ext cx="8138160" cy="685800"/>
+          </a:xfrm>
+          <a:prstGeom prst="rect">
+            <a:avLst/>
+          </a:prstGeom>
+          <a:solidFill>
+            <a:srgbClr val="FFFFFF"/>
+          </a:solidFill>
+          <a:ln w="25400">
+            <a:solidFill>
+              <a:srgbClr val="1A1A1A"/>
+            </a:solidFill>
+            <a:prstDash val="solid"/>
+          </a:ln>
+          <a:effectLst>
+            <a:outerShdw sx="100000" sy="100000" kx="0" ky="0" algn="bl" rotWithShape="0" blurRad="101600" dist="50800" dir="2700000">
+              <a:srgbClr val="1A1A1A">
+                <a:alpha val="100000"/>
+              </a:srgbClr>
+            </a:outerShdw>
+          </a:effectLst>
+        </p:spPr>
       </p:sp>
       <p:sp>
         <p:nvSpPr>
@@ -2658,8 +2508,8 @@
         </p:nvSpPr>
         <p:spPr>
           <a:xfrm>
-            <a:off x="548640" y="3383280"/>
-            <a:ext cx="894080" cy="685800"/>
+            <a:off x="502920" y="3364992"/>
+            <a:ext cx="904240" cy="685800"/>
           </a:xfrm>
           <a:prstGeom prst="rect">
             <a:avLst/>
@@ -2683,8 +2533,8 @@
         </p:nvSpPr>
         <p:spPr>
           <a:xfrm>
-            <a:off x="548640" y="3383280"/>
-            <a:ext cx="894080" cy="685800"/>
+            <a:off x="502920" y="3364992"/>
+            <a:ext cx="904240" cy="685800"/>
           </a:xfrm>
           <a:prstGeom prst="rect">
             <a:avLst/>
@@ -2700,28 +2550,34 @@
               <a:buNone/>
             </a:pPr>
             <a:r>
-              <a:rPr lang="en-US" sz="1050" b="1" dirty="0">
+              <a:rPr lang="ja-JP" altLang="en-US" sz="1050" b="1" dirty="0">
                 <a:solidFill>
                   <a:srgbClr val="FFD600"/>
                 </a:solidFill>
+                <a:latin typeface="Noto Sans JP" pitchFamily="34" charset="0"/>
+                <a:ea typeface="Noto Sans JP" pitchFamily="34" charset="-122"/>
+                <a:cs typeface="Noto Sans JP" pitchFamily="34" charset="-120"/>
               </a:rPr>
               <a:t>ふりかえり</a:t>
             </a:r>
-            <a:endParaRPr lang="en-US" sz="1050" dirty="0"/>
+            <a:endParaRPr lang="ja-JP" sz="1050" dirty="0"/>
           </a:p>
           <a:p>
             <a:pPr algn="ctr" indent="0" marL="0">
               <a:buNone/>
             </a:pPr>
             <a:r>
-              <a:rPr lang="en-US" sz="900" b="1" dirty="0">
+              <a:rPr lang="ja-JP" altLang="en-US" sz="900" b="1" dirty="0">
                 <a:solidFill>
                   <a:srgbClr val="FFD600"/>
                 </a:solidFill>
+                <a:latin typeface="Noto Sans JP" pitchFamily="34" charset="0"/>
+                <a:ea typeface="Noto Sans JP" pitchFamily="34" charset="-122"/>
+                <a:cs typeface="Noto Sans JP" pitchFamily="34" charset="-120"/>
               </a:rPr>
               <a:t>10分</a:t>
             </a:r>
-            <a:endParaRPr lang="en-US" sz="1050" dirty="0"/>
+            <a:endParaRPr lang="ja-JP" sz="1050" dirty="0"/>
           </a:p>
         </p:txBody>
       </p:sp>
@@ -2733,8 +2589,8 @@
         </p:nvSpPr>
         <p:spPr>
           <a:xfrm>
-            <a:off x="1442720" y="3383280"/>
-            <a:ext cx="894080" cy="685800"/>
+            <a:off x="1407160" y="3364992"/>
+            <a:ext cx="904240" cy="685800"/>
           </a:xfrm>
           <a:prstGeom prst="rect">
             <a:avLst/>
@@ -2758,8 +2614,8 @@
         </p:nvSpPr>
         <p:spPr>
           <a:xfrm>
-            <a:off x="1442720" y="3383280"/>
-            <a:ext cx="894080" cy="685800"/>
+            <a:off x="1407160" y="3364992"/>
+            <a:ext cx="904240" cy="685800"/>
           </a:xfrm>
           <a:prstGeom prst="rect">
             <a:avLst/>
@@ -2775,28 +2631,34 @@
               <a:buNone/>
             </a:pPr>
             <a:r>
-              <a:rPr lang="en-US" sz="1050" b="1" dirty="0">
+              <a:rPr lang="ja-JP" altLang="en-US" sz="1050" b="1" dirty="0">
                 <a:solidFill>
                   <a:srgbClr val="FFD600"/>
                 </a:solidFill>
+                <a:latin typeface="Noto Sans JP" pitchFamily="34" charset="0"/>
+                <a:ea typeface="Noto Sans JP" pitchFamily="34" charset="-122"/>
+                <a:cs typeface="Noto Sans JP" pitchFamily="34" charset="-120"/>
               </a:rPr>
               <a:t>説明①</a:t>
             </a:r>
-            <a:endParaRPr lang="en-US" sz="1050" dirty="0"/>
+            <a:endParaRPr lang="ja-JP" sz="1050" dirty="0"/>
           </a:p>
           <a:p>
             <a:pPr algn="ctr" indent="0" marL="0">
               <a:buNone/>
             </a:pPr>
             <a:r>
-              <a:rPr lang="en-US" sz="900" b="1" dirty="0">
+              <a:rPr lang="ja-JP" altLang="en-US" sz="900" b="1" dirty="0">
                 <a:solidFill>
                   <a:srgbClr val="FFD600"/>
                 </a:solidFill>
+                <a:latin typeface="Noto Sans JP" pitchFamily="34" charset="0"/>
+                <a:ea typeface="Noto Sans JP" pitchFamily="34" charset="-122"/>
+                <a:cs typeface="Noto Sans JP" pitchFamily="34" charset="-120"/>
               </a:rPr>
               <a:t>10分</a:t>
             </a:r>
-            <a:endParaRPr lang="en-US" sz="1050" dirty="0"/>
+            <a:endParaRPr lang="ja-JP" sz="1050" dirty="0"/>
           </a:p>
         </p:txBody>
       </p:sp>
@@ -2808,8 +2670,8 @@
         </p:nvSpPr>
         <p:spPr>
           <a:xfrm>
-            <a:off x="2336800" y="3383280"/>
-            <a:ext cx="1788160" cy="685800"/>
+            <a:off x="2311400" y="3364992"/>
+            <a:ext cx="1808480" cy="685800"/>
           </a:xfrm>
           <a:prstGeom prst="rect">
             <a:avLst/>
@@ -2833,8 +2695,8 @@
         </p:nvSpPr>
         <p:spPr>
           <a:xfrm>
-            <a:off x="2336800" y="3383280"/>
-            <a:ext cx="1788160" cy="685800"/>
+            <a:off x="2311400" y="3364992"/>
+            <a:ext cx="1808480" cy="685800"/>
           </a:xfrm>
           <a:prstGeom prst="rect">
             <a:avLst/>
@@ -2850,28 +2712,34 @@
               <a:buNone/>
             </a:pPr>
             <a:r>
-              <a:rPr lang="en-US" sz="1050" b="1" dirty="0">
+              <a:rPr lang="ja-JP" altLang="en-US" sz="1050" b="1" dirty="0">
                 <a:solidFill>
                   <a:srgbClr val="FFFFFF"/>
                 </a:solidFill>
+                <a:latin typeface="Noto Sans JP" pitchFamily="34" charset="0"/>
+                <a:ea typeface="Noto Sans JP" pitchFamily="34" charset="-122"/>
+                <a:cs typeface="Noto Sans JP" pitchFamily="34" charset="-120"/>
               </a:rPr>
               <a:t>ハンズオン①</a:t>
             </a:r>
-            <a:endParaRPr lang="en-US" sz="1050" dirty="0"/>
+            <a:endParaRPr lang="ja-JP" sz="1050" dirty="0"/>
           </a:p>
           <a:p>
             <a:pPr algn="ctr" indent="0" marL="0">
               <a:buNone/>
             </a:pPr>
             <a:r>
-              <a:rPr lang="en-US" sz="900" b="1" dirty="0">
+              <a:rPr lang="ja-JP" altLang="en-US" sz="900" b="1" dirty="0">
                 <a:solidFill>
                   <a:srgbClr val="FFFFFF"/>
                 </a:solidFill>
+                <a:latin typeface="Noto Sans JP" pitchFamily="34" charset="0"/>
+                <a:ea typeface="Noto Sans JP" pitchFamily="34" charset="-122"/>
+                <a:cs typeface="Noto Sans JP" pitchFamily="34" charset="-120"/>
               </a:rPr>
               <a:t>20分</a:t>
             </a:r>
-            <a:endParaRPr lang="en-US" sz="1050" dirty="0"/>
+            <a:endParaRPr lang="ja-JP" sz="1050" dirty="0"/>
           </a:p>
         </p:txBody>
       </p:sp>
@@ -2883,8 +2751,8 @@
         </p:nvSpPr>
         <p:spPr>
           <a:xfrm>
-            <a:off x="4124960" y="3383280"/>
-            <a:ext cx="894080" cy="685800"/>
+            <a:off x="4119880" y="3364992"/>
+            <a:ext cx="904240" cy="685800"/>
           </a:xfrm>
           <a:prstGeom prst="rect">
             <a:avLst/>
@@ -2908,8 +2776,8 @@
         </p:nvSpPr>
         <p:spPr>
           <a:xfrm>
-            <a:off x="4124960" y="3383280"/>
-            <a:ext cx="894080" cy="685800"/>
+            <a:off x="4119880" y="3364992"/>
+            <a:ext cx="904240" cy="685800"/>
           </a:xfrm>
           <a:prstGeom prst="rect">
             <a:avLst/>
@@ -2925,28 +2793,34 @@
               <a:buNone/>
             </a:pPr>
             <a:r>
-              <a:rPr lang="en-US" sz="1050" b="1" dirty="0">
+              <a:rPr lang="ja-JP" altLang="en-US" sz="1050" b="1" dirty="0">
                 <a:solidFill>
                   <a:srgbClr val="FFD600"/>
                 </a:solidFill>
+                <a:latin typeface="Noto Sans JP" pitchFamily="34" charset="0"/>
+                <a:ea typeface="Noto Sans JP" pitchFamily="34" charset="-122"/>
+                <a:cs typeface="Noto Sans JP" pitchFamily="34" charset="-120"/>
               </a:rPr>
               <a:t>説明②</a:t>
             </a:r>
-            <a:endParaRPr lang="en-US" sz="1050" dirty="0"/>
+            <a:endParaRPr lang="ja-JP" sz="1050" dirty="0"/>
           </a:p>
           <a:p>
             <a:pPr algn="ctr" indent="0" marL="0">
               <a:buNone/>
             </a:pPr>
             <a:r>
-              <a:rPr lang="en-US" sz="900" b="1" dirty="0">
+              <a:rPr lang="ja-JP" altLang="en-US" sz="900" b="1" dirty="0">
                 <a:solidFill>
                   <a:srgbClr val="FFD600"/>
                 </a:solidFill>
+                <a:latin typeface="Noto Sans JP" pitchFamily="34" charset="0"/>
+                <a:ea typeface="Noto Sans JP" pitchFamily="34" charset="-122"/>
+                <a:cs typeface="Noto Sans JP" pitchFamily="34" charset="-120"/>
               </a:rPr>
               <a:t>10分</a:t>
             </a:r>
-            <a:endParaRPr lang="en-US" sz="1050" dirty="0"/>
+            <a:endParaRPr lang="ja-JP" sz="1050" dirty="0"/>
           </a:p>
         </p:txBody>
       </p:sp>
@@ -2958,8 +2832,8 @@
         </p:nvSpPr>
         <p:spPr>
           <a:xfrm>
-            <a:off x="5019040" y="3383280"/>
-            <a:ext cx="1788160" cy="685800"/>
+            <a:off x="5024120" y="3364992"/>
+            <a:ext cx="1808480" cy="685800"/>
           </a:xfrm>
           <a:prstGeom prst="rect">
             <a:avLst/>
@@ -2983,8 +2857,8 @@
         </p:nvSpPr>
         <p:spPr>
           <a:xfrm>
-            <a:off x="5019040" y="3383280"/>
-            <a:ext cx="1788160" cy="685800"/>
+            <a:off x="5024120" y="3364992"/>
+            <a:ext cx="1808480" cy="685800"/>
           </a:xfrm>
           <a:prstGeom prst="rect">
             <a:avLst/>
@@ -3000,28 +2874,34 @@
               <a:buNone/>
             </a:pPr>
             <a:r>
-              <a:rPr lang="en-US" sz="1050" b="1" dirty="0">
+              <a:rPr lang="ja-JP" altLang="en-US" sz="1050" b="1" dirty="0">
                 <a:solidFill>
                   <a:srgbClr val="FFFFFF"/>
                 </a:solidFill>
+                <a:latin typeface="Noto Sans JP" pitchFamily="34" charset="0"/>
+                <a:ea typeface="Noto Sans JP" pitchFamily="34" charset="-122"/>
+                <a:cs typeface="Noto Sans JP" pitchFamily="34" charset="-120"/>
               </a:rPr>
               <a:t>ハンズオン②</a:t>
             </a:r>
-            <a:endParaRPr lang="en-US" sz="1050" dirty="0"/>
+            <a:endParaRPr lang="ja-JP" sz="1050" dirty="0"/>
           </a:p>
           <a:p>
             <a:pPr algn="ctr" indent="0" marL="0">
               <a:buNone/>
             </a:pPr>
             <a:r>
-              <a:rPr lang="en-US" sz="900" b="1" dirty="0">
+              <a:rPr lang="ja-JP" altLang="en-US" sz="900" b="1" dirty="0">
                 <a:solidFill>
                   <a:srgbClr val="FFFFFF"/>
                 </a:solidFill>
+                <a:latin typeface="Noto Sans JP" pitchFamily="34" charset="0"/>
+                <a:ea typeface="Noto Sans JP" pitchFamily="34" charset="-122"/>
+                <a:cs typeface="Noto Sans JP" pitchFamily="34" charset="-120"/>
               </a:rPr>
               <a:t>20分</a:t>
             </a:r>
-            <a:endParaRPr lang="en-US" sz="1050" dirty="0"/>
+            <a:endParaRPr lang="ja-JP" sz="1050" dirty="0"/>
           </a:p>
         </p:txBody>
       </p:sp>
@@ -3033,8 +2913,8 @@
         </p:nvSpPr>
         <p:spPr>
           <a:xfrm>
-            <a:off x="6807200" y="3383280"/>
-            <a:ext cx="1341120" cy="685800"/>
+            <a:off x="6832600" y="3364992"/>
+            <a:ext cx="1356360" cy="685800"/>
           </a:xfrm>
           <a:prstGeom prst="rect">
             <a:avLst/>
@@ -3058,8 +2938,8 @@
         </p:nvSpPr>
         <p:spPr>
           <a:xfrm>
-            <a:off x="6807200" y="3383280"/>
-            <a:ext cx="1341120" cy="685800"/>
+            <a:off x="6832600" y="3364992"/>
+            <a:ext cx="1356360" cy="685800"/>
           </a:xfrm>
           <a:prstGeom prst="rect">
             <a:avLst/>
@@ -3075,28 +2955,34 @@
               <a:buNone/>
             </a:pPr>
             <a:r>
-              <a:rPr lang="en-US" sz="1050" b="1" dirty="0">
+              <a:rPr lang="ja-JP" altLang="en-US" sz="1050" b="1" dirty="0">
                 <a:solidFill>
                   <a:srgbClr val="FFD600"/>
                 </a:solidFill>
+                <a:latin typeface="Noto Sans JP" pitchFamily="34" charset="0"/>
+                <a:ea typeface="Noto Sans JP" pitchFamily="34" charset="-122"/>
+                <a:cs typeface="Noto Sans JP" pitchFamily="34" charset="-120"/>
               </a:rPr>
               <a:t>質問・共有</a:t>
             </a:r>
-            <a:endParaRPr lang="en-US" sz="1050" dirty="0"/>
+            <a:endParaRPr lang="ja-JP" sz="1050" dirty="0"/>
           </a:p>
           <a:p>
             <a:pPr algn="ctr" indent="0" marL="0">
               <a:buNone/>
             </a:pPr>
             <a:r>
-              <a:rPr lang="en-US" sz="900" b="1" dirty="0">
+              <a:rPr lang="ja-JP" altLang="en-US" sz="900" b="1" dirty="0">
                 <a:solidFill>
                   <a:srgbClr val="FFD600"/>
                 </a:solidFill>
+                <a:latin typeface="Noto Sans JP" pitchFamily="34" charset="0"/>
+                <a:ea typeface="Noto Sans JP" pitchFamily="34" charset="-122"/>
+                <a:cs typeface="Noto Sans JP" pitchFamily="34" charset="-120"/>
               </a:rPr>
               <a:t>15分</a:t>
             </a:r>
-            <a:endParaRPr lang="en-US" sz="1050" dirty="0"/>
+            <a:endParaRPr lang="ja-JP" sz="1050" dirty="0"/>
           </a:p>
         </p:txBody>
       </p:sp>
@@ -3108,8 +2994,8 @@
         </p:nvSpPr>
         <p:spPr>
           <a:xfrm>
-            <a:off x="8148320" y="3383280"/>
-            <a:ext cx="447040" cy="685800"/>
+            <a:off x="8188960" y="3364992"/>
+            <a:ext cx="452120" cy="685800"/>
           </a:xfrm>
           <a:prstGeom prst="rect">
             <a:avLst/>
@@ -3133,8 +3019,8 @@
         </p:nvSpPr>
         <p:spPr>
           <a:xfrm>
-            <a:off x="8148320" y="3383280"/>
-            <a:ext cx="447040" cy="685800"/>
+            <a:off x="8188960" y="3364992"/>
+            <a:ext cx="452120" cy="685800"/>
           </a:xfrm>
           <a:prstGeom prst="rect">
             <a:avLst/>
@@ -3150,28 +3036,34 @@
               <a:buNone/>
             </a:pPr>
             <a:r>
-              <a:rPr lang="en-US" sz="850" b="1" dirty="0">
+              <a:rPr lang="ja-JP" altLang="en-US" sz="850" b="1" dirty="0">
                 <a:solidFill>
                   <a:srgbClr val="FFD600"/>
                 </a:solidFill>
+                <a:latin typeface="Noto Sans JP" pitchFamily="34" charset="0"/>
+                <a:ea typeface="Noto Sans JP" pitchFamily="34" charset="-122"/>
+                <a:cs typeface="Noto Sans JP" pitchFamily="34" charset="-120"/>
               </a:rPr>
               <a:t>宿題</a:t>
             </a:r>
-            <a:endParaRPr lang="en-US" sz="850" dirty="0"/>
+            <a:endParaRPr lang="ja-JP" sz="850" dirty="0"/>
           </a:p>
           <a:p>
             <a:pPr algn="ctr" indent="0" marL="0">
               <a:buNone/>
             </a:pPr>
             <a:r>
-              <a:rPr lang="en-US" sz="900" b="1" dirty="0">
+              <a:rPr lang="ja-JP" altLang="en-US" sz="900" b="1" dirty="0">
                 <a:solidFill>
                   <a:srgbClr val="FFD600"/>
                 </a:solidFill>
+                <a:latin typeface="Noto Sans JP" pitchFamily="34" charset="0"/>
+                <a:ea typeface="Noto Sans JP" pitchFamily="34" charset="-122"/>
+                <a:cs typeface="Noto Sans JP" pitchFamily="34" charset="-120"/>
               </a:rPr>
               <a:t>5分</a:t>
             </a:r>
-            <a:endParaRPr lang="en-US" sz="850" dirty="0"/>
+            <a:endParaRPr lang="ja-JP" sz="850" dirty="0"/>
           </a:p>
         </p:txBody>
       </p:sp>
@@ -3183,7 +3075,7 @@
         </p:nvSpPr>
         <p:spPr>
           <a:xfrm>
-            <a:off x="548640" y="4160520"/>
+            <a:off x="502920" y="4187952"/>
             <a:ext cx="3657600" cy="274320"/>
           </a:xfrm>
           <a:prstGeom prst="rect">
@@ -3200,10 +3092,13 @@
               <a:buNone/>
             </a:pPr>
             <a:r>
-              <a:rPr lang="en-US" sz="1000" dirty="0">
+              <a:rPr lang="ja-JP" altLang="en-US" sz="1050" b="1" dirty="0">
                 <a:solidFill>
                   <a:srgbClr val="1A1A1A"/>
                 </a:solidFill>
+                <a:latin typeface="Noto Sans JP" pitchFamily="34" charset="0"/>
+                <a:ea typeface="Noto Sans JP" pitchFamily="34" charset="-122"/>
+                <a:cs typeface="Noto Sans JP" pitchFamily="34" charset="-120"/>
               </a:rPr>
               <a:t>■ </a:t>
             </a:r>
@@ -3211,10 +3106,13 @@
               <a:buNone/>
             </a:pPr>
             <a:r>
-              <a:rPr lang="en-US" sz="1000" dirty="0">
-                <a:solidFill>
-                  <a:schemeClr val="tx2"/>
-                </a:solidFill>
+              <a:rPr lang="ja-JP" altLang="en-US" sz="1050" b="1" dirty="0">
+                <a:solidFill>
+                  <a:srgbClr val="1A1A1A"/>
+                </a:solidFill>
+                <a:latin typeface="Noto Sans JP" pitchFamily="34" charset="0"/>
+                <a:ea typeface="Noto Sans JP" pitchFamily="34" charset="-122"/>
+                <a:cs typeface="Noto Sans JP" pitchFamily="34" charset="-120"/>
               </a:rPr>
               <a:t>聞く　</a:t>
             </a:r>
@@ -3222,10 +3120,13 @@
               <a:buNone/>
             </a:pPr>
             <a:r>
-              <a:rPr lang="en-US" sz="1000" dirty="0">
+              <a:rPr lang="ja-JP" altLang="en-US" sz="1050" b="1" dirty="0">
                 <a:solidFill>
                   <a:srgbClr val="DD6420"/>
                 </a:solidFill>
+                <a:latin typeface="Noto Sans JP" pitchFamily="34" charset="0"/>
+                <a:ea typeface="Noto Sans JP" pitchFamily="34" charset="-122"/>
+                <a:cs typeface="Noto Sans JP" pitchFamily="34" charset="-120"/>
               </a:rPr>
               <a:t>■ </a:t>
             </a:r>
@@ -3233,14 +3134,17 @@
               <a:buNone/>
             </a:pPr>
             <a:r>
-              <a:rPr lang="en-US" sz="1000" dirty="0">
-                <a:solidFill>
-                  <a:schemeClr val="tx2"/>
-                </a:solidFill>
+              <a:rPr lang="ja-JP" altLang="en-US" sz="1050" b="1" dirty="0">
+                <a:solidFill>
+                  <a:srgbClr val="1A1A1A"/>
+                </a:solidFill>
+                <a:latin typeface="Noto Sans JP" pitchFamily="34" charset="0"/>
+                <a:ea typeface="Noto Sans JP" pitchFamily="34" charset="-122"/>
+                <a:cs typeface="Noto Sans JP" pitchFamily="34" charset="-120"/>
               </a:rPr>
               <a:t>手を動かす</a:t>
             </a:r>
-            <a:endParaRPr lang="en-US" sz="1000" dirty="0"/>
+            <a:endParaRPr lang="ja-JP" sz="1050" dirty="0"/>
           </a:p>
         </p:txBody>
       </p:sp>
@@ -3256,8 +3160,8 @@
         </p:nvSpPr>
         <p:spPr>
           <a:xfrm>
-            <a:off x="8229600" y="4773168"/>
-            <a:ext cx="365760" cy="228600"/>
+            <a:off x="8366760" y="4754880"/>
+            <a:ext cx="365760" cy="274320"/>
           </a:xfrm>
           <a:prstGeom prst="rect">
             <a:avLst/>
@@ -3269,20 +3173,23 @@
           </a:extLst>
         </p:spPr>
         <p:txBody>
-          <a:bodyPr/>
+          <a:bodyPr anchor="ctr"/>
           <a:lstStyle>
             <a:lvl1pPr>
-              <a:defRPr sz="900">
-                <a:solidFill>
-                  <a:srgbClr val="5A6872"/>
-                </a:solidFill>
+              <a:defRPr sz="850">
+                <a:solidFill>
+                  <a:srgbClr val="FFFFFF"/>
+                </a:solidFill>
+                <a:latin typeface="Noto Sans JP"/>
+                <a:ea typeface="Noto Sans JP"/>
+                <a:cs typeface="Noto Sans JP"/>
               </a:defRPr>
             </a:lvl1pPr>
           </a:lstStyle>
           <a:p>
             <a:pPr algn="r"/>
             <a:fld id="{F7021451-1387-4CA6-816F-3879F97B5CBC}" type="slidenum">
-              <a:rPr b="0" lang="en-US"/>
+              <a:rPr b="1" lang="en-US"/>
               <a:t>2</a:t>
             </a:fld>
             <a:endParaRPr lang="en-US"/>
@@ -3317,15 +3224,58 @@
       <p:sp>
         <p:nvSpPr>
           <p:cNvPr id="2" name="Text 0"/>
-          <p:cNvSpPr/>
-          <p:nvPr>
-            <p:ph idx="100" type="title" hasCustomPrompt="1"/>
-          </p:nvPr>
-        </p:nvSpPr>
-        <p:spPr>
-          <a:xfrm>
-            <a:off x="548640" y="658368"/>
-            <a:ext cx="8046720" cy="566928"/>
+          <p:cNvSpPr txBox="1"/>
+          <p:nvPr/>
+        </p:nvSpPr>
+        <p:spPr>
+          <a:xfrm rot="-180000">
+            <a:off x="411480" y="201168"/>
+            <a:ext cx="1478128" cy="352044"/>
+          </a:xfrm>
+          <a:prstGeom prst="rect">
+            <a:avLst/>
+          </a:prstGeom>
+          <a:solidFill>
+            <a:srgbClr val="1A1A1A"/>
+          </a:solidFill>
+          <a:ln>
+            <a:solidFill>
+              <a:srgbClr val="1A1A1A"/>
+            </a:solidFill>
+          </a:ln>
+        </p:spPr>
+        <p:txBody>
+          <a:bodyPr wrap="square" lIns="0" tIns="0" rIns="0" bIns="0" rtlCol="0" anchor="ctr"/>
+          <a:lstStyle/>
+          <a:p>
+            <a:pPr algn="ctr" indent="0" marL="0">
+              <a:buNone/>
+            </a:pPr>
+            <a:r>
+              <a:rPr lang="ja-JP" altLang="en-US" sz="1100" dirty="0">
+                <a:solidFill>
+                  <a:srgbClr val="FFFFFF"/>
+                </a:solidFill>
+                <a:latin typeface="Dela Gothic One" pitchFamily="34" charset="0"/>
+                <a:ea typeface="けいふぉんと" pitchFamily="34" charset="-122"/>
+                <a:cs typeface="Dela Gothic One" pitchFamily="34" charset="-120"/>
+              </a:rPr>
+              <a:t>説明① 10分</a:t>
+            </a:r>
+            <a:endParaRPr lang="ja-JP" sz="1100" dirty="0"/>
+          </a:p>
+        </p:txBody>
+      </p:sp>
+      <p:sp>
+        <p:nvSpPr>
+          <p:cNvPr id="3" name="Text 1"/>
+          <p:cNvSpPr txBox="1"/>
+          <p:nvPr/>
+        </p:nvSpPr>
+        <p:spPr>
+          <a:xfrm>
+            <a:off x="411480" y="502920"/>
+            <a:ext cx="8321040" cy="685800"/>
           </a:xfrm>
           <a:prstGeom prst="rect">
             <a:avLst/>
@@ -3334,105 +3284,79 @@
           <a:ln/>
         </p:spPr>
         <p:txBody>
-          <a:bodyPr wrap="square" lIns="0" tIns="0" rIns="0" bIns="0" rtlCol="0" anchor="ctr"/>
-          <a:lstStyle/>
-          <a:p>
-            <a:pPr algn="l" indent="0" marL="0">
-              <a:buNone/>
-            </a:pPr>
-            <a:r>
-              <a:rPr lang="en-US" sz="2400" b="1" dirty="0">
-                <a:solidFill>
-                  <a:schemeClr val="tx1"/>
-                </a:solidFill>
+          <a:bodyPr wrap="square" lIns="0" tIns="0" rIns="0" bIns="0" rtlCol="0" anchor="ctr">
+            <a:normAutofit/>
+          </a:bodyPr>
+          <a:lstStyle/>
+          <a:p>
+            <a:pPr indent="0" marL="0">
+              <a:buNone/>
+            </a:pPr>
+            <a:r>
+              <a:rPr lang="ja-JP" altLang="en-US" sz="2600" dirty="0">
+                <a:solidFill>
+                  <a:srgbClr val="1A1A1A"/>
+                </a:solidFill>
+                <a:latin typeface="Dela Gothic One" pitchFamily="34" charset="0"/>
+                <a:ea typeface="けいふぉんと" pitchFamily="34" charset="-122"/>
+                <a:cs typeface="Dela Gothic One" pitchFamily="34" charset="-120"/>
               </a:rPr>
               <a:t>運用で気をつける4つ</a:t>
             </a:r>
-            <a:endParaRPr lang="en-US" sz="2400" dirty="0"/>
-          </a:p>
-        </p:txBody>
-      </p:sp>
-      <p:sp>
-        <p:nvSpPr>
-          <p:cNvPr id="3" name="chip"/>
+            <a:endParaRPr lang="ja-JP" sz="2600" dirty="0"/>
+          </a:p>
+        </p:txBody>
+      </p:sp>
+      <p:sp>
+        <p:nvSpPr>
+          <p:cNvPr id="4" name="card"/>
           <p:cNvSpPr/>
           <p:nvPr/>
         </p:nvSpPr>
         <p:spPr>
           <a:xfrm>
-            <a:off x="548640" y="292608"/>
-            <a:ext cx="1344168" cy="292608"/>
+            <a:off x="502920" y="1417320"/>
+            <a:ext cx="3941064" cy="1106424"/>
           </a:xfrm>
           <a:prstGeom prst="roundRect">
             <a:avLst>
-              <a:gd name="adj" fmla="val 50000"/>
+              <a:gd name="adj" fmla="val 8264"/>
             </a:avLst>
           </a:prstGeom>
           <a:solidFill>
-            <a:schemeClr val="tx1"/>
-          </a:solidFill>
-          <a:ln w="12700">
+            <a:srgbClr val="FFFFFF"/>
+          </a:solidFill>
+          <a:ln w="25400">
             <a:solidFill>
-              <a:schemeClr val="tx1"/>
+              <a:srgbClr val="1A1A1A"/>
             </a:solidFill>
             <a:prstDash val="solid"/>
           </a:ln>
-        </p:spPr>
-      </p:sp>
-      <p:sp>
-        <p:nvSpPr>
-          <p:cNvPr id="4" name="chip-text"/>
-          <p:cNvSpPr txBox="1"/>
-          <p:nvPr/>
-        </p:nvSpPr>
-        <p:spPr>
-          <a:xfrm>
-            <a:off x="548640" y="292608"/>
-            <a:ext cx="1344168" cy="292608"/>
-          </a:xfrm>
-          <a:prstGeom prst="rect">
-            <a:avLst/>
-          </a:prstGeom>
-          <a:noFill/>
-          <a:ln/>
-        </p:spPr>
-        <p:txBody>
-          <a:bodyPr wrap="square" lIns="0" tIns="0" rIns="0" bIns="0" rtlCol="0" anchor="ctr"/>
-          <a:lstStyle/>
-          <a:p>
-            <a:pPr algn="ctr" indent="0" marL="0">
-              <a:buNone/>
-            </a:pPr>
-            <a:r>
-              <a:rPr lang="en-US" sz="1100" b="1" dirty="0">
-                <a:solidFill>
-                  <a:schemeClr val="accent1"/>
-                </a:solidFill>
-              </a:rPr>
-              <a:t>説明① 10分</a:t>
-            </a:r>
-            <a:endParaRPr lang="en-US" sz="1100" dirty="0"/>
-          </a:p>
-        </p:txBody>
-      </p:sp>
-      <p:sp>
-        <p:nvSpPr>
-          <p:cNvPr id="5" name="card"/>
+          <a:effectLst>
+            <a:outerShdw sx="100000" sy="100000" kx="0" ky="0" algn="bl" rotWithShape="0" blurRad="101600" dist="50800" dir="2700000">
+              <a:srgbClr val="1A1A1A">
+                <a:alpha val="100000"/>
+              </a:srgbClr>
+            </a:outerShdw>
+          </a:effectLst>
+        </p:spPr>
+      </p:sp>
+      <p:sp>
+        <p:nvSpPr>
+          <p:cNvPr id="5" name="icon-circle"/>
           <p:cNvSpPr/>
           <p:nvPr/>
         </p:nvSpPr>
         <p:spPr>
           <a:xfrm>
-            <a:off x="548640" y="1463040"/>
-            <a:ext cx="3909060" cy="1120140"/>
-          </a:xfrm>
-          <a:prstGeom prst="roundRect">
-            <a:avLst>
-              <a:gd name="adj" fmla="val 9796"/>
-            </a:avLst>
-          </a:prstGeom>
-          <a:solidFill>
-            <a:schemeClr val="bg1"/>
+            <a:off x="685800" y="1572768"/>
+            <a:ext cx="384048" cy="384048"/>
+          </a:xfrm>
+          <a:prstGeom prst="ellipse">
+            <a:avLst/>
+          </a:prstGeom>
+          <a:solidFill>
+            <a:srgbClr val="DD6420"/>
           </a:solidFill>
           <a:ln w="19050">
             <a:solidFill>
@@ -3440,43 +3364,11 @@
             </a:solidFill>
             <a:prstDash val="solid"/>
           </a:ln>
-          <a:effectLst>
-            <a:outerShdw sx="100000" sy="100000" kx="0" ky="0" algn="bl" rotWithShape="0" blurRad="101600" dist="38100" dir="2700000">
-              <a:srgbClr val="000000">
-                <a:alpha val="18000"/>
-              </a:srgbClr>
-            </a:outerShdw>
-          </a:effectLst>
-        </p:spPr>
-      </p:sp>
-      <p:sp>
-        <p:nvSpPr>
-          <p:cNvPr id="6" name="icon-circle"/>
-          <p:cNvSpPr/>
-          <p:nvPr/>
-        </p:nvSpPr>
-        <p:spPr>
-          <a:xfrm>
-            <a:off x="731520" y="1645920"/>
-            <a:ext cx="384048" cy="384048"/>
-          </a:xfrm>
-          <a:prstGeom prst="ellipse">
-            <a:avLst/>
-          </a:prstGeom>
-          <a:solidFill>
-            <a:schemeClr val="accent1"/>
-          </a:solidFill>
-          <a:ln w="15875">
-            <a:solidFill>
-              <a:srgbClr val="1A1A1A"/>
-            </a:solidFill>
-            <a:prstDash val="solid"/>
-          </a:ln>
         </p:spPr>
       </p:sp>
       <p:pic>
         <p:nvPicPr>
-          <p:cNvPr id="7" name="icon" descr="preencoded.png">    </p:cNvPr>
+          <p:cNvPr id="6" name="icon" descr="preencoded.png">    </p:cNvPr>
           <p:cNvPicPr>
             <a:picLocks noChangeAspect="1"/>
           </p:cNvPicPr>
@@ -3490,8 +3382,8 @@
         </p:blipFill>
         <p:spPr>
           <a:xfrm>
-            <a:off x="831372" y="1745772"/>
-            <a:ext cx="184343" cy="184343"/>
+            <a:off x="781812" y="1668780"/>
+            <a:ext cx="192024" cy="192024"/>
           </a:xfrm>
           <a:prstGeom prst="rect">
             <a:avLst/>
@@ -3500,14 +3392,63 @@
       </p:pic>
       <p:sp>
         <p:nvSpPr>
-          <p:cNvPr id="8" name="card-head"/>
+          <p:cNvPr id="7" name="Text 4"/>
           <p:cNvSpPr txBox="1"/>
           <p:nvPr/>
         </p:nvSpPr>
         <p:spPr>
           <a:xfrm>
-            <a:off x="1234440" y="1645920"/>
-            <a:ext cx="3040380" cy="384048"/>
+            <a:off x="1161288" y="1600200"/>
+            <a:ext cx="676656" cy="329184"/>
+          </a:xfrm>
+          <a:prstGeom prst="roundRect">
+            <a:avLst>
+              <a:gd name="adj" fmla="val 16667"/>
+            </a:avLst>
+          </a:prstGeom>
+          <a:solidFill>
+            <a:srgbClr val="DD6420"/>
+          </a:solidFill>
+          <a:ln>
+            <a:solidFill>
+              <a:srgbClr val="DD6420"/>
+            </a:solidFill>
+          </a:ln>
+        </p:spPr>
+        <p:txBody>
+          <a:bodyPr wrap="square" lIns="0" tIns="0" rIns="0" bIns="0" rtlCol="0" anchor="ctr">
+            <a:normAutofit/>
+          </a:bodyPr>
+          <a:lstStyle/>
+          <a:p>
+            <a:pPr algn="ctr" indent="0" marL="0">
+              <a:buNone/>
+            </a:pPr>
+            <a:r>
+              <a:rPr lang="ja-JP" altLang="en-US" sz="1300" b="1" dirty="0">
+                <a:solidFill>
+                  <a:srgbClr val="FFFFFF"/>
+                </a:solidFill>
+                <a:latin typeface="Noto Sans JP" pitchFamily="34" charset="0"/>
+                <a:ea typeface="Noto Sans JP" pitchFamily="34" charset="-122"/>
+                <a:cs typeface="Noto Sans JP" pitchFamily="34" charset="-120"/>
+              </a:rPr>
+              <a:t>権限</a:t>
+            </a:r>
+            <a:endParaRPr lang="ja-JP" sz="1300" dirty="0"/>
+          </a:p>
+        </p:txBody>
+      </p:sp>
+      <p:sp>
+        <p:nvSpPr>
+          <p:cNvPr id="8" name="card-body"/>
+          <p:cNvSpPr txBox="1"/>
+          <p:nvPr/>
+        </p:nvSpPr>
+        <p:spPr>
+          <a:xfrm>
+            <a:off x="704088" y="2075688"/>
+            <a:ext cx="3538728" cy="310896"/>
           </a:xfrm>
           <a:prstGeom prst="rect">
             <a:avLst/>
@@ -3516,43 +3457,9 @@
           <a:ln/>
         </p:spPr>
         <p:txBody>
-          <a:bodyPr wrap="square" lIns="0" tIns="0" rIns="0" bIns="0" rtlCol="0" anchor="ctr"/>
-          <a:lstStyle/>
-          <a:p>
-            <a:pPr indent="0" marL="0">
-              <a:buNone/>
-            </a:pPr>
-            <a:r>
-              <a:rPr lang="en-US" sz="1500" b="1" dirty="0">
-                <a:solidFill>
-                  <a:schemeClr val="tx1"/>
-                </a:solidFill>
-              </a:rPr>
-              <a:t>権限</a:t>
-            </a:r>
-            <a:endParaRPr lang="en-US" sz="1500" dirty="0"/>
-          </a:p>
-        </p:txBody>
-      </p:sp>
-      <p:sp>
-        <p:nvSpPr>
-          <p:cNvPr id="9" name="card-body"/>
-          <p:cNvSpPr txBox="1"/>
-          <p:nvPr/>
-        </p:nvSpPr>
-        <p:spPr>
-          <a:xfrm>
-            <a:off x="731520" y="2103120"/>
-            <a:ext cx="3543300" cy="342900"/>
-          </a:xfrm>
-          <a:prstGeom prst="rect">
-            <a:avLst/>
-          </a:prstGeom>
-          <a:noFill/>
-          <a:ln/>
-        </p:spPr>
-        <p:txBody>
-          <a:bodyPr wrap="square" lIns="0" tIns="0" rIns="0" bIns="0" rtlCol="0" anchor="t"/>
+          <a:bodyPr wrap="square" lIns="0" tIns="0" rIns="0" bIns="0" rtlCol="0" anchor="t">
+            <a:normAutofit/>
+          </a:bodyPr>
           <a:lstStyle/>
           <a:p>
             <a:pPr indent="0" marL="0">
@@ -3562,35 +3469,70 @@
               <a:buNone/>
             </a:pPr>
             <a:r>
-              <a:rPr lang="en-US" sz="1300" dirty="0">
-                <a:solidFill>
-                  <a:schemeClr val="tx1"/>
-                </a:solidFill>
+              <a:rPr lang="ja-JP" altLang="en-US" sz="1350" b="1" dirty="0">
+                <a:solidFill>
+                  <a:srgbClr val="1A1A1A"/>
+                </a:solidFill>
+                <a:latin typeface="Noto Sans JP" pitchFamily="34" charset="0"/>
+                <a:ea typeface="Noto Sans JP" pitchFamily="34" charset="-122"/>
+                <a:cs typeface="Noto Sans JP" pitchFamily="34" charset="-120"/>
               </a:rPr>
               <a:t>誰が見られる／編集できるか。退職・異動のときに外す手順</a:t>
             </a:r>
-            <a:endParaRPr lang="en-US" sz="1300" dirty="0"/>
-          </a:p>
-        </p:txBody>
-      </p:sp>
-      <p:sp>
-        <p:nvSpPr>
-          <p:cNvPr id="10" name="card"/>
+            <a:endParaRPr lang="ja-JP" sz="1350" dirty="0"/>
+          </a:p>
+        </p:txBody>
+      </p:sp>
+      <p:sp>
+        <p:nvSpPr>
+          <p:cNvPr id="9" name="card"/>
           <p:cNvSpPr/>
           <p:nvPr/>
         </p:nvSpPr>
         <p:spPr>
           <a:xfrm>
-            <a:off x="4686300" y="1463040"/>
-            <a:ext cx="3909060" cy="1120140"/>
+            <a:off x="4700016" y="1417320"/>
+            <a:ext cx="3941064" cy="1106424"/>
           </a:xfrm>
           <a:prstGeom prst="roundRect">
             <a:avLst>
-              <a:gd name="adj" fmla="val 9796"/>
+              <a:gd name="adj" fmla="val 8264"/>
             </a:avLst>
           </a:prstGeom>
           <a:solidFill>
-            <a:schemeClr val="bg1"/>
+            <a:srgbClr val="FFFFFF"/>
+          </a:solidFill>
+          <a:ln w="25400">
+            <a:solidFill>
+              <a:srgbClr val="1A1A1A"/>
+            </a:solidFill>
+            <a:prstDash val="solid"/>
+          </a:ln>
+          <a:effectLst>
+            <a:outerShdw sx="100000" sy="100000" kx="0" ky="0" algn="bl" rotWithShape="0" blurRad="101600" dist="50800" dir="2700000">
+              <a:srgbClr val="1A1A1A">
+                <a:alpha val="100000"/>
+              </a:srgbClr>
+            </a:outerShdw>
+          </a:effectLst>
+        </p:spPr>
+      </p:sp>
+      <p:sp>
+        <p:nvSpPr>
+          <p:cNvPr id="10" name="icon-circle"/>
+          <p:cNvSpPr/>
+          <p:nvPr/>
+        </p:nvSpPr>
+        <p:spPr>
+          <a:xfrm>
+            <a:off x="4882896" y="1572768"/>
+            <a:ext cx="384048" cy="384048"/>
+          </a:xfrm>
+          <a:prstGeom prst="ellipse">
+            <a:avLst/>
+          </a:prstGeom>
+          <a:solidFill>
+            <a:srgbClr val="DD6420"/>
           </a:solidFill>
           <a:ln w="19050">
             <a:solidFill>
@@ -3598,43 +3540,11 @@
             </a:solidFill>
             <a:prstDash val="solid"/>
           </a:ln>
-          <a:effectLst>
-            <a:outerShdw sx="100000" sy="100000" kx="0" ky="0" algn="bl" rotWithShape="0" blurRad="101600" dist="38100" dir="2700000">
-              <a:srgbClr val="000000">
-                <a:alpha val="18000"/>
-              </a:srgbClr>
-            </a:outerShdw>
-          </a:effectLst>
-        </p:spPr>
-      </p:sp>
-      <p:sp>
-        <p:nvSpPr>
-          <p:cNvPr id="11" name="icon-circle"/>
-          <p:cNvSpPr/>
-          <p:nvPr/>
-        </p:nvSpPr>
-        <p:spPr>
-          <a:xfrm>
-            <a:off x="4869180" y="1645920"/>
-            <a:ext cx="384048" cy="384048"/>
-          </a:xfrm>
-          <a:prstGeom prst="ellipse">
-            <a:avLst/>
-          </a:prstGeom>
-          <a:solidFill>
-            <a:schemeClr val="accent1"/>
-          </a:solidFill>
-          <a:ln w="15875">
-            <a:solidFill>
-              <a:srgbClr val="1A1A1A"/>
-            </a:solidFill>
-            <a:prstDash val="solid"/>
-          </a:ln>
         </p:spPr>
       </p:sp>
       <p:pic>
         <p:nvPicPr>
-          <p:cNvPr id="12" name="icon" descr="preencoded.png">    </p:cNvPr>
+          <p:cNvPr id="11" name="icon" descr="preencoded.png">    </p:cNvPr>
           <p:cNvPicPr>
             <a:picLocks noChangeAspect="1"/>
           </p:cNvPicPr>
@@ -3648,8 +3558,8 @@
         </p:blipFill>
         <p:spPr>
           <a:xfrm>
-            <a:off x="4969032" y="1745772"/>
-            <a:ext cx="184343" cy="184343"/>
+            <a:off x="4978908" y="1668780"/>
+            <a:ext cx="192024" cy="192024"/>
           </a:xfrm>
           <a:prstGeom prst="rect">
             <a:avLst/>
@@ -3658,14 +3568,63 @@
       </p:pic>
       <p:sp>
         <p:nvSpPr>
-          <p:cNvPr id="13" name="card-head"/>
+          <p:cNvPr id="12" name="Text 8"/>
           <p:cNvSpPr txBox="1"/>
           <p:nvPr/>
         </p:nvSpPr>
         <p:spPr>
           <a:xfrm>
-            <a:off x="5372100" y="1645920"/>
-            <a:ext cx="3040380" cy="384048"/>
+            <a:off x="5358384" y="1600200"/>
+            <a:ext cx="1024128" cy="329184"/>
+          </a:xfrm>
+          <a:prstGeom prst="roundRect">
+            <a:avLst>
+              <a:gd name="adj" fmla="val 16667"/>
+            </a:avLst>
+          </a:prstGeom>
+          <a:solidFill>
+            <a:srgbClr val="DD6420"/>
+          </a:solidFill>
+          <a:ln>
+            <a:solidFill>
+              <a:srgbClr val="DD6420"/>
+            </a:solidFill>
+          </a:ln>
+        </p:spPr>
+        <p:txBody>
+          <a:bodyPr wrap="square" lIns="0" tIns="0" rIns="0" bIns="0" rtlCol="0" anchor="ctr">
+            <a:normAutofit/>
+          </a:bodyPr>
+          <a:lstStyle/>
+          <a:p>
+            <a:pPr algn="ctr" indent="0" marL="0">
+              <a:buNone/>
+            </a:pPr>
+            <a:r>
+              <a:rPr lang="ja-JP" altLang="en-US" sz="1300" b="1" dirty="0">
+                <a:solidFill>
+                  <a:srgbClr val="FFFFFF"/>
+                </a:solidFill>
+                <a:latin typeface="Noto Sans JP" pitchFamily="34" charset="0"/>
+                <a:ea typeface="Noto Sans JP" pitchFamily="34" charset="-122"/>
+                <a:cs typeface="Noto Sans JP" pitchFamily="34" charset="-120"/>
+              </a:rPr>
+              <a:t>個人情報</a:t>
+            </a:r>
+            <a:endParaRPr lang="ja-JP" sz="1300" dirty="0"/>
+          </a:p>
+        </p:txBody>
+      </p:sp>
+      <p:sp>
+        <p:nvSpPr>
+          <p:cNvPr id="13" name="card-body"/>
+          <p:cNvSpPr txBox="1"/>
+          <p:nvPr/>
+        </p:nvSpPr>
+        <p:spPr>
+          <a:xfrm>
+            <a:off x="4901184" y="2075688"/>
+            <a:ext cx="3538728" cy="310896"/>
           </a:xfrm>
           <a:prstGeom prst="rect">
             <a:avLst/>
@@ -3674,43 +3633,9 @@
           <a:ln/>
         </p:spPr>
         <p:txBody>
-          <a:bodyPr wrap="square" lIns="0" tIns="0" rIns="0" bIns="0" rtlCol="0" anchor="ctr"/>
-          <a:lstStyle/>
-          <a:p>
-            <a:pPr indent="0" marL="0">
-              <a:buNone/>
-            </a:pPr>
-            <a:r>
-              <a:rPr lang="en-US" sz="1500" b="1" dirty="0">
-                <a:solidFill>
-                  <a:schemeClr val="tx1"/>
-                </a:solidFill>
-              </a:rPr>
-              <a:t>個人情報</a:t>
-            </a:r>
-            <a:endParaRPr lang="en-US" sz="1500" dirty="0"/>
-          </a:p>
-        </p:txBody>
-      </p:sp>
-      <p:sp>
-        <p:nvSpPr>
-          <p:cNvPr id="14" name="card-body"/>
-          <p:cNvSpPr txBox="1"/>
-          <p:nvPr/>
-        </p:nvSpPr>
-        <p:spPr>
-          <a:xfrm>
-            <a:off x="4869180" y="2103120"/>
-            <a:ext cx="3543300" cy="342900"/>
-          </a:xfrm>
-          <a:prstGeom prst="rect">
-            <a:avLst/>
-          </a:prstGeom>
-          <a:noFill/>
-          <a:ln/>
-        </p:spPr>
-        <p:txBody>
-          <a:bodyPr wrap="square" lIns="0" tIns="0" rIns="0" bIns="0" rtlCol="0" anchor="t"/>
+          <a:bodyPr wrap="square" lIns="0" tIns="0" rIns="0" bIns="0" rtlCol="0" anchor="t">
+            <a:normAutofit/>
+          </a:bodyPr>
           <a:lstStyle/>
           <a:p>
             <a:pPr indent="0" marL="0">
@@ -3720,35 +3645,70 @@
               <a:buNone/>
             </a:pPr>
             <a:r>
-              <a:rPr lang="en-US" sz="1300" dirty="0">
-                <a:solidFill>
-                  <a:schemeClr val="tx1"/>
-                </a:solidFill>
+              <a:rPr lang="ja-JP" altLang="en-US" sz="1350" b="1" dirty="0">
+                <a:solidFill>
+                  <a:srgbClr val="1A1A1A"/>
+                </a:solidFill>
+                <a:latin typeface="Noto Sans JP" pitchFamily="34" charset="0"/>
+                <a:ea typeface="Noto Sans JP" pitchFamily="34" charset="-122"/>
+                <a:cs typeface="Noto Sans JP" pitchFamily="34" charset="-120"/>
               </a:rPr>
               <a:t>集める項目は最小限か。公開ページに出していないか</a:t>
             </a:r>
-            <a:endParaRPr lang="en-US" sz="1300" dirty="0"/>
-          </a:p>
-        </p:txBody>
-      </p:sp>
-      <p:sp>
-        <p:nvSpPr>
-          <p:cNvPr id="15" name="card"/>
+            <a:endParaRPr lang="ja-JP" sz="1350" dirty="0"/>
+          </a:p>
+        </p:txBody>
+      </p:sp>
+      <p:sp>
+        <p:nvSpPr>
+          <p:cNvPr id="14" name="card"/>
           <p:cNvSpPr/>
           <p:nvPr/>
         </p:nvSpPr>
         <p:spPr>
           <a:xfrm>
-            <a:off x="548640" y="2811780"/>
-            <a:ext cx="3909060" cy="1120140"/>
+            <a:off x="502920" y="2779776"/>
+            <a:ext cx="3941064" cy="1106424"/>
           </a:xfrm>
           <a:prstGeom prst="roundRect">
             <a:avLst>
-              <a:gd name="adj" fmla="val 9796"/>
+              <a:gd name="adj" fmla="val 8264"/>
             </a:avLst>
           </a:prstGeom>
           <a:solidFill>
-            <a:schemeClr val="bg1"/>
+            <a:srgbClr val="FFFFFF"/>
+          </a:solidFill>
+          <a:ln w="25400">
+            <a:solidFill>
+              <a:srgbClr val="1A1A1A"/>
+            </a:solidFill>
+            <a:prstDash val="solid"/>
+          </a:ln>
+          <a:effectLst>
+            <a:outerShdw sx="100000" sy="100000" kx="0" ky="0" algn="bl" rotWithShape="0" blurRad="101600" dist="50800" dir="2700000">
+              <a:srgbClr val="1A1A1A">
+                <a:alpha val="100000"/>
+              </a:srgbClr>
+            </a:outerShdw>
+          </a:effectLst>
+        </p:spPr>
+      </p:sp>
+      <p:sp>
+        <p:nvSpPr>
+          <p:cNvPr id="15" name="icon-circle"/>
+          <p:cNvSpPr/>
+          <p:nvPr/>
+        </p:nvSpPr>
+        <p:spPr>
+          <a:xfrm>
+            <a:off x="685800" y="2935224"/>
+            <a:ext cx="384048" cy="384048"/>
+          </a:xfrm>
+          <a:prstGeom prst="ellipse">
+            <a:avLst/>
+          </a:prstGeom>
+          <a:solidFill>
+            <a:srgbClr val="DD6420"/>
           </a:solidFill>
           <a:ln w="19050">
             <a:solidFill>
@@ -3756,43 +3716,11 @@
             </a:solidFill>
             <a:prstDash val="solid"/>
           </a:ln>
-          <a:effectLst>
-            <a:outerShdw sx="100000" sy="100000" kx="0" ky="0" algn="bl" rotWithShape="0" blurRad="101600" dist="38100" dir="2700000">
-              <a:srgbClr val="000000">
-                <a:alpha val="18000"/>
-              </a:srgbClr>
-            </a:outerShdw>
-          </a:effectLst>
-        </p:spPr>
-      </p:sp>
-      <p:sp>
-        <p:nvSpPr>
-          <p:cNvPr id="16" name="icon-circle"/>
-          <p:cNvSpPr/>
-          <p:nvPr/>
-        </p:nvSpPr>
-        <p:spPr>
-          <a:xfrm>
-            <a:off x="731520" y="2994660"/>
-            <a:ext cx="384048" cy="384048"/>
-          </a:xfrm>
-          <a:prstGeom prst="ellipse">
-            <a:avLst/>
-          </a:prstGeom>
-          <a:solidFill>
-            <a:schemeClr val="accent1"/>
-          </a:solidFill>
-          <a:ln w="15875">
-            <a:solidFill>
-              <a:srgbClr val="1A1A1A"/>
-            </a:solidFill>
-            <a:prstDash val="solid"/>
-          </a:ln>
         </p:spPr>
       </p:sp>
       <p:pic>
         <p:nvPicPr>
-          <p:cNvPr id="17" name="icon" descr="preencoded.png">    </p:cNvPr>
+          <p:cNvPr id="16" name="icon" descr="preencoded.png">    </p:cNvPr>
           <p:cNvPicPr>
             <a:picLocks noChangeAspect="1"/>
           </p:cNvPicPr>
@@ -3806,8 +3734,8 @@
         </p:blipFill>
         <p:spPr>
           <a:xfrm>
-            <a:off x="831372" y="3094512"/>
-            <a:ext cx="184343" cy="184343"/>
+            <a:off x="781812" y="3031236"/>
+            <a:ext cx="192024" cy="192024"/>
           </a:xfrm>
           <a:prstGeom prst="rect">
             <a:avLst/>
@@ -3816,14 +3744,63 @@
       </p:pic>
       <p:sp>
         <p:nvSpPr>
-          <p:cNvPr id="18" name="card-head"/>
+          <p:cNvPr id="17" name="Text 12"/>
           <p:cNvSpPr txBox="1"/>
           <p:nvPr/>
         </p:nvSpPr>
         <p:spPr>
           <a:xfrm>
-            <a:off x="1234440" y="2994660"/>
-            <a:ext cx="3040380" cy="384048"/>
+            <a:off x="1161288" y="2962656"/>
+            <a:ext cx="1024128" cy="329184"/>
+          </a:xfrm>
+          <a:prstGeom prst="roundRect">
+            <a:avLst>
+              <a:gd name="adj" fmla="val 16667"/>
+            </a:avLst>
+          </a:prstGeom>
+          <a:solidFill>
+            <a:srgbClr val="DD6420"/>
+          </a:solidFill>
+          <a:ln>
+            <a:solidFill>
+              <a:srgbClr val="DD6420"/>
+            </a:solidFill>
+          </a:ln>
+        </p:spPr>
+        <p:txBody>
+          <a:bodyPr wrap="square" lIns="0" tIns="0" rIns="0" bIns="0" rtlCol="0" anchor="ctr">
+            <a:normAutofit/>
+          </a:bodyPr>
+          <a:lstStyle/>
+          <a:p>
+            <a:pPr algn="ctr" indent="0" marL="0">
+              <a:buNone/>
+            </a:pPr>
+            <a:r>
+              <a:rPr lang="ja-JP" altLang="en-US" sz="1300" b="1" dirty="0">
+                <a:solidFill>
+                  <a:srgbClr val="FFFFFF"/>
+                </a:solidFill>
+                <a:latin typeface="Noto Sans JP" pitchFamily="34" charset="0"/>
+                <a:ea typeface="Noto Sans JP" pitchFamily="34" charset="-122"/>
+                <a:cs typeface="Noto Sans JP" pitchFamily="34" charset="-120"/>
+              </a:rPr>
+              <a:t>秘密情報</a:t>
+            </a:r>
+            <a:endParaRPr lang="ja-JP" sz="1300" dirty="0"/>
+          </a:p>
+        </p:txBody>
+      </p:sp>
+      <p:sp>
+        <p:nvSpPr>
+          <p:cNvPr id="18" name="card-body"/>
+          <p:cNvSpPr txBox="1"/>
+          <p:nvPr/>
+        </p:nvSpPr>
+        <p:spPr>
+          <a:xfrm>
+            <a:off x="704088" y="3438144"/>
+            <a:ext cx="3538728" cy="310896"/>
           </a:xfrm>
           <a:prstGeom prst="rect">
             <a:avLst/>
@@ -3832,43 +3809,9 @@
           <a:ln/>
         </p:spPr>
         <p:txBody>
-          <a:bodyPr wrap="square" lIns="0" tIns="0" rIns="0" bIns="0" rtlCol="0" anchor="ctr"/>
-          <a:lstStyle/>
-          <a:p>
-            <a:pPr indent="0" marL="0">
-              <a:buNone/>
-            </a:pPr>
-            <a:r>
-              <a:rPr lang="en-US" sz="1500" b="1" dirty="0">
-                <a:solidFill>
-                  <a:schemeClr val="tx1"/>
-                </a:solidFill>
-              </a:rPr>
-              <a:t>秘密情報</a:t>
-            </a:r>
-            <a:endParaRPr lang="en-US" sz="1500" dirty="0"/>
-          </a:p>
-        </p:txBody>
-      </p:sp>
-      <p:sp>
-        <p:nvSpPr>
-          <p:cNvPr id="19" name="card-body"/>
-          <p:cNvSpPr txBox="1"/>
-          <p:nvPr/>
-        </p:nvSpPr>
-        <p:spPr>
-          <a:xfrm>
-            <a:off x="731520" y="3451860"/>
-            <a:ext cx="3543300" cy="342900"/>
-          </a:xfrm>
-          <a:prstGeom prst="rect">
-            <a:avLst/>
-          </a:prstGeom>
-          <a:noFill/>
-          <a:ln/>
-        </p:spPr>
-        <p:txBody>
-          <a:bodyPr wrap="square" lIns="0" tIns="0" rIns="0" bIns="0" rtlCol="0" anchor="t"/>
+          <a:bodyPr wrap="square" lIns="0" tIns="0" rIns="0" bIns="0" rtlCol="0" anchor="t">
+            <a:normAutofit/>
+          </a:bodyPr>
           <a:lstStyle/>
           <a:p>
             <a:pPr indent="0" marL="0">
@@ -3878,35 +3821,70 @@
               <a:buNone/>
             </a:pPr>
             <a:r>
-              <a:rPr lang="en-US" sz="1300" dirty="0">
-                <a:solidFill>
-                  <a:schemeClr val="tx1"/>
-                </a:solidFill>
+              <a:rPr lang="ja-JP" altLang="en-US" sz="1350" b="1" dirty="0">
+                <a:solidFill>
+                  <a:srgbClr val="1A1A1A"/>
+                </a:solidFill>
+                <a:latin typeface="Noto Sans JP" pitchFamily="34" charset="0"/>
+                <a:ea typeface="Noto Sans JP" pitchFamily="34" charset="-122"/>
+                <a:cs typeface="Noto Sans JP" pitchFamily="34" charset="-120"/>
               </a:rPr>
               <a:t>SecretがGitHub・チャットに残っていないか。漏れたら作り直す</a:t>
             </a:r>
-            <a:endParaRPr lang="en-US" sz="1300" dirty="0"/>
-          </a:p>
-        </p:txBody>
-      </p:sp>
-      <p:sp>
-        <p:nvSpPr>
-          <p:cNvPr id="20" name="card"/>
+            <a:endParaRPr lang="ja-JP" sz="1350" dirty="0"/>
+          </a:p>
+        </p:txBody>
+      </p:sp>
+      <p:sp>
+        <p:nvSpPr>
+          <p:cNvPr id="19" name="card"/>
           <p:cNvSpPr/>
           <p:nvPr/>
         </p:nvSpPr>
         <p:spPr>
           <a:xfrm>
-            <a:off x="4686300" y="2811780"/>
-            <a:ext cx="3909060" cy="1120140"/>
+            <a:off x="4700016" y="2779776"/>
+            <a:ext cx="3941064" cy="1106424"/>
           </a:xfrm>
           <a:prstGeom prst="roundRect">
             <a:avLst>
-              <a:gd name="adj" fmla="val 9796"/>
+              <a:gd name="adj" fmla="val 8264"/>
             </a:avLst>
           </a:prstGeom>
           <a:solidFill>
-            <a:schemeClr val="bg1"/>
+            <a:srgbClr val="FFFFFF"/>
+          </a:solidFill>
+          <a:ln w="25400">
+            <a:solidFill>
+              <a:srgbClr val="1A1A1A"/>
+            </a:solidFill>
+            <a:prstDash val="solid"/>
+          </a:ln>
+          <a:effectLst>
+            <a:outerShdw sx="100000" sy="100000" kx="0" ky="0" algn="bl" rotWithShape="0" blurRad="101600" dist="50800" dir="2700000">
+              <a:srgbClr val="1A1A1A">
+                <a:alpha val="100000"/>
+              </a:srgbClr>
+            </a:outerShdw>
+          </a:effectLst>
+        </p:spPr>
+      </p:sp>
+      <p:sp>
+        <p:nvSpPr>
+          <p:cNvPr id="20" name="icon-circle"/>
+          <p:cNvSpPr/>
+          <p:nvPr/>
+        </p:nvSpPr>
+        <p:spPr>
+          <a:xfrm>
+            <a:off x="4882896" y="2935224"/>
+            <a:ext cx="384048" cy="384048"/>
+          </a:xfrm>
+          <a:prstGeom prst="ellipse">
+            <a:avLst/>
+          </a:prstGeom>
+          <a:solidFill>
+            <a:srgbClr val="DD6420"/>
           </a:solidFill>
           <a:ln w="19050">
             <a:solidFill>
@@ -3914,43 +3892,11 @@
             </a:solidFill>
             <a:prstDash val="solid"/>
           </a:ln>
-          <a:effectLst>
-            <a:outerShdw sx="100000" sy="100000" kx="0" ky="0" algn="bl" rotWithShape="0" blurRad="101600" dist="38100" dir="2700000">
-              <a:srgbClr val="000000">
-                <a:alpha val="18000"/>
-              </a:srgbClr>
-            </a:outerShdw>
-          </a:effectLst>
-        </p:spPr>
-      </p:sp>
-      <p:sp>
-        <p:nvSpPr>
-          <p:cNvPr id="21" name="icon-circle"/>
-          <p:cNvSpPr/>
-          <p:nvPr/>
-        </p:nvSpPr>
-        <p:spPr>
-          <a:xfrm>
-            <a:off x="4869180" y="2994660"/>
-            <a:ext cx="384048" cy="384048"/>
-          </a:xfrm>
-          <a:prstGeom prst="ellipse">
-            <a:avLst/>
-          </a:prstGeom>
-          <a:solidFill>
-            <a:schemeClr val="accent1"/>
-          </a:solidFill>
-          <a:ln w="15875">
-            <a:solidFill>
-              <a:srgbClr val="1A1A1A"/>
-            </a:solidFill>
-            <a:prstDash val="solid"/>
-          </a:ln>
         </p:spPr>
       </p:sp>
       <p:pic>
         <p:nvPicPr>
-          <p:cNvPr id="22" name="icon" descr="preencoded.png">    </p:cNvPr>
+          <p:cNvPr id="21" name="icon" descr="preencoded.png">    </p:cNvPr>
           <p:cNvPicPr>
             <a:picLocks noChangeAspect="1"/>
           </p:cNvPicPr>
@@ -3964,8 +3910,8 @@
         </p:blipFill>
         <p:spPr>
           <a:xfrm>
-            <a:off x="4969032" y="3094512"/>
-            <a:ext cx="184343" cy="184343"/>
+            <a:off x="4978908" y="3031236"/>
+            <a:ext cx="192024" cy="192024"/>
           </a:xfrm>
           <a:prstGeom prst="rect">
             <a:avLst/>
@@ -3974,14 +3920,63 @@
       </p:pic>
       <p:sp>
         <p:nvSpPr>
-          <p:cNvPr id="23" name="card-head"/>
+          <p:cNvPr id="22" name="Text 16"/>
           <p:cNvSpPr txBox="1"/>
           <p:nvPr/>
         </p:nvSpPr>
         <p:spPr>
           <a:xfrm>
-            <a:off x="5372100" y="2994660"/>
-            <a:ext cx="3040380" cy="384048"/>
+            <a:off x="5358384" y="2962656"/>
+            <a:ext cx="1371600" cy="329184"/>
+          </a:xfrm>
+          <a:prstGeom prst="roundRect">
+            <a:avLst>
+              <a:gd name="adj" fmla="val 16667"/>
+            </a:avLst>
+          </a:prstGeom>
+          <a:solidFill>
+            <a:srgbClr val="DD6420"/>
+          </a:solidFill>
+          <a:ln>
+            <a:solidFill>
+              <a:srgbClr val="DD6420"/>
+            </a:solidFill>
+          </a:ln>
+        </p:spPr>
+        <p:txBody>
+          <a:bodyPr wrap="square" lIns="0" tIns="0" rIns="0" bIns="0" rtlCol="0" anchor="ctr">
+            <a:normAutofit/>
+          </a:bodyPr>
+          <a:lstStyle/>
+          <a:p>
+            <a:pPr algn="ctr" indent="0" marL="0">
+              <a:buNone/>
+            </a:pPr>
+            <a:r>
+              <a:rPr lang="ja-JP" altLang="en-US" sz="1300" b="1" dirty="0">
+                <a:solidFill>
+                  <a:srgbClr val="FFFFFF"/>
+                </a:solidFill>
+                <a:latin typeface="Noto Sans JP" pitchFamily="34" charset="0"/>
+                <a:ea typeface="Noto Sans JP" pitchFamily="34" charset="-122"/>
+                <a:cs typeface="Noto Sans JP" pitchFamily="34" charset="-120"/>
+              </a:rPr>
+              <a:t>止まったとき</a:t>
+            </a:r>
+            <a:endParaRPr lang="ja-JP" sz="1300" dirty="0"/>
+          </a:p>
+        </p:txBody>
+      </p:sp>
+      <p:sp>
+        <p:nvSpPr>
+          <p:cNvPr id="23" name="card-body"/>
+          <p:cNvSpPr txBox="1"/>
+          <p:nvPr/>
+        </p:nvSpPr>
+        <p:spPr>
+          <a:xfrm>
+            <a:off x="4901184" y="3438144"/>
+            <a:ext cx="3538728" cy="310896"/>
           </a:xfrm>
           <a:prstGeom prst="rect">
             <a:avLst/>
@@ -3990,43 +3985,9 @@
           <a:ln/>
         </p:spPr>
         <p:txBody>
-          <a:bodyPr wrap="square" lIns="0" tIns="0" rIns="0" bIns="0" rtlCol="0" anchor="ctr"/>
-          <a:lstStyle/>
-          <a:p>
-            <a:pPr indent="0" marL="0">
-              <a:buNone/>
-            </a:pPr>
-            <a:r>
-              <a:rPr lang="en-US" sz="1500" b="1" dirty="0">
-                <a:solidFill>
-                  <a:schemeClr val="tx1"/>
-                </a:solidFill>
-              </a:rPr>
-              <a:t>止まったとき</a:t>
-            </a:r>
-            <a:endParaRPr lang="en-US" sz="1500" dirty="0"/>
-          </a:p>
-        </p:txBody>
-      </p:sp>
-      <p:sp>
-        <p:nvSpPr>
-          <p:cNvPr id="24" name="card-body"/>
-          <p:cNvSpPr txBox="1"/>
-          <p:nvPr/>
-        </p:nvSpPr>
-        <p:spPr>
-          <a:xfrm>
-            <a:off x="4869180" y="3451860"/>
-            <a:ext cx="3543300" cy="342900"/>
-          </a:xfrm>
-          <a:prstGeom prst="rect">
-            <a:avLst/>
-          </a:prstGeom>
-          <a:noFill/>
-          <a:ln/>
-        </p:spPr>
-        <p:txBody>
-          <a:bodyPr wrap="square" lIns="0" tIns="0" rIns="0" bIns="0" rtlCol="0" anchor="t"/>
+          <a:bodyPr wrap="square" lIns="0" tIns="0" rIns="0" bIns="0" rtlCol="0" anchor="t">
+            <a:normAutofit/>
+          </a:bodyPr>
           <a:lstStyle/>
           <a:p>
             <a:pPr indent="0" marL="0">
@@ -4036,101 +3997,71 @@
               <a:buNone/>
             </a:pPr>
             <a:r>
-              <a:rPr lang="en-US" sz="1300" dirty="0">
-                <a:solidFill>
-                  <a:schemeClr val="tx1"/>
-                </a:solidFill>
+              <a:rPr lang="ja-JP" altLang="en-US" sz="1350" b="1" dirty="0">
+                <a:solidFill>
+                  <a:srgbClr val="1A1A1A"/>
+                </a:solidFill>
+                <a:latin typeface="Noto Sans JP" pitchFamily="34" charset="0"/>
+                <a:ea typeface="Noto Sans JP" pitchFamily="34" charset="-122"/>
+                <a:cs typeface="Noto Sans JP" pitchFamily="34" charset="-120"/>
               </a:rPr>
               <a:t>誰が気づき、誰に連絡するか。その間の代わりの手段</a:t>
             </a:r>
-            <a:endParaRPr lang="en-US" sz="1300" dirty="0"/>
-          </a:p>
-        </p:txBody>
-      </p:sp>
-      <p:sp>
-        <p:nvSpPr>
-          <p:cNvPr id="25" name="foot-box"/>
-          <p:cNvSpPr/>
-          <p:nvPr/>
-        </p:nvSpPr>
-        <p:spPr>
-          <a:xfrm>
-            <a:off x="548640" y="4114800"/>
-            <a:ext cx="8046720" cy="502920"/>
-          </a:xfrm>
-          <a:prstGeom prst="roundRect">
-            <a:avLst>
-              <a:gd name="adj" fmla="val 18182"/>
-            </a:avLst>
-          </a:prstGeom>
-          <a:solidFill>
-            <a:schemeClr val="bg2"/>
-          </a:solidFill>
-          <a:ln w="12700">
+            <a:endParaRPr lang="ja-JP" sz="1350" dirty="0"/>
+          </a:p>
+        </p:txBody>
+      </p:sp>
+      <p:sp>
+        <p:nvSpPr>
+          <p:cNvPr id="24" name="Text 18"/>
+          <p:cNvSpPr txBox="1"/>
+          <p:nvPr/>
+        </p:nvSpPr>
+        <p:spPr>
+          <a:xfrm rot="-60000">
+            <a:off x="502920" y="4114800"/>
+            <a:ext cx="8138160" cy="502920"/>
+          </a:xfrm>
+          <a:prstGeom prst="rect">
+            <a:avLst/>
+          </a:prstGeom>
+          <a:solidFill>
+            <a:srgbClr val="DD6420"/>
+          </a:solidFill>
+          <a:ln w="19050">
             <a:solidFill>
-              <a:schemeClr val="bg2"/>
+              <a:srgbClr val="1A1A1A"/>
             </a:solidFill>
-            <a:prstDash val="solid"/>
           </a:ln>
-        </p:spPr>
-      </p:sp>
-      <p:pic>
-        <p:nvPicPr>
-          <p:cNvPr id="26" name="foot-icon" descr="preencoded.png">    </p:cNvPr>
-          <p:cNvPicPr>
-            <a:picLocks noChangeAspect="1"/>
-          </p:cNvPicPr>
-          <p:nvPr/>
-        </p:nvPicPr>
-        <p:blipFill>
-          <a:blip r:embed="rId5"/>
-          <a:stretch>
-            <a:fillRect/>
-          </a:stretch>
-        </p:blipFill>
-        <p:spPr>
-          <a:xfrm>
-            <a:off x="685800" y="4242816"/>
-            <a:ext cx="246888" cy="246888"/>
-          </a:xfrm>
-          <a:prstGeom prst="rect">
-            <a:avLst/>
-          </a:prstGeom>
-        </p:spPr>
-      </p:pic>
-      <p:sp>
-        <p:nvSpPr>
-          <p:cNvPr id="27" name="foot-text"/>
-          <p:cNvSpPr txBox="1"/>
-          <p:nvPr/>
-        </p:nvSpPr>
-        <p:spPr>
-          <a:xfrm>
-            <a:off x="1051560" y="4114800"/>
-            <a:ext cx="7406640" cy="502920"/>
-          </a:xfrm>
-          <a:prstGeom prst="rect">
-            <a:avLst/>
-          </a:prstGeom>
-          <a:noFill/>
-          <a:ln/>
-        </p:spPr>
-        <p:txBody>
-          <a:bodyPr wrap="square" lIns="0" tIns="0" rIns="0" bIns="0" rtlCol="0" anchor="ctr"/>
-          <a:lstStyle/>
-          <a:p>
-            <a:pPr indent="0" marL="0">
-              <a:buNone/>
-            </a:pPr>
-            <a:r>
-              <a:rPr lang="en-US" sz="1150" dirty="0">
-                <a:solidFill>
-                  <a:schemeClr val="tx1"/>
-                </a:solidFill>
+          <a:effectLst>
+            <a:outerShdw sx="100000" sy="100000" kx="0" ky="0" algn="bl" rotWithShape="0" blurRad="101600" dist="38100" dir="2700000">
+              <a:srgbClr val="1A1A1A">
+                <a:alpha val="100000"/>
+              </a:srgbClr>
+            </a:outerShdw>
+          </a:effectLst>
+        </p:spPr>
+        <p:txBody>
+          <a:bodyPr wrap="square" lIns="0" tIns="1905" rIns="1905" bIns="0" rtlCol="0" anchor="ctr">
+            <a:normAutofit/>
+          </a:bodyPr>
+          <a:lstStyle/>
+          <a:p>
+            <a:pPr algn="ctr" indent="0" marL="0">
+              <a:buNone/>
+            </a:pPr>
+            <a:r>
+              <a:rPr lang="ja-JP" altLang="en-US" sz="1300" b="1" dirty="0">
+                <a:solidFill>
+                  <a:srgbClr val="FFFFFF"/>
+                </a:solidFill>
+                <a:latin typeface="Noto Sans JP" pitchFamily="34" charset="0"/>
+                <a:ea typeface="Noto Sans JP" pitchFamily="34" charset="-122"/>
+                <a:cs typeface="Noto Sans JP" pitchFamily="34" charset="-120"/>
               </a:rPr>
               <a:t>BASEは定期的にエクスポートで控えを取っておくと安心</a:t>
             </a:r>
-            <a:endParaRPr lang="en-US" sz="1150" dirty="0"/>
+            <a:endParaRPr lang="ja-JP" sz="1300" dirty="0"/>
           </a:p>
         </p:txBody>
       </p:sp>
@@ -4146,8 +4077,8 @@
         </p:nvSpPr>
         <p:spPr>
           <a:xfrm>
-            <a:off x="8229600" y="4773168"/>
-            <a:ext cx="365760" cy="228600"/>
+            <a:off x="8366760" y="4754880"/>
+            <a:ext cx="365760" cy="274320"/>
           </a:xfrm>
           <a:prstGeom prst="rect">
             <a:avLst/>
@@ -4159,20 +4090,23 @@
           </a:extLst>
         </p:spPr>
         <p:txBody>
-          <a:bodyPr/>
+          <a:bodyPr anchor="ctr"/>
           <a:lstStyle>
             <a:lvl1pPr>
-              <a:defRPr sz="900">
-                <a:solidFill>
-                  <a:srgbClr val="5A6872"/>
-                </a:solidFill>
+              <a:defRPr sz="850">
+                <a:solidFill>
+                  <a:srgbClr val="FFFFFF"/>
+                </a:solidFill>
+                <a:latin typeface="Noto Sans JP"/>
+                <a:ea typeface="Noto Sans JP"/>
+                <a:cs typeface="Noto Sans JP"/>
               </a:defRPr>
             </a:lvl1pPr>
           </a:lstStyle>
           <a:p>
             <a:pPr algn="r"/>
             <a:fld id="{F7021451-1387-4CA6-816F-3879F97B5CBC}" type="slidenum">
-              <a:rPr b="0" lang="en-US"/>
+              <a:rPr b="1" lang="en-US"/>
               <a:t>3</a:t>
             </a:fld>
             <a:endParaRPr lang="en-US"/>
@@ -4207,15 +4141,58 @@
       <p:sp>
         <p:nvSpPr>
           <p:cNvPr id="2" name="Text 0"/>
-          <p:cNvSpPr/>
-          <p:nvPr>
-            <p:ph idx="100" type="title" hasCustomPrompt="1"/>
-          </p:nvPr>
-        </p:nvSpPr>
-        <p:spPr>
-          <a:xfrm>
-            <a:off x="548640" y="658368"/>
-            <a:ext cx="8046720" cy="566928"/>
+          <p:cNvSpPr txBox="1"/>
+          <p:nvPr/>
+        </p:nvSpPr>
+        <p:spPr>
+          <a:xfrm rot="-180000">
+            <a:off x="411480" y="201168"/>
+            <a:ext cx="1915668" cy="352044"/>
+          </a:xfrm>
+          <a:prstGeom prst="rect">
+            <a:avLst/>
+          </a:prstGeom>
+          <a:solidFill>
+            <a:srgbClr val="DD6420"/>
+          </a:solidFill>
+          <a:ln>
+            <a:solidFill>
+              <a:srgbClr val="DD6420"/>
+            </a:solidFill>
+          </a:ln>
+        </p:spPr>
+        <p:txBody>
+          <a:bodyPr wrap="square" lIns="0" tIns="0" rIns="0" bIns="0" rtlCol="0" anchor="ctr"/>
+          <a:lstStyle/>
+          <a:p>
+            <a:pPr algn="ctr" indent="0" marL="0">
+              <a:buNone/>
+            </a:pPr>
+            <a:r>
+              <a:rPr lang="ja-JP" altLang="en-US" sz="1100" dirty="0">
+                <a:solidFill>
+                  <a:srgbClr val="FFFFFF"/>
+                </a:solidFill>
+                <a:latin typeface="Dela Gothic One" pitchFamily="34" charset="0"/>
+                <a:ea typeface="けいふぉんと" pitchFamily="34" charset="-122"/>
+                <a:cs typeface="Dela Gothic One" pitchFamily="34" charset="-120"/>
+              </a:rPr>
+              <a:t>ハンズオン① 20分</a:t>
+            </a:r>
+            <a:endParaRPr lang="ja-JP" sz="1100" dirty="0"/>
+          </a:p>
+        </p:txBody>
+      </p:sp>
+      <p:sp>
+        <p:nvSpPr>
+          <p:cNvPr id="3" name="Text 1"/>
+          <p:cNvSpPr txBox="1"/>
+          <p:nvPr/>
+        </p:nvSpPr>
+        <p:spPr>
+          <a:xfrm>
+            <a:off x="411480" y="502920"/>
+            <a:ext cx="8321040" cy="685800"/>
           </a:xfrm>
           <a:prstGeom prst="rect">
             <a:avLst/>
@@ -4224,122 +4201,118 @@
           <a:ln/>
         </p:spPr>
         <p:txBody>
-          <a:bodyPr wrap="square" lIns="0" tIns="0" rIns="0" bIns="0" rtlCol="0" anchor="ctr"/>
-          <a:lstStyle/>
-          <a:p>
-            <a:pPr algn="l" indent="0" marL="0">
-              <a:buNone/>
-            </a:pPr>
-            <a:r>
-              <a:rPr lang="en-US" sz="2400" b="1" dirty="0">
-                <a:solidFill>
-                  <a:schemeClr val="tx1"/>
-                </a:solidFill>
+          <a:bodyPr wrap="square" lIns="0" tIns="0" rIns="0" bIns="0" rtlCol="0" anchor="ctr">
+            <a:normAutofit/>
+          </a:bodyPr>
+          <a:lstStyle/>
+          <a:p>
+            <a:pPr indent="0" marL="0">
+              <a:buNone/>
+            </a:pPr>
+            <a:r>
+              <a:rPr lang="ja-JP" altLang="en-US" sz="2600" dirty="0">
+                <a:solidFill>
+                  <a:srgbClr val="1A1A1A"/>
+                </a:solidFill>
+                <a:latin typeface="Dela Gothic One" pitchFamily="34" charset="0"/>
+                <a:ea typeface="けいふぉんと" pitchFamily="34" charset="-122"/>
+                <a:cs typeface="Dela Gothic One" pitchFamily="34" charset="-120"/>
               </a:rPr>
               <a:t>運用ルール表を作る</a:t>
             </a:r>
-            <a:endParaRPr lang="en-US" sz="2400" dirty="0"/>
-          </a:p>
-        </p:txBody>
-      </p:sp>
-      <p:sp>
-        <p:nvSpPr>
-          <p:cNvPr id="3" name="chip"/>
+            <a:endParaRPr lang="ja-JP" sz="2600" dirty="0"/>
+          </a:p>
+        </p:txBody>
+      </p:sp>
+      <p:sp>
+        <p:nvSpPr>
+          <p:cNvPr id="4" name="card"/>
           <p:cNvSpPr/>
           <p:nvPr/>
         </p:nvSpPr>
         <p:spPr>
           <a:xfrm>
-            <a:off x="548640" y="292608"/>
-            <a:ext cx="1755648" cy="292608"/>
+            <a:off x="502920" y="1947672"/>
+            <a:ext cx="8138160" cy="566928"/>
           </a:xfrm>
           <a:prstGeom prst="roundRect">
             <a:avLst>
-              <a:gd name="adj" fmla="val 50000"/>
+              <a:gd name="adj" fmla="val 16129"/>
             </a:avLst>
           </a:prstGeom>
           <a:solidFill>
-            <a:schemeClr val="accent2"/>
-          </a:solidFill>
-          <a:ln w="12700">
-            <a:solidFill>
-              <a:schemeClr val="accent2"/>
-            </a:solidFill>
-            <a:prstDash val="solid"/>
-          </a:ln>
-        </p:spPr>
-      </p:sp>
-      <p:sp>
-        <p:nvSpPr>
-          <p:cNvPr id="4" name="chip-text"/>
-          <p:cNvSpPr txBox="1"/>
-          <p:nvPr/>
-        </p:nvSpPr>
-        <p:spPr>
-          <a:xfrm>
-            <a:off x="548640" y="292608"/>
-            <a:ext cx="1755648" cy="292608"/>
-          </a:xfrm>
-          <a:prstGeom prst="rect">
-            <a:avLst/>
-          </a:prstGeom>
-          <a:noFill/>
-          <a:ln/>
-        </p:spPr>
-        <p:txBody>
-          <a:bodyPr wrap="square" lIns="0" tIns="0" rIns="0" bIns="0" rtlCol="0" anchor="ctr"/>
-          <a:lstStyle/>
-          <a:p>
-            <a:pPr algn="ctr" indent="0" marL="0">
-              <a:buNone/>
-            </a:pPr>
-            <a:r>
-              <a:rPr lang="en-US" sz="1100" b="1" dirty="0">
-                <a:solidFill>
-                  <a:schemeClr val="bg1"/>
-                </a:solidFill>
-              </a:rPr>
-              <a:t>ハンズオン① 20分</a:t>
-            </a:r>
-            <a:endParaRPr lang="en-US" sz="1100" dirty="0"/>
-          </a:p>
-        </p:txBody>
-      </p:sp>
-      <p:sp>
-        <p:nvSpPr>
-          <p:cNvPr id="5" name="step-num"/>
-          <p:cNvSpPr/>
-          <p:nvPr/>
-        </p:nvSpPr>
-        <p:spPr>
-          <a:xfrm>
-            <a:off x="548640" y="2107692"/>
-            <a:ext cx="384048" cy="384048"/>
-          </a:xfrm>
-          <a:prstGeom prst="ellipse">
-            <a:avLst/>
-          </a:prstGeom>
-          <a:solidFill>
-            <a:schemeClr val="accent1"/>
-          </a:solidFill>
-          <a:ln w="15875">
+            <a:srgbClr val="FFFFFF"/>
+          </a:solidFill>
+          <a:ln w="25400">
             <a:solidFill>
               <a:srgbClr val="1A1A1A"/>
             </a:solidFill>
             <a:prstDash val="solid"/>
           </a:ln>
-        </p:spPr>
-      </p:sp>
-      <p:sp>
-        <p:nvSpPr>
-          <p:cNvPr id="6" name="step-num-text"/>
+          <a:effectLst>
+            <a:outerShdw sx="100000" sy="100000" kx="0" ky="0" algn="bl" rotWithShape="0" blurRad="101600" dist="38100" dir="2700000">
+              <a:srgbClr val="1A1A1A">
+                <a:alpha val="100000"/>
+              </a:srgbClr>
+            </a:outerShdw>
+          </a:effectLst>
+        </p:spPr>
+      </p:sp>
+      <p:sp>
+        <p:nvSpPr>
+          <p:cNvPr id="5" name="Text 3"/>
           <p:cNvSpPr txBox="1"/>
           <p:nvPr/>
         </p:nvSpPr>
         <p:spPr>
           <a:xfrm>
-            <a:off x="548640" y="2107692"/>
-            <a:ext cx="384048" cy="384048"/>
+            <a:off x="640080" y="2029968"/>
+            <a:ext cx="402336" cy="402336"/>
+          </a:xfrm>
+          <a:prstGeom prst="ellipse">
+            <a:avLst/>
+          </a:prstGeom>
+          <a:solidFill>
+            <a:srgbClr val="DD6420"/>
+          </a:solidFill>
+          <a:ln w="19050">
+            <a:solidFill>
+              <a:srgbClr val="1A1A1A"/>
+            </a:solidFill>
+          </a:ln>
+        </p:spPr>
+        <p:txBody>
+          <a:bodyPr wrap="square" lIns="0" tIns="0" rIns="0" bIns="0" rtlCol="0" anchor="ctr"/>
+          <a:lstStyle/>
+          <a:p>
+            <a:pPr algn="ctr" indent="0" marL="0">
+              <a:buNone/>
+            </a:pPr>
+            <a:r>
+              <a:rPr lang="ja-JP" altLang="en-US" sz="1500" dirty="0">
+                <a:solidFill>
+                  <a:srgbClr val="FFFFFF"/>
+                </a:solidFill>
+                <a:latin typeface="Dela Gothic One" pitchFamily="34" charset="0"/>
+                <a:ea typeface="けいふぉんと" pitchFamily="34" charset="-122"/>
+                <a:cs typeface="Dela Gothic One" pitchFamily="34" charset="-120"/>
+              </a:rPr>
+              <a:t>1</a:t>
+            </a:r>
+            <a:endParaRPr lang="ja-JP" sz="1500" dirty="0"/>
+          </a:p>
+        </p:txBody>
+      </p:sp>
+      <p:sp>
+        <p:nvSpPr>
+          <p:cNvPr id="6" name="step-text"/>
+          <p:cNvSpPr txBox="1"/>
+          <p:nvPr/>
+        </p:nvSpPr>
+        <p:spPr>
+          <a:xfrm>
+            <a:off x="1234440" y="1947672"/>
+            <a:ext cx="7269480" cy="566928"/>
           </a:xfrm>
           <a:prstGeom prst="rect">
             <a:avLst/>
@@ -4348,95 +4321,118 @@
           <a:ln/>
         </p:spPr>
         <p:txBody>
-          <a:bodyPr wrap="square" lIns="0" tIns="0" rIns="0" bIns="0" rtlCol="0" anchor="ctr"/>
-          <a:lstStyle/>
-          <a:p>
-            <a:pPr algn="ctr" indent="0" marL="0">
-              <a:buNone/>
-            </a:pPr>
-            <a:r>
-              <a:rPr lang="en-US" sz="1400" b="1" dirty="0">
-                <a:solidFill>
-                  <a:schemeClr val="tx1"/>
-                </a:solidFill>
-              </a:rPr>
-              <a:t>1</a:t>
-            </a:r>
-            <a:endParaRPr lang="en-US" sz="1400" dirty="0"/>
-          </a:p>
-        </p:txBody>
-      </p:sp>
-      <p:sp>
-        <p:nvSpPr>
-          <p:cNvPr id="7" name="step-text"/>
-          <p:cNvSpPr txBox="1"/>
-          <p:nvPr/>
-        </p:nvSpPr>
-        <p:spPr>
-          <a:xfrm>
-            <a:off x="1097280" y="1997964"/>
-            <a:ext cx="7498080" cy="603504"/>
-          </a:xfrm>
-          <a:prstGeom prst="rect">
-            <a:avLst/>
-          </a:prstGeom>
-          <a:noFill/>
-          <a:ln/>
-        </p:spPr>
-        <p:txBody>
-          <a:bodyPr wrap="square" lIns="0" tIns="0" rIns="0" bIns="0" rtlCol="0" anchor="ctr"/>
+          <a:bodyPr wrap="square" lIns="0" tIns="0" rIns="0" bIns="0" rtlCol="0" anchor="ctr">
+            <a:normAutofit/>
+          </a:bodyPr>
           <a:lstStyle/>
           <a:p>
             <a:pPr indent="0" marL="0">
               <a:buNone/>
             </a:pPr>
             <a:r>
-              <a:rPr lang="en-US" sz="1450" dirty="0">
-                <a:solidFill>
-                  <a:schemeClr val="tx1"/>
-                </a:solidFill>
+              <a:rPr lang="ja-JP" altLang="en-US" sz="1400" b="1" dirty="0">
+                <a:solidFill>
+                  <a:srgbClr val="1A1A1A"/>
+                </a:solidFill>
+                <a:latin typeface="Noto Sans JP" pitchFamily="34" charset="0"/>
+                <a:ea typeface="Noto Sans JP" pitchFamily="34" charset="-122"/>
+                <a:cs typeface="Noto Sans JP" pitchFamily="34" charset="-120"/>
               </a:rPr>
               <a:t>ワークシート「運用ルール表」を自社用に埋める</a:t>
             </a:r>
-            <a:endParaRPr lang="en-US" sz="1450" dirty="0"/>
-          </a:p>
-        </p:txBody>
-      </p:sp>
-      <p:sp>
-        <p:nvSpPr>
-          <p:cNvPr id="8" name="step-num"/>
+            <a:endParaRPr lang="ja-JP" sz="1400" dirty="0"/>
+          </a:p>
+        </p:txBody>
+      </p:sp>
+      <p:sp>
+        <p:nvSpPr>
+          <p:cNvPr id="7" name="card"/>
           <p:cNvSpPr/>
           <p:nvPr/>
         </p:nvSpPr>
         <p:spPr>
           <a:xfrm>
-            <a:off x="548640" y="2711196"/>
-            <a:ext cx="384048" cy="384048"/>
-          </a:xfrm>
-          <a:prstGeom prst="ellipse">
-            <a:avLst/>
-          </a:prstGeom>
-          <a:solidFill>
-            <a:schemeClr val="accent1"/>
-          </a:solidFill>
-          <a:ln w="15875">
+            <a:off x="502920" y="2642616"/>
+            <a:ext cx="8138160" cy="566928"/>
+          </a:xfrm>
+          <a:prstGeom prst="roundRect">
+            <a:avLst>
+              <a:gd name="adj" fmla="val 16129"/>
+            </a:avLst>
+          </a:prstGeom>
+          <a:solidFill>
+            <a:srgbClr val="FFFFFF"/>
+          </a:solidFill>
+          <a:ln w="25400">
             <a:solidFill>
               <a:srgbClr val="1A1A1A"/>
             </a:solidFill>
             <a:prstDash val="solid"/>
           </a:ln>
-        </p:spPr>
-      </p:sp>
-      <p:sp>
-        <p:nvSpPr>
-          <p:cNvPr id="9" name="step-num-text"/>
+          <a:effectLst>
+            <a:outerShdw sx="100000" sy="100000" kx="0" ky="0" algn="bl" rotWithShape="0" blurRad="101600" dist="38100" dir="2700000">
+              <a:srgbClr val="1A1A1A">
+                <a:alpha val="100000"/>
+              </a:srgbClr>
+            </a:outerShdw>
+          </a:effectLst>
+        </p:spPr>
+      </p:sp>
+      <p:sp>
+        <p:nvSpPr>
+          <p:cNvPr id="8" name="Text 6"/>
           <p:cNvSpPr txBox="1"/>
           <p:nvPr/>
         </p:nvSpPr>
         <p:spPr>
           <a:xfrm>
-            <a:off x="548640" y="2711196"/>
-            <a:ext cx="384048" cy="384048"/>
+            <a:off x="640080" y="2724912"/>
+            <a:ext cx="402336" cy="402336"/>
+          </a:xfrm>
+          <a:prstGeom prst="ellipse">
+            <a:avLst/>
+          </a:prstGeom>
+          <a:solidFill>
+            <a:srgbClr val="DD6420"/>
+          </a:solidFill>
+          <a:ln w="19050">
+            <a:solidFill>
+              <a:srgbClr val="1A1A1A"/>
+            </a:solidFill>
+          </a:ln>
+        </p:spPr>
+        <p:txBody>
+          <a:bodyPr wrap="square" lIns="0" tIns="0" rIns="0" bIns="0" rtlCol="0" anchor="ctr"/>
+          <a:lstStyle/>
+          <a:p>
+            <a:pPr algn="ctr" indent="0" marL="0">
+              <a:buNone/>
+            </a:pPr>
+            <a:r>
+              <a:rPr lang="ja-JP" altLang="en-US" sz="1500" dirty="0">
+                <a:solidFill>
+                  <a:srgbClr val="FFFFFF"/>
+                </a:solidFill>
+                <a:latin typeface="Dela Gothic One" pitchFamily="34" charset="0"/>
+                <a:ea typeface="けいふぉんと" pitchFamily="34" charset="-122"/>
+                <a:cs typeface="Dela Gothic One" pitchFamily="34" charset="-120"/>
+              </a:rPr>
+              <a:t>2</a:t>
+            </a:r>
+            <a:endParaRPr lang="ja-JP" sz="1500" dirty="0"/>
+          </a:p>
+        </p:txBody>
+      </p:sp>
+      <p:sp>
+        <p:nvSpPr>
+          <p:cNvPr id="9" name="step-text"/>
+          <p:cNvSpPr txBox="1"/>
+          <p:nvPr/>
+        </p:nvSpPr>
+        <p:spPr>
+          <a:xfrm>
+            <a:off x="1234440" y="2642616"/>
+            <a:ext cx="7269480" cy="566928"/>
           </a:xfrm>
           <a:prstGeom prst="rect">
             <a:avLst/>
@@ -4445,95 +4441,118 @@
           <a:ln/>
         </p:spPr>
         <p:txBody>
-          <a:bodyPr wrap="square" lIns="0" tIns="0" rIns="0" bIns="0" rtlCol="0" anchor="ctr"/>
-          <a:lstStyle/>
-          <a:p>
-            <a:pPr algn="ctr" indent="0" marL="0">
-              <a:buNone/>
-            </a:pPr>
-            <a:r>
-              <a:rPr lang="en-US" sz="1400" b="1" dirty="0">
-                <a:solidFill>
-                  <a:schemeClr val="tx1"/>
-                </a:solidFill>
-              </a:rPr>
-              <a:t>2</a:t>
-            </a:r>
-            <a:endParaRPr lang="en-US" sz="1400" dirty="0"/>
-          </a:p>
-        </p:txBody>
-      </p:sp>
-      <p:sp>
-        <p:nvSpPr>
-          <p:cNvPr id="10" name="step-text"/>
-          <p:cNvSpPr txBox="1"/>
-          <p:nvPr/>
-        </p:nvSpPr>
-        <p:spPr>
-          <a:xfrm>
-            <a:off x="1097280" y="2601468"/>
-            <a:ext cx="7498080" cy="603504"/>
-          </a:xfrm>
-          <a:prstGeom prst="rect">
-            <a:avLst/>
-          </a:prstGeom>
-          <a:noFill/>
-          <a:ln/>
-        </p:spPr>
-        <p:txBody>
-          <a:bodyPr wrap="square" lIns="0" tIns="0" rIns="0" bIns="0" rtlCol="0" anchor="ctr"/>
+          <a:bodyPr wrap="square" lIns="0" tIns="0" rIns="0" bIns="0" rtlCol="0" anchor="ctr">
+            <a:normAutofit/>
+          </a:bodyPr>
           <a:lstStyle/>
           <a:p>
             <a:pPr indent="0" marL="0">
               <a:buNone/>
             </a:pPr>
             <a:r>
-              <a:rPr lang="en-US" sz="1450" dirty="0">
-                <a:solidFill>
-                  <a:schemeClr val="tx1"/>
-                </a:solidFill>
+              <a:rPr lang="ja-JP" altLang="en-US" sz="1400" b="1" dirty="0">
+                <a:solidFill>
+                  <a:srgbClr val="1A1A1A"/>
+                </a:solidFill>
+                <a:latin typeface="Noto Sans JP" pitchFamily="34" charset="0"/>
+                <a:ea typeface="Noto Sans JP" pitchFamily="34" charset="-122"/>
+                <a:cs typeface="Noto Sans JP" pitchFamily="34" charset="-120"/>
               </a:rPr>
               <a:t>Wikiの「02 業務ルール」に置く</a:t>
             </a:r>
-            <a:endParaRPr lang="en-US" sz="1450" dirty="0"/>
-          </a:p>
-        </p:txBody>
-      </p:sp>
-      <p:sp>
-        <p:nvSpPr>
-          <p:cNvPr id="11" name="step-num"/>
+            <a:endParaRPr lang="ja-JP" sz="1400" dirty="0"/>
+          </a:p>
+        </p:txBody>
+      </p:sp>
+      <p:sp>
+        <p:nvSpPr>
+          <p:cNvPr id="10" name="card"/>
           <p:cNvSpPr/>
           <p:nvPr/>
         </p:nvSpPr>
         <p:spPr>
           <a:xfrm>
-            <a:off x="548640" y="3314700"/>
-            <a:ext cx="384048" cy="384048"/>
-          </a:xfrm>
-          <a:prstGeom prst="ellipse">
-            <a:avLst/>
-          </a:prstGeom>
-          <a:solidFill>
-            <a:schemeClr val="accent1"/>
-          </a:solidFill>
-          <a:ln w="15875">
+            <a:off x="502920" y="3337560"/>
+            <a:ext cx="8138160" cy="566928"/>
+          </a:xfrm>
+          <a:prstGeom prst="roundRect">
+            <a:avLst>
+              <a:gd name="adj" fmla="val 16129"/>
+            </a:avLst>
+          </a:prstGeom>
+          <a:solidFill>
+            <a:srgbClr val="FFFFFF"/>
+          </a:solidFill>
+          <a:ln w="25400">
             <a:solidFill>
               <a:srgbClr val="1A1A1A"/>
             </a:solidFill>
             <a:prstDash val="solid"/>
           </a:ln>
-        </p:spPr>
-      </p:sp>
-      <p:sp>
-        <p:nvSpPr>
-          <p:cNvPr id="12" name="step-num-text"/>
+          <a:effectLst>
+            <a:outerShdw sx="100000" sy="100000" kx="0" ky="0" algn="bl" rotWithShape="0" blurRad="101600" dist="38100" dir="2700000">
+              <a:srgbClr val="1A1A1A">
+                <a:alpha val="100000"/>
+              </a:srgbClr>
+            </a:outerShdw>
+          </a:effectLst>
+        </p:spPr>
+      </p:sp>
+      <p:sp>
+        <p:nvSpPr>
+          <p:cNvPr id="11" name="Text 9"/>
           <p:cNvSpPr txBox="1"/>
           <p:nvPr/>
         </p:nvSpPr>
         <p:spPr>
           <a:xfrm>
-            <a:off x="548640" y="3314700"/>
-            <a:ext cx="384048" cy="384048"/>
+            <a:off x="640080" y="3419856"/>
+            <a:ext cx="402336" cy="402336"/>
+          </a:xfrm>
+          <a:prstGeom prst="ellipse">
+            <a:avLst/>
+          </a:prstGeom>
+          <a:solidFill>
+            <a:srgbClr val="DD6420"/>
+          </a:solidFill>
+          <a:ln w="19050">
+            <a:solidFill>
+              <a:srgbClr val="1A1A1A"/>
+            </a:solidFill>
+          </a:ln>
+        </p:spPr>
+        <p:txBody>
+          <a:bodyPr wrap="square" lIns="0" tIns="0" rIns="0" bIns="0" rtlCol="0" anchor="ctr"/>
+          <a:lstStyle/>
+          <a:p>
+            <a:pPr algn="ctr" indent="0" marL="0">
+              <a:buNone/>
+            </a:pPr>
+            <a:r>
+              <a:rPr lang="ja-JP" altLang="en-US" sz="1500" dirty="0">
+                <a:solidFill>
+                  <a:srgbClr val="FFFFFF"/>
+                </a:solidFill>
+                <a:latin typeface="Dela Gothic One" pitchFamily="34" charset="0"/>
+                <a:ea typeface="けいふぉんと" pitchFamily="34" charset="-122"/>
+                <a:cs typeface="Dela Gothic One" pitchFamily="34" charset="-120"/>
+              </a:rPr>
+              <a:t>3</a:t>
+            </a:r>
+            <a:endParaRPr lang="ja-JP" sz="1500" dirty="0"/>
+          </a:p>
+        </p:txBody>
+      </p:sp>
+      <p:sp>
+        <p:nvSpPr>
+          <p:cNvPr id="12" name="step-text"/>
+          <p:cNvSpPr txBox="1"/>
+          <p:nvPr/>
+        </p:nvSpPr>
+        <p:spPr>
+          <a:xfrm>
+            <a:off x="1234440" y="3337560"/>
+            <a:ext cx="7269480" cy="566928"/>
           </a:xfrm>
           <a:prstGeom prst="rect">
             <a:avLst/>
@@ -4542,57 +4561,26 @@
           <a:ln/>
         </p:spPr>
         <p:txBody>
-          <a:bodyPr wrap="square" lIns="0" tIns="0" rIns="0" bIns="0" rtlCol="0" anchor="ctr"/>
-          <a:lstStyle/>
-          <a:p>
-            <a:pPr algn="ctr" indent="0" marL="0">
-              <a:buNone/>
-            </a:pPr>
-            <a:r>
-              <a:rPr lang="en-US" sz="1400" b="1" dirty="0">
-                <a:solidFill>
-                  <a:schemeClr val="tx1"/>
-                </a:solidFill>
-              </a:rPr>
-              <a:t>3</a:t>
-            </a:r>
-            <a:endParaRPr lang="en-US" sz="1400" dirty="0"/>
-          </a:p>
-        </p:txBody>
-      </p:sp>
-      <p:sp>
-        <p:nvSpPr>
-          <p:cNvPr id="13" name="step-text"/>
-          <p:cNvSpPr txBox="1"/>
-          <p:nvPr/>
-        </p:nvSpPr>
-        <p:spPr>
-          <a:xfrm>
-            <a:off x="1097280" y="3204972"/>
-            <a:ext cx="7498080" cy="603504"/>
-          </a:xfrm>
-          <a:prstGeom prst="rect">
-            <a:avLst/>
-          </a:prstGeom>
-          <a:noFill/>
-          <a:ln/>
-        </p:spPr>
-        <p:txBody>
-          <a:bodyPr wrap="square" lIns="0" tIns="0" rIns="0" bIns="0" rtlCol="0" anchor="ctr"/>
+          <a:bodyPr wrap="square" lIns="0" tIns="0" rIns="0" bIns="0" rtlCol="0" anchor="ctr">
+            <a:normAutofit/>
+          </a:bodyPr>
           <a:lstStyle/>
           <a:p>
             <a:pPr indent="0" marL="0">
               <a:buNone/>
             </a:pPr>
             <a:r>
-              <a:rPr lang="en-US" sz="1450" dirty="0">
-                <a:solidFill>
-                  <a:schemeClr val="tx1"/>
-                </a:solidFill>
+              <a:rPr lang="ja-JP" altLang="en-US" sz="1400" b="1" dirty="0">
+                <a:solidFill>
+                  <a:srgbClr val="1A1A1A"/>
+                </a:solidFill>
+                <a:latin typeface="Noto Sans JP" pitchFamily="34" charset="0"/>
+                <a:ea typeface="Noto Sans JP" pitchFamily="34" charset="-122"/>
+                <a:cs typeface="Noto Sans JP" pitchFamily="34" charset="-120"/>
               </a:rPr>
               <a:t>AIに「この表で抜けている観点はありますか」と聞いて見直す</a:t>
             </a:r>
-            <a:endParaRPr lang="en-US" sz="1450" dirty="0"/>
+            <a:endParaRPr lang="ja-JP" sz="1400" dirty="0"/>
           </a:p>
         </p:txBody>
       </p:sp>
@@ -4608,8 +4596,8 @@
         </p:nvSpPr>
         <p:spPr>
           <a:xfrm>
-            <a:off x="8229600" y="4773168"/>
-            <a:ext cx="365760" cy="228600"/>
+            <a:off x="8366760" y="4754880"/>
+            <a:ext cx="365760" cy="274320"/>
           </a:xfrm>
           <a:prstGeom prst="rect">
             <a:avLst/>
@@ -4621,20 +4609,23 @@
           </a:extLst>
         </p:spPr>
         <p:txBody>
-          <a:bodyPr/>
+          <a:bodyPr anchor="ctr"/>
           <a:lstStyle>
             <a:lvl1pPr>
-              <a:defRPr sz="900">
-                <a:solidFill>
-                  <a:srgbClr val="5A6872"/>
-                </a:solidFill>
+              <a:defRPr sz="850">
+                <a:solidFill>
+                  <a:srgbClr val="FFFFFF"/>
+                </a:solidFill>
+                <a:latin typeface="Noto Sans JP"/>
+                <a:ea typeface="Noto Sans JP"/>
+                <a:cs typeface="Noto Sans JP"/>
               </a:defRPr>
             </a:lvl1pPr>
           </a:lstStyle>
           <a:p>
             <a:pPr algn="r"/>
             <a:fld id="{F7021451-1387-4CA6-816F-3879F97B5CBC}" type="slidenum">
-              <a:rPr b="0" lang="en-US"/>
+              <a:rPr b="1" lang="en-US"/>
               <a:t>4</a:t>
             </a:fld>
             <a:endParaRPr lang="en-US"/>
@@ -4669,15 +4660,58 @@
       <p:sp>
         <p:nvSpPr>
           <p:cNvPr id="2" name="Text 0"/>
-          <p:cNvSpPr/>
-          <p:nvPr>
-            <p:ph idx="100" type="title" hasCustomPrompt="1"/>
-          </p:nvPr>
-        </p:nvSpPr>
-        <p:spPr>
-          <a:xfrm>
-            <a:off x="548640" y="658368"/>
-            <a:ext cx="8046720" cy="566928"/>
+          <p:cNvSpPr txBox="1"/>
+          <p:nvPr/>
+        </p:nvSpPr>
+        <p:spPr>
+          <a:xfrm rot="-180000">
+            <a:off x="411480" y="201168"/>
+            <a:ext cx="1478128" cy="352044"/>
+          </a:xfrm>
+          <a:prstGeom prst="rect">
+            <a:avLst/>
+          </a:prstGeom>
+          <a:solidFill>
+            <a:srgbClr val="1A1A1A"/>
+          </a:solidFill>
+          <a:ln>
+            <a:solidFill>
+              <a:srgbClr val="1A1A1A"/>
+            </a:solidFill>
+          </a:ln>
+        </p:spPr>
+        <p:txBody>
+          <a:bodyPr wrap="square" lIns="0" tIns="0" rIns="0" bIns="0" rtlCol="0" anchor="ctr"/>
+          <a:lstStyle/>
+          <a:p>
+            <a:pPr algn="ctr" indent="0" marL="0">
+              <a:buNone/>
+            </a:pPr>
+            <a:r>
+              <a:rPr lang="ja-JP" altLang="en-US" sz="1100" dirty="0">
+                <a:solidFill>
+                  <a:srgbClr val="FFFFFF"/>
+                </a:solidFill>
+                <a:latin typeface="Dela Gothic One" pitchFamily="34" charset="0"/>
+                <a:ea typeface="けいふぉんと" pitchFamily="34" charset="-122"/>
+                <a:cs typeface="Dela Gothic One" pitchFamily="34" charset="-120"/>
+              </a:rPr>
+              <a:t>説明② 10分</a:t>
+            </a:r>
+            <a:endParaRPr lang="ja-JP" sz="1100" dirty="0"/>
+          </a:p>
+        </p:txBody>
+      </p:sp>
+      <p:sp>
+        <p:nvSpPr>
+          <p:cNvPr id="3" name="Text 1"/>
+          <p:cNvSpPr txBox="1"/>
+          <p:nvPr/>
+        </p:nvSpPr>
+        <p:spPr>
+          <a:xfrm>
+            <a:off x="411480" y="502920"/>
+            <a:ext cx="8321040" cy="685800"/>
           </a:xfrm>
           <a:prstGeom prst="rect">
             <a:avLst/>
@@ -4686,116 +4720,58 @@
           <a:ln/>
         </p:spPr>
         <p:txBody>
-          <a:bodyPr wrap="square" lIns="0" tIns="0" rIns="0" bIns="0" rtlCol="0" anchor="ctr"/>
-          <a:lstStyle/>
-          <a:p>
-            <a:pPr algn="l" indent="0" marL="0">
-              <a:buNone/>
-            </a:pPr>
-            <a:r>
-              <a:rPr lang="en-US" sz="2400" b="1" dirty="0">
-                <a:solidFill>
-                  <a:schemeClr val="tx1"/>
-                </a:solidFill>
+          <a:bodyPr wrap="square" lIns="0" tIns="0" rIns="0" bIns="0" rtlCol="0" anchor="ctr">
+            <a:normAutofit/>
+          </a:bodyPr>
+          <a:lstStyle/>
+          <a:p>
+            <a:pPr indent="0" marL="0">
+              <a:buNone/>
+            </a:pPr>
+            <a:r>
+              <a:rPr lang="ja-JP" altLang="en-US" sz="2600" dirty="0">
+                <a:solidFill>
+                  <a:srgbClr val="1A1A1A"/>
+                </a:solidFill>
+                <a:latin typeface="Dela Gothic One" pitchFamily="34" charset="0"/>
+                <a:ea typeface="けいふぉんと" pitchFamily="34" charset="-122"/>
+                <a:cs typeface="Dela Gothic One" pitchFamily="34" charset="-120"/>
               </a:rPr>
               <a:t>改善の回し方</a:t>
             </a:r>
-            <a:endParaRPr lang="en-US" sz="2400" dirty="0"/>
-          </a:p>
-        </p:txBody>
-      </p:sp>
-      <p:sp>
-        <p:nvSpPr>
-          <p:cNvPr id="3" name="chip"/>
+            <a:endParaRPr lang="ja-JP" sz="2600" dirty="0"/>
+          </a:p>
+        </p:txBody>
+      </p:sp>
+      <p:sp>
+        <p:nvSpPr>
+          <p:cNvPr id="4" name="card"/>
           <p:cNvSpPr/>
           <p:nvPr/>
         </p:nvSpPr>
         <p:spPr>
           <a:xfrm>
-            <a:off x="548640" y="292608"/>
-            <a:ext cx="1344168" cy="292608"/>
+            <a:off x="502920" y="1691640"/>
+            <a:ext cx="1746504" cy="1600200"/>
           </a:xfrm>
           <a:prstGeom prst="roundRect">
             <a:avLst>
-              <a:gd name="adj" fmla="val 50000"/>
+              <a:gd name="adj" fmla="val 5714"/>
             </a:avLst>
           </a:prstGeom>
           <a:solidFill>
-            <a:schemeClr val="tx1"/>
-          </a:solidFill>
-          <a:ln w="12700">
-            <a:solidFill>
-              <a:schemeClr val="tx1"/>
-            </a:solidFill>
-            <a:prstDash val="solid"/>
-          </a:ln>
-        </p:spPr>
-      </p:sp>
-      <p:sp>
-        <p:nvSpPr>
-          <p:cNvPr id="4" name="chip-text"/>
-          <p:cNvSpPr txBox="1"/>
-          <p:nvPr/>
-        </p:nvSpPr>
-        <p:spPr>
-          <a:xfrm>
-            <a:off x="548640" y="292608"/>
-            <a:ext cx="1344168" cy="292608"/>
-          </a:xfrm>
-          <a:prstGeom prst="rect">
-            <a:avLst/>
-          </a:prstGeom>
-          <a:noFill/>
-          <a:ln/>
-        </p:spPr>
-        <p:txBody>
-          <a:bodyPr wrap="square" lIns="0" tIns="0" rIns="0" bIns="0" rtlCol="0" anchor="ctr"/>
-          <a:lstStyle/>
-          <a:p>
-            <a:pPr algn="ctr" indent="0" marL="0">
-              <a:buNone/>
-            </a:pPr>
-            <a:r>
-              <a:rPr lang="en-US" sz="1100" b="1" dirty="0">
-                <a:solidFill>
-                  <a:schemeClr val="accent1"/>
-                </a:solidFill>
-              </a:rPr>
-              <a:t>説明② 10分</a:t>
-            </a:r>
-            <a:endParaRPr lang="en-US" sz="1100" dirty="0"/>
-          </a:p>
-        </p:txBody>
-      </p:sp>
-      <p:sp>
-        <p:nvSpPr>
-          <p:cNvPr id="5" name="card"/>
-          <p:cNvSpPr/>
-          <p:nvPr/>
-        </p:nvSpPr>
-        <p:spPr>
-          <a:xfrm>
-            <a:off x="548640" y="1828800"/>
-            <a:ext cx="1723644" cy="1463040"/>
-          </a:xfrm>
-          <a:prstGeom prst="roundRect">
-            <a:avLst>
-              <a:gd name="adj" fmla="val 7500"/>
-            </a:avLst>
-          </a:prstGeom>
-          <a:solidFill>
-            <a:schemeClr val="bg1"/>
-          </a:solidFill>
-          <a:ln w="19050">
+            <a:srgbClr val="FFFFFF"/>
+          </a:solidFill>
+          <a:ln w="25400">
             <a:solidFill>
               <a:srgbClr val="1A1A1A"/>
             </a:solidFill>
             <a:prstDash val="solid"/>
           </a:ln>
           <a:effectLst>
-            <a:outerShdw sx="100000" sy="100000" kx="0" ky="0" algn="bl" rotWithShape="0" blurRad="101600" dist="38100" dir="2700000">
-              <a:srgbClr val="000000">
-                <a:alpha val="18000"/>
+            <a:outerShdw sx="100000" sy="100000" kx="0" ky="0" algn="bl" rotWithShape="0" blurRad="101600" dist="50800" dir="2700000">
+              <a:srgbClr val="1A1A1A">
+                <a:alpha val="100000"/>
               </a:srgbClr>
             </a:outerShdw>
           </a:effectLst>
@@ -4803,14 +4779,59 @@
       </p:sp>
       <p:sp>
         <p:nvSpPr>
-          <p:cNvPr id="6" name="Text 4"/>
+          <p:cNvPr id="5" name="Text 3"/>
           <p:cNvSpPr txBox="1"/>
           <p:nvPr/>
         </p:nvSpPr>
         <p:spPr>
-          <a:xfrm>
-            <a:off x="548640" y="1993392"/>
-            <a:ext cx="1723644" cy="274320"/>
+          <a:xfrm rot="-180000">
+            <a:off x="918972" y="1545336"/>
+            <a:ext cx="914400" cy="292608"/>
+          </a:xfrm>
+          <a:prstGeom prst="rect">
+            <a:avLst/>
+          </a:prstGeom>
+          <a:solidFill>
+            <a:srgbClr val="1A1A1A"/>
+          </a:solidFill>
+          <a:ln>
+            <a:solidFill>
+              <a:srgbClr val="1A1A1A"/>
+            </a:solidFill>
+          </a:ln>
+        </p:spPr>
+        <p:txBody>
+          <a:bodyPr wrap="square" lIns="0" tIns="0" rIns="0" bIns="0" rtlCol="0" anchor="ctr"/>
+          <a:lstStyle/>
+          <a:p>
+            <a:pPr algn="ctr" indent="0" marL="0">
+              <a:buNone/>
+            </a:pPr>
+            <a:r>
+              <a:rPr lang="ja-JP" altLang="en-US" sz="1000" dirty="0">
+                <a:solidFill>
+                  <a:srgbClr val="FFFFFF"/>
+                </a:solidFill>
+                <a:latin typeface="Dela Gothic One" pitchFamily="34" charset="0"/>
+                <a:ea typeface="けいふぉんと" pitchFamily="34" charset="-122"/>
+                <a:cs typeface="Dela Gothic One" pitchFamily="34" charset="-120"/>
+              </a:rPr>
+              <a:t>STEP 1</a:t>
+            </a:r>
+            <a:endParaRPr lang="ja-JP" sz="1000" dirty="0"/>
+          </a:p>
+        </p:txBody>
+      </p:sp>
+      <p:sp>
+        <p:nvSpPr>
+          <p:cNvPr id="6" name="flow-node"/>
+          <p:cNvSpPr txBox="1"/>
+          <p:nvPr/>
+        </p:nvSpPr>
+        <p:spPr>
+          <a:xfrm>
+            <a:off x="612648" y="1965960"/>
+            <a:ext cx="1527048" cy="1234440"/>
           </a:xfrm>
           <a:prstGeom prst="rect">
             <a:avLst/>
@@ -4819,63 +4840,32 @@
           <a:ln/>
         </p:spPr>
         <p:txBody>
-          <a:bodyPr wrap="square" lIns="0" tIns="0" rIns="0" bIns="0" rtlCol="0" anchor="ctr"/>
+          <a:bodyPr wrap="square" lIns="0" tIns="0" rIns="0" bIns="0" rtlCol="0" anchor="ctr">
+            <a:normAutofit/>
+          </a:bodyPr>
           <a:lstStyle/>
           <a:p>
             <a:pPr algn="ctr" indent="0" marL="0">
               <a:buNone/>
             </a:pPr>
             <a:r>
-              <a:rPr lang="en-US" sz="1000" b="1" dirty="0">
-                <a:solidFill>
-                  <a:schemeClr val="accent2"/>
-                </a:solidFill>
-              </a:rPr>
-              <a:t>STEP 1</a:t>
-            </a:r>
-            <a:endParaRPr lang="en-US" sz="1000" dirty="0"/>
-          </a:p>
-        </p:txBody>
-      </p:sp>
-      <p:sp>
-        <p:nvSpPr>
-          <p:cNvPr id="7" name="flow-node"/>
-          <p:cNvSpPr txBox="1"/>
-          <p:nvPr/>
-        </p:nvSpPr>
-        <p:spPr>
-          <a:xfrm>
-            <a:off x="640080" y="2286000"/>
-            <a:ext cx="1540764" cy="868680"/>
-          </a:xfrm>
-          <a:prstGeom prst="rect">
-            <a:avLst/>
-          </a:prstGeom>
-          <a:noFill/>
-          <a:ln/>
-        </p:spPr>
-        <p:txBody>
-          <a:bodyPr wrap="square" lIns="0" tIns="0" rIns="0" bIns="0" rtlCol="0" anchor="ctr"/>
-          <a:lstStyle/>
-          <a:p>
-            <a:pPr algn="ctr" indent="0" marL="0">
-              <a:buNone/>
-            </a:pPr>
-            <a:r>
-              <a:rPr lang="en-US" sz="1400" b="1" dirty="0">
-                <a:solidFill>
-                  <a:schemeClr val="tx1"/>
-                </a:solidFill>
+              <a:rPr lang="ja-JP" altLang="en-US" sz="1400" b="1" dirty="0">
+                <a:solidFill>
+                  <a:srgbClr val="1A1A1A"/>
+                </a:solidFill>
+                <a:latin typeface="Noto Sans JP" pitchFamily="34" charset="0"/>
+                <a:ea typeface="Noto Sans JP" pitchFamily="34" charset="-122"/>
+                <a:cs typeface="Noto Sans JP" pitchFamily="34" charset="-120"/>
               </a:rPr>
               <a:t>要望をBASEに</a:t>
             </a:r>
-            <a:endParaRPr lang="en-US" sz="1400" dirty="0"/>
+            <a:endParaRPr lang="ja-JP" sz="1400" dirty="0"/>
           </a:p>
         </p:txBody>
       </p:sp>
       <p:pic>
         <p:nvPicPr>
-          <p:cNvPr id="8" name="flow-arrow" descr="preencoded.png">    </p:cNvPr>
+          <p:cNvPr id="7" name="flow-arrow" descr="preencoded.png">    </p:cNvPr>
           <p:cNvPicPr>
             <a:picLocks noChangeAspect="1"/>
           </p:cNvPicPr>
@@ -4889,8 +4879,8 @@
         </p:blipFill>
         <p:spPr>
           <a:xfrm>
-            <a:off x="2345436" y="2441448"/>
-            <a:ext cx="237744" cy="237744"/>
+            <a:off x="2313432" y="2363724"/>
+            <a:ext cx="256032" cy="256032"/>
           </a:xfrm>
           <a:prstGeom prst="rect">
             <a:avLst/>
@@ -4899,33 +4889,33 @@
       </p:pic>
       <p:sp>
         <p:nvSpPr>
-          <p:cNvPr id="9" name="card"/>
+          <p:cNvPr id="8" name="card"/>
           <p:cNvSpPr/>
           <p:nvPr/>
         </p:nvSpPr>
         <p:spPr>
           <a:xfrm>
-            <a:off x="2656332" y="1828800"/>
-            <a:ext cx="1723644" cy="1463040"/>
+            <a:off x="2633472" y="1691640"/>
+            <a:ext cx="1746504" cy="1600200"/>
           </a:xfrm>
           <a:prstGeom prst="roundRect">
             <a:avLst>
-              <a:gd name="adj" fmla="val 7500"/>
+              <a:gd name="adj" fmla="val 5714"/>
             </a:avLst>
           </a:prstGeom>
           <a:solidFill>
-            <a:schemeClr val="bg1"/>
-          </a:solidFill>
-          <a:ln w="19050">
+            <a:srgbClr val="FFFFFF"/>
+          </a:solidFill>
+          <a:ln w="25400">
             <a:solidFill>
               <a:srgbClr val="1A1A1A"/>
             </a:solidFill>
             <a:prstDash val="solid"/>
           </a:ln>
           <a:effectLst>
-            <a:outerShdw sx="100000" sy="100000" kx="0" ky="0" algn="bl" rotWithShape="0" blurRad="101600" dist="38100" dir="2700000">
-              <a:srgbClr val="000000">
-                <a:alpha val="18000"/>
+            <a:outerShdw sx="100000" sy="100000" kx="0" ky="0" algn="bl" rotWithShape="0" blurRad="101600" dist="50800" dir="2700000">
+              <a:srgbClr val="1A1A1A">
+                <a:alpha val="100000"/>
               </a:srgbClr>
             </a:outerShdw>
           </a:effectLst>
@@ -4933,14 +4923,59 @@
       </p:sp>
       <p:sp>
         <p:nvSpPr>
-          <p:cNvPr id="10" name="Text 7"/>
+          <p:cNvPr id="9" name="Text 6"/>
           <p:cNvSpPr txBox="1"/>
           <p:nvPr/>
         </p:nvSpPr>
         <p:spPr>
-          <a:xfrm>
-            <a:off x="2656332" y="1993392"/>
-            <a:ext cx="1723644" cy="274320"/>
+          <a:xfrm rot="-180000">
+            <a:off x="3049524" y="1545336"/>
+            <a:ext cx="914400" cy="292608"/>
+          </a:xfrm>
+          <a:prstGeom prst="rect">
+            <a:avLst/>
+          </a:prstGeom>
+          <a:solidFill>
+            <a:srgbClr val="1A1A1A"/>
+          </a:solidFill>
+          <a:ln>
+            <a:solidFill>
+              <a:srgbClr val="1A1A1A"/>
+            </a:solidFill>
+          </a:ln>
+        </p:spPr>
+        <p:txBody>
+          <a:bodyPr wrap="square" lIns="0" tIns="0" rIns="0" bIns="0" rtlCol="0" anchor="ctr"/>
+          <a:lstStyle/>
+          <a:p>
+            <a:pPr algn="ctr" indent="0" marL="0">
+              <a:buNone/>
+            </a:pPr>
+            <a:r>
+              <a:rPr lang="ja-JP" altLang="en-US" sz="1000" dirty="0">
+                <a:solidFill>
+                  <a:srgbClr val="FFFFFF"/>
+                </a:solidFill>
+                <a:latin typeface="Dela Gothic One" pitchFamily="34" charset="0"/>
+                <a:ea typeface="けいふぉんと" pitchFamily="34" charset="-122"/>
+                <a:cs typeface="Dela Gothic One" pitchFamily="34" charset="-120"/>
+              </a:rPr>
+              <a:t>STEP 2</a:t>
+            </a:r>
+            <a:endParaRPr lang="ja-JP" sz="1000" dirty="0"/>
+          </a:p>
+        </p:txBody>
+      </p:sp>
+      <p:sp>
+        <p:nvSpPr>
+          <p:cNvPr id="10" name="flow-node"/>
+          <p:cNvSpPr txBox="1"/>
+          <p:nvPr/>
+        </p:nvSpPr>
+        <p:spPr>
+          <a:xfrm>
+            <a:off x="2743200" y="1965960"/>
+            <a:ext cx="1527048" cy="1234440"/>
           </a:xfrm>
           <a:prstGeom prst="rect">
             <a:avLst/>
@@ -4949,63 +4984,32 @@
           <a:ln/>
         </p:spPr>
         <p:txBody>
-          <a:bodyPr wrap="square" lIns="0" tIns="0" rIns="0" bIns="0" rtlCol="0" anchor="ctr"/>
+          <a:bodyPr wrap="square" lIns="0" tIns="0" rIns="0" bIns="0" rtlCol="0" anchor="ctr">
+            <a:normAutofit/>
+          </a:bodyPr>
           <a:lstStyle/>
           <a:p>
             <a:pPr algn="ctr" indent="0" marL="0">
               <a:buNone/>
             </a:pPr>
             <a:r>
-              <a:rPr lang="en-US" sz="1000" b="1" dirty="0">
-                <a:solidFill>
-                  <a:schemeClr val="accent2"/>
-                </a:solidFill>
-              </a:rPr>
-              <a:t>STEP 2</a:t>
-            </a:r>
-            <a:endParaRPr lang="en-US" sz="1000" dirty="0"/>
-          </a:p>
-        </p:txBody>
-      </p:sp>
-      <p:sp>
-        <p:nvSpPr>
-          <p:cNvPr id="11" name="flow-node"/>
-          <p:cNvSpPr txBox="1"/>
-          <p:nvPr/>
-        </p:nvSpPr>
-        <p:spPr>
-          <a:xfrm>
-            <a:off x="2747772" y="2286000"/>
-            <a:ext cx="1540764" cy="868680"/>
-          </a:xfrm>
-          <a:prstGeom prst="rect">
-            <a:avLst/>
-          </a:prstGeom>
-          <a:noFill/>
-          <a:ln/>
-        </p:spPr>
-        <p:txBody>
-          <a:bodyPr wrap="square" lIns="0" tIns="0" rIns="0" bIns="0" rtlCol="0" anchor="ctr"/>
-          <a:lstStyle/>
-          <a:p>
-            <a:pPr algn="ctr" indent="0" marL="0">
-              <a:buNone/>
-            </a:pPr>
-            <a:r>
-              <a:rPr lang="en-US" sz="1400" b="1" dirty="0">
-                <a:solidFill>
-                  <a:schemeClr val="tx1"/>
-                </a:solidFill>
+              <a:rPr lang="ja-JP" altLang="en-US" sz="1400" b="1" dirty="0">
+                <a:solidFill>
+                  <a:srgbClr val="1A1A1A"/>
+                </a:solidFill>
+                <a:latin typeface="Noto Sans JP" pitchFamily="34" charset="0"/>
+                <a:ea typeface="Noto Sans JP" pitchFamily="34" charset="-122"/>
+                <a:cs typeface="Noto Sans JP" pitchFamily="34" charset="-120"/>
               </a:rPr>
               <a:t>月1回選ぶ</a:t>
             </a:r>
-            <a:endParaRPr lang="en-US" sz="1400" dirty="0"/>
+            <a:endParaRPr lang="ja-JP" sz="1400" dirty="0"/>
           </a:p>
         </p:txBody>
       </p:sp>
       <p:pic>
         <p:nvPicPr>
-          <p:cNvPr id="12" name="flow-arrow" descr="preencoded.png">    </p:cNvPr>
+          <p:cNvPr id="11" name="flow-arrow" descr="preencoded.png">    </p:cNvPr>
           <p:cNvPicPr>
             <a:picLocks noChangeAspect="1"/>
           </p:cNvPicPr>
@@ -5019,8 +5023,8 @@
         </p:blipFill>
         <p:spPr>
           <a:xfrm>
-            <a:off x="4453128" y="2441448"/>
-            <a:ext cx="237744" cy="237744"/>
+            <a:off x="4443984" y="2363724"/>
+            <a:ext cx="256032" cy="256032"/>
           </a:xfrm>
           <a:prstGeom prst="rect">
             <a:avLst/>
@@ -5029,33 +5033,33 @@
       </p:pic>
       <p:sp>
         <p:nvSpPr>
-          <p:cNvPr id="13" name="card"/>
+          <p:cNvPr id="12" name="card"/>
           <p:cNvSpPr/>
           <p:nvPr/>
         </p:nvSpPr>
         <p:spPr>
           <a:xfrm>
-            <a:off x="4764024" y="1828800"/>
-            <a:ext cx="1723644" cy="1463040"/>
+            <a:off x="4764024" y="1691640"/>
+            <a:ext cx="1746504" cy="1600200"/>
           </a:xfrm>
           <a:prstGeom prst="roundRect">
             <a:avLst>
-              <a:gd name="adj" fmla="val 7500"/>
+              <a:gd name="adj" fmla="val 5714"/>
             </a:avLst>
           </a:prstGeom>
           <a:solidFill>
-            <a:schemeClr val="bg1"/>
-          </a:solidFill>
-          <a:ln w="19050">
+            <a:srgbClr val="FFFFFF"/>
+          </a:solidFill>
+          <a:ln w="25400">
             <a:solidFill>
               <a:srgbClr val="1A1A1A"/>
             </a:solidFill>
             <a:prstDash val="solid"/>
           </a:ln>
           <a:effectLst>
-            <a:outerShdw sx="100000" sy="100000" kx="0" ky="0" algn="bl" rotWithShape="0" blurRad="101600" dist="38100" dir="2700000">
-              <a:srgbClr val="000000">
-                <a:alpha val="18000"/>
+            <a:outerShdw sx="100000" sy="100000" kx="0" ky="0" algn="bl" rotWithShape="0" blurRad="101600" dist="50800" dir="2700000">
+              <a:srgbClr val="1A1A1A">
+                <a:alpha val="100000"/>
               </a:srgbClr>
             </a:outerShdw>
           </a:effectLst>
@@ -5063,14 +5067,59 @@
       </p:sp>
       <p:sp>
         <p:nvSpPr>
-          <p:cNvPr id="14" name="Text 10"/>
+          <p:cNvPr id="13" name="Text 9"/>
           <p:cNvSpPr txBox="1"/>
           <p:nvPr/>
         </p:nvSpPr>
         <p:spPr>
-          <a:xfrm>
-            <a:off x="4764024" y="1993392"/>
-            <a:ext cx="1723644" cy="274320"/>
+          <a:xfrm rot="-180000">
+            <a:off x="5180076" y="1545336"/>
+            <a:ext cx="914400" cy="292608"/>
+          </a:xfrm>
+          <a:prstGeom prst="rect">
+            <a:avLst/>
+          </a:prstGeom>
+          <a:solidFill>
+            <a:srgbClr val="1A1A1A"/>
+          </a:solidFill>
+          <a:ln>
+            <a:solidFill>
+              <a:srgbClr val="1A1A1A"/>
+            </a:solidFill>
+          </a:ln>
+        </p:spPr>
+        <p:txBody>
+          <a:bodyPr wrap="square" lIns="0" tIns="0" rIns="0" bIns="0" rtlCol="0" anchor="ctr"/>
+          <a:lstStyle/>
+          <a:p>
+            <a:pPr algn="ctr" indent="0" marL="0">
+              <a:buNone/>
+            </a:pPr>
+            <a:r>
+              <a:rPr lang="ja-JP" altLang="en-US" sz="1000" dirty="0">
+                <a:solidFill>
+                  <a:srgbClr val="FFFFFF"/>
+                </a:solidFill>
+                <a:latin typeface="Dela Gothic One" pitchFamily="34" charset="0"/>
+                <a:ea typeface="けいふぉんと" pitchFamily="34" charset="-122"/>
+                <a:cs typeface="Dela Gothic One" pitchFamily="34" charset="-120"/>
+              </a:rPr>
+              <a:t>STEP 3</a:t>
+            </a:r>
+            <a:endParaRPr lang="ja-JP" sz="1000" dirty="0"/>
+          </a:p>
+        </p:txBody>
+      </p:sp>
+      <p:sp>
+        <p:nvSpPr>
+          <p:cNvPr id="14" name="flow-node"/>
+          <p:cNvSpPr txBox="1"/>
+          <p:nvPr/>
+        </p:nvSpPr>
+        <p:spPr>
+          <a:xfrm>
+            <a:off x="4873752" y="1965960"/>
+            <a:ext cx="1527048" cy="1234440"/>
           </a:xfrm>
           <a:prstGeom prst="rect">
             <a:avLst/>
@@ -5079,63 +5128,32 @@
           <a:ln/>
         </p:spPr>
         <p:txBody>
-          <a:bodyPr wrap="square" lIns="0" tIns="0" rIns="0" bIns="0" rtlCol="0" anchor="ctr"/>
+          <a:bodyPr wrap="square" lIns="0" tIns="0" rIns="0" bIns="0" rtlCol="0" anchor="ctr">
+            <a:normAutofit/>
+          </a:bodyPr>
           <a:lstStyle/>
           <a:p>
             <a:pPr algn="ctr" indent="0" marL="0">
               <a:buNone/>
             </a:pPr>
             <a:r>
-              <a:rPr lang="en-US" sz="1000" b="1" dirty="0">
-                <a:solidFill>
-                  <a:schemeClr val="accent2"/>
-                </a:solidFill>
-              </a:rPr>
-              <a:t>STEP 3</a:t>
-            </a:r>
-            <a:endParaRPr lang="en-US" sz="1000" dirty="0"/>
-          </a:p>
-        </p:txBody>
-      </p:sp>
-      <p:sp>
-        <p:nvSpPr>
-          <p:cNvPr id="15" name="flow-node"/>
-          <p:cNvSpPr txBox="1"/>
-          <p:nvPr/>
-        </p:nvSpPr>
-        <p:spPr>
-          <a:xfrm>
-            <a:off x="4855464" y="2286000"/>
-            <a:ext cx="1540764" cy="868680"/>
-          </a:xfrm>
-          <a:prstGeom prst="rect">
-            <a:avLst/>
-          </a:prstGeom>
-          <a:noFill/>
-          <a:ln/>
-        </p:spPr>
-        <p:txBody>
-          <a:bodyPr wrap="square" lIns="0" tIns="0" rIns="0" bIns="0" rtlCol="0" anchor="ctr"/>
-          <a:lstStyle/>
-          <a:p>
-            <a:pPr algn="ctr" indent="0" marL="0">
-              <a:buNone/>
-            </a:pPr>
-            <a:r>
-              <a:rPr lang="en-US" sz="1400" b="1" dirty="0">
-                <a:solidFill>
-                  <a:schemeClr val="tx1"/>
-                </a:solidFill>
+              <a:rPr lang="ja-JP" altLang="en-US" sz="1400" b="1" dirty="0">
+                <a:solidFill>
+                  <a:srgbClr val="1A1A1A"/>
+                </a:solidFill>
+                <a:latin typeface="Noto Sans JP" pitchFamily="34" charset="0"/>
+                <a:ea typeface="Noto Sans JP" pitchFamily="34" charset="-122"/>
+                <a:cs typeface="Noto Sans JP" pitchFamily="34" charset="-120"/>
               </a:rPr>
               <a:t>記録→直す→確認</a:t>
             </a:r>
-            <a:endParaRPr lang="en-US" sz="1400" dirty="0"/>
+            <a:endParaRPr lang="ja-JP" sz="1400" dirty="0"/>
           </a:p>
         </p:txBody>
       </p:sp>
       <p:pic>
         <p:nvPicPr>
-          <p:cNvPr id="16" name="flow-arrow" descr="preencoded.png">    </p:cNvPr>
+          <p:cNvPr id="15" name="flow-arrow" descr="preencoded.png">    </p:cNvPr>
           <p:cNvPicPr>
             <a:picLocks noChangeAspect="1"/>
           </p:cNvPicPr>
@@ -5149,8 +5167,8 @@
         </p:blipFill>
         <p:spPr>
           <a:xfrm>
-            <a:off x="6560820" y="2441448"/>
-            <a:ext cx="237744" cy="237744"/>
+            <a:off x="6574536" y="2363724"/>
+            <a:ext cx="256032" cy="256032"/>
           </a:xfrm>
           <a:prstGeom prst="rect">
             <a:avLst/>
@@ -5159,33 +5177,33 @@
       </p:pic>
       <p:sp>
         <p:nvSpPr>
-          <p:cNvPr id="17" name="card"/>
+          <p:cNvPr id="16" name="card"/>
           <p:cNvSpPr/>
           <p:nvPr/>
         </p:nvSpPr>
         <p:spPr>
           <a:xfrm>
-            <a:off x="6871716" y="1828800"/>
-            <a:ext cx="1723644" cy="1463040"/>
+            <a:off x="6894576" y="1691640"/>
+            <a:ext cx="1746504" cy="1600200"/>
           </a:xfrm>
           <a:prstGeom prst="roundRect">
             <a:avLst>
-              <a:gd name="adj" fmla="val 7500"/>
+              <a:gd name="adj" fmla="val 5714"/>
             </a:avLst>
           </a:prstGeom>
           <a:solidFill>
-            <a:schemeClr val="accent1"/>
-          </a:solidFill>
-          <a:ln w="19050">
+            <a:srgbClr val="F5A623"/>
+          </a:solidFill>
+          <a:ln w="25400">
             <a:solidFill>
               <a:srgbClr val="1A1A1A"/>
             </a:solidFill>
             <a:prstDash val="solid"/>
           </a:ln>
           <a:effectLst>
-            <a:outerShdw sx="100000" sy="100000" kx="0" ky="0" algn="bl" rotWithShape="0" blurRad="101600" dist="38100" dir="2700000">
-              <a:srgbClr val="000000">
-                <a:alpha val="18000"/>
+            <a:outerShdw sx="100000" sy="100000" kx="0" ky="0" algn="bl" rotWithShape="0" blurRad="101600" dist="50800" dir="2700000">
+              <a:srgbClr val="1A1A1A">
+                <a:alpha val="100000"/>
               </a:srgbClr>
             </a:outerShdw>
           </a:effectLst>
@@ -5193,14 +5211,59 @@
       </p:sp>
       <p:sp>
         <p:nvSpPr>
-          <p:cNvPr id="18" name="Text 13"/>
+          <p:cNvPr id="17" name="Text 12"/>
           <p:cNvSpPr txBox="1"/>
           <p:nvPr/>
         </p:nvSpPr>
         <p:spPr>
-          <a:xfrm>
-            <a:off x="6871716" y="1993392"/>
-            <a:ext cx="1723644" cy="274320"/>
+          <a:xfrm rot="-180000">
+            <a:off x="7310628" y="1545336"/>
+            <a:ext cx="914400" cy="292608"/>
+          </a:xfrm>
+          <a:prstGeom prst="rect">
+            <a:avLst/>
+          </a:prstGeom>
+          <a:solidFill>
+            <a:srgbClr val="1A1A1A"/>
+          </a:solidFill>
+          <a:ln>
+            <a:solidFill>
+              <a:srgbClr val="1A1A1A"/>
+            </a:solidFill>
+          </a:ln>
+        </p:spPr>
+        <p:txBody>
+          <a:bodyPr wrap="square" lIns="0" tIns="0" rIns="0" bIns="0" rtlCol="0" anchor="ctr"/>
+          <a:lstStyle/>
+          <a:p>
+            <a:pPr algn="ctr" indent="0" marL="0">
+              <a:buNone/>
+            </a:pPr>
+            <a:r>
+              <a:rPr lang="ja-JP" altLang="en-US" sz="1000" dirty="0">
+                <a:solidFill>
+                  <a:srgbClr val="FFFFFF"/>
+                </a:solidFill>
+                <a:latin typeface="Dela Gothic One" pitchFamily="34" charset="0"/>
+                <a:ea typeface="けいふぉんと" pitchFamily="34" charset="-122"/>
+                <a:cs typeface="Dela Gothic One" pitchFamily="34" charset="-120"/>
+              </a:rPr>
+              <a:t>STEP 4</a:t>
+            </a:r>
+            <a:endParaRPr lang="ja-JP" sz="1000" dirty="0"/>
+          </a:p>
+        </p:txBody>
+      </p:sp>
+      <p:sp>
+        <p:nvSpPr>
+          <p:cNvPr id="18" name="flow-node"/>
+          <p:cNvSpPr txBox="1"/>
+          <p:nvPr/>
+        </p:nvSpPr>
+        <p:spPr>
+          <a:xfrm>
+            <a:off x="7004304" y="1965960"/>
+            <a:ext cx="1527048" cy="1234440"/>
           </a:xfrm>
           <a:prstGeom prst="rect">
             <a:avLst/>
@@ -5209,144 +5272,136 @@
           <a:ln/>
         </p:spPr>
         <p:txBody>
-          <a:bodyPr wrap="square" lIns="0" tIns="0" rIns="0" bIns="0" rtlCol="0" anchor="ctr"/>
+          <a:bodyPr wrap="square" lIns="0" tIns="0" rIns="0" bIns="0" rtlCol="0" anchor="ctr">
+            <a:normAutofit/>
+          </a:bodyPr>
           <a:lstStyle/>
           <a:p>
             <a:pPr algn="ctr" indent="0" marL="0">
               <a:buNone/>
             </a:pPr>
             <a:r>
-              <a:rPr lang="en-US" sz="1000" b="1" dirty="0">
-                <a:solidFill>
-                  <a:schemeClr val="accent2"/>
-                </a:solidFill>
-              </a:rPr>
-              <a:t>STEP 4</a:t>
-            </a:r>
-            <a:endParaRPr lang="en-US" sz="1000" dirty="0"/>
-          </a:p>
-        </p:txBody>
-      </p:sp>
-      <p:sp>
-        <p:nvSpPr>
-          <p:cNvPr id="19" name="flow-node"/>
+              <a:rPr lang="ja-JP" altLang="en-US" sz="1400" b="1" dirty="0">
+                <a:solidFill>
+                  <a:srgbClr val="1A1A1A"/>
+                </a:solidFill>
+                <a:latin typeface="Noto Sans JP" pitchFamily="34" charset="0"/>
+                <a:ea typeface="Noto Sans JP" pitchFamily="34" charset="-122"/>
+                <a:cs typeface="Noto Sans JP" pitchFamily="34" charset="-120"/>
+              </a:rPr>
+              <a:t>公開・記録</a:t>
+            </a:r>
+            <a:endParaRPr lang="ja-JP" sz="1400" dirty="0"/>
+          </a:p>
+        </p:txBody>
+      </p:sp>
+      <p:sp>
+        <p:nvSpPr>
+          <p:cNvPr id="19" name="Text 14"/>
           <p:cNvSpPr txBox="1"/>
           <p:nvPr/>
         </p:nvSpPr>
         <p:spPr>
-          <a:xfrm>
-            <a:off x="6963156" y="2286000"/>
-            <a:ext cx="1540764" cy="868680"/>
-          </a:xfrm>
-          <a:prstGeom prst="rect">
-            <a:avLst/>
-          </a:prstGeom>
-          <a:noFill/>
-          <a:ln/>
-        </p:spPr>
-        <p:txBody>
-          <a:bodyPr wrap="square" lIns="0" tIns="0" rIns="0" bIns="0" rtlCol="0" anchor="ctr"/>
+          <a:xfrm rot="-60000">
+            <a:off x="502920" y="3794760"/>
+            <a:ext cx="8138160" cy="502920"/>
+          </a:xfrm>
+          <a:prstGeom prst="rect">
+            <a:avLst/>
+          </a:prstGeom>
+          <a:solidFill>
+            <a:srgbClr val="DD6420"/>
+          </a:solidFill>
+          <a:ln w="19050">
+            <a:solidFill>
+              <a:srgbClr val="1A1A1A"/>
+            </a:solidFill>
+          </a:ln>
+          <a:effectLst>
+            <a:outerShdw sx="100000" sy="100000" kx="0" ky="0" algn="bl" rotWithShape="0" blurRad="101600" dist="38100" dir="2700000">
+              <a:srgbClr val="1A1A1A">
+                <a:alpha val="100000"/>
+              </a:srgbClr>
+            </a:outerShdw>
+          </a:effectLst>
+        </p:spPr>
+        <p:txBody>
+          <a:bodyPr wrap="square" lIns="0" tIns="1905" rIns="1905" bIns="0" rtlCol="0" anchor="ctr">
+            <a:normAutofit/>
+          </a:bodyPr>
           <a:lstStyle/>
           <a:p>
             <a:pPr algn="ctr" indent="0" marL="0">
               <a:buNone/>
             </a:pPr>
             <a:r>
-              <a:rPr lang="en-US" sz="1400" b="1" dirty="0">
-                <a:solidFill>
-                  <a:schemeClr val="tx1"/>
-                </a:solidFill>
-              </a:rPr>
-              <a:t>公開・記録</a:t>
-            </a:r>
-            <a:endParaRPr lang="en-US" sz="1400" dirty="0"/>
-          </a:p>
-        </p:txBody>
-      </p:sp>
-      <p:sp>
-        <p:nvSpPr>
-          <p:cNvPr id="20" name="foot-box"/>
-          <p:cNvSpPr/>
-          <p:nvPr/>
-        </p:nvSpPr>
-        <p:spPr>
-          <a:xfrm>
-            <a:off x="548640" y="3794760"/>
-            <a:ext cx="8046720" cy="502920"/>
-          </a:xfrm>
-          <a:prstGeom prst="roundRect">
-            <a:avLst>
-              <a:gd name="adj" fmla="val 18182"/>
-            </a:avLst>
-          </a:prstGeom>
-          <a:solidFill>
-            <a:schemeClr val="bg2"/>
-          </a:solidFill>
-          <a:ln w="12700">
-            <a:solidFill>
-              <a:schemeClr val="bg2"/>
-            </a:solidFill>
-            <a:prstDash val="solid"/>
-          </a:ln>
-        </p:spPr>
-      </p:sp>
-      <p:pic>
-        <p:nvPicPr>
-          <p:cNvPr id="21" name="foot-icon" descr="preencoded.png">    </p:cNvPr>
-          <p:cNvPicPr>
-            <a:picLocks noChangeAspect="1"/>
-          </p:cNvPicPr>
-          <p:nvPr/>
-        </p:nvPicPr>
-        <p:blipFill>
-          <a:blip r:embed="rId4"/>
-          <a:stretch>
-            <a:fillRect/>
-          </a:stretch>
-        </p:blipFill>
-        <p:spPr>
-          <a:xfrm>
-            <a:off x="685800" y="3922776"/>
-            <a:ext cx="246888" cy="246888"/>
-          </a:xfrm>
-          <a:prstGeom prst="rect">
-            <a:avLst/>
-          </a:prstGeom>
-        </p:spPr>
-      </p:pic>
-      <p:sp>
-        <p:nvSpPr>
-          <p:cNvPr id="22" name="foot-text"/>
-          <p:cNvSpPr txBox="1"/>
-          <p:nvPr/>
-        </p:nvSpPr>
-        <p:spPr>
-          <a:xfrm>
-            <a:off x="1051560" y="3794760"/>
-            <a:ext cx="7406640" cy="502920"/>
-          </a:xfrm>
-          <a:prstGeom prst="rect">
-            <a:avLst/>
-          </a:prstGeom>
-          <a:noFill/>
-          <a:ln/>
-        </p:spPr>
-        <p:txBody>
-          <a:bodyPr wrap="square" lIns="0" tIns="0" rIns="0" bIns="0" rtlCol="0" anchor="ctr"/>
-          <a:lstStyle/>
-          <a:p>
-            <a:pPr indent="0" marL="0">
-              <a:buNone/>
-            </a:pPr>
-            <a:r>
-              <a:rPr lang="en-US" sz="1150" dirty="0">
-                <a:solidFill>
-                  <a:schemeClr val="tx1"/>
-                </a:solidFill>
-              </a:rPr>
-              <a:t>AIに直させるときは「どこを・どう変えたいか・変えてはいけないところ」を伝え、直したあとに「何を変えたか説明して」と頼む</a:t>
-            </a:r>
-            <a:endParaRPr lang="en-US" sz="1150" dirty="0"/>
+              <a:rPr lang="ja-JP" altLang="en-US" sz="1300" b="1" dirty="0">
+                <a:solidFill>
+                  <a:srgbClr val="FFFFFF"/>
+                </a:solidFill>
+                <a:latin typeface="Noto Sans JP" pitchFamily="34" charset="0"/>
+                <a:ea typeface="Noto Sans JP" pitchFamily="34" charset="-122"/>
+                <a:cs typeface="Noto Sans JP" pitchFamily="34" charset="-120"/>
+              </a:rPr>
+              <a:t>AIに直させるときは</a:t>
+            </a:r>
+            <a:pPr algn="ctr" indent="0" marL="0">
+              <a:buNone/>
+            </a:pPr>
+            <a:r>
+              <a:rPr lang="ja-JP" altLang="en-US" sz="1300" b="1" dirty="0">
+                <a:solidFill>
+                  <a:srgbClr val="FFD600"/>
+                </a:solidFill>
+                <a:latin typeface="Noto Sans JP" pitchFamily="34" charset="0"/>
+                <a:ea typeface="Noto Sans JP" pitchFamily="34" charset="-122"/>
+                <a:cs typeface="Noto Sans JP" pitchFamily="34" charset="-120"/>
+              </a:rPr>
+              <a:t>「どこを・どう変えたいか・変えてはいけないところ」</a:t>
+            </a:r>
+            <a:pPr algn="ctr" indent="0" marL="0">
+              <a:buNone/>
+            </a:pPr>
+            <a:r>
+              <a:rPr lang="ja-JP" altLang="en-US" sz="1300" b="1" dirty="0">
+                <a:solidFill>
+                  <a:srgbClr val="FFFFFF"/>
+                </a:solidFill>
+                <a:latin typeface="Noto Sans JP" pitchFamily="34" charset="0"/>
+                <a:ea typeface="Noto Sans JP" pitchFamily="34" charset="-122"/>
+                <a:cs typeface="Noto Sans JP" pitchFamily="34" charset="-120"/>
+              </a:rPr>
+              <a:t>を伝え、直したあとに</a:t>
+            </a:r>
+            <a:pPr algn="ctr" indent="0" marL="0">
+              <a:buNone/>
+            </a:pPr>
+            <a:r>
+              <a:rPr lang="ja-JP" altLang="en-US" sz="1300" b="1" dirty="0">
+                <a:solidFill>
+                  <a:srgbClr val="FFD600"/>
+                </a:solidFill>
+                <a:latin typeface="Noto Sans JP" pitchFamily="34" charset="0"/>
+                <a:ea typeface="Noto Sans JP" pitchFamily="34" charset="-122"/>
+                <a:cs typeface="Noto Sans JP" pitchFamily="34" charset="-120"/>
+              </a:rPr>
+              <a:t>「何を変えたか説明して」</a:t>
+            </a:r>
+            <a:pPr algn="ctr" indent="0" marL="0">
+              <a:buNone/>
+            </a:pPr>
+            <a:r>
+              <a:rPr lang="ja-JP" altLang="en-US" sz="1300" b="1" dirty="0">
+                <a:solidFill>
+                  <a:srgbClr val="FFFFFF"/>
+                </a:solidFill>
+                <a:latin typeface="Noto Sans JP" pitchFamily="34" charset="0"/>
+                <a:ea typeface="Noto Sans JP" pitchFamily="34" charset="-122"/>
+                <a:cs typeface="Noto Sans JP" pitchFamily="34" charset="-120"/>
+              </a:rPr>
+              <a:t>と頼む</a:t>
+            </a:r>
+            <a:endParaRPr lang="ja-JP" sz="1300" dirty="0"/>
           </a:p>
         </p:txBody>
       </p:sp>
@@ -5362,8 +5417,8 @@
         </p:nvSpPr>
         <p:spPr>
           <a:xfrm>
-            <a:off x="8229600" y="4773168"/>
-            <a:ext cx="365760" cy="228600"/>
+            <a:off x="8366760" y="4754880"/>
+            <a:ext cx="365760" cy="274320"/>
           </a:xfrm>
           <a:prstGeom prst="rect">
             <a:avLst/>
@@ -5375,20 +5430,23 @@
           </a:extLst>
         </p:spPr>
         <p:txBody>
-          <a:bodyPr/>
+          <a:bodyPr anchor="ctr"/>
           <a:lstStyle>
             <a:lvl1pPr>
-              <a:defRPr sz="900">
-                <a:solidFill>
-                  <a:srgbClr val="5A6872"/>
-                </a:solidFill>
+              <a:defRPr sz="850">
+                <a:solidFill>
+                  <a:srgbClr val="FFFFFF"/>
+                </a:solidFill>
+                <a:latin typeface="Noto Sans JP"/>
+                <a:ea typeface="Noto Sans JP"/>
+                <a:cs typeface="Noto Sans JP"/>
               </a:defRPr>
             </a:lvl1pPr>
           </a:lstStyle>
           <a:p>
             <a:pPr algn="r"/>
             <a:fld id="{F7021451-1387-4CA6-816F-3879F97B5CBC}" type="slidenum">
-              <a:rPr b="0" lang="en-US"/>
+              <a:rPr b="1" lang="en-US"/>
               <a:t>5</a:t>
             </a:fld>
             <a:endParaRPr lang="en-US"/>
@@ -5423,15 +5481,58 @@
       <p:sp>
         <p:nvSpPr>
           <p:cNvPr id="2" name="Text 0"/>
-          <p:cNvSpPr/>
-          <p:nvPr>
-            <p:ph idx="100" type="title" hasCustomPrompt="1"/>
-          </p:nvPr>
-        </p:nvSpPr>
-        <p:spPr>
-          <a:xfrm>
-            <a:off x="548640" y="658368"/>
-            <a:ext cx="8046720" cy="566928"/>
+          <p:cNvSpPr txBox="1"/>
+          <p:nvPr/>
+        </p:nvSpPr>
+        <p:spPr>
+          <a:xfrm rot="-180000">
+            <a:off x="411480" y="201168"/>
+            <a:ext cx="1915668" cy="352044"/>
+          </a:xfrm>
+          <a:prstGeom prst="rect">
+            <a:avLst/>
+          </a:prstGeom>
+          <a:solidFill>
+            <a:srgbClr val="DD6420"/>
+          </a:solidFill>
+          <a:ln>
+            <a:solidFill>
+              <a:srgbClr val="DD6420"/>
+            </a:solidFill>
+          </a:ln>
+        </p:spPr>
+        <p:txBody>
+          <a:bodyPr wrap="square" lIns="0" tIns="0" rIns="0" bIns="0" rtlCol="0" anchor="ctr"/>
+          <a:lstStyle/>
+          <a:p>
+            <a:pPr algn="ctr" indent="0" marL="0">
+              <a:buNone/>
+            </a:pPr>
+            <a:r>
+              <a:rPr lang="ja-JP" altLang="en-US" sz="1100" dirty="0">
+                <a:solidFill>
+                  <a:srgbClr val="FFFFFF"/>
+                </a:solidFill>
+                <a:latin typeface="Dela Gothic One" pitchFamily="34" charset="0"/>
+                <a:ea typeface="けいふぉんと" pitchFamily="34" charset="-122"/>
+                <a:cs typeface="Dela Gothic One" pitchFamily="34" charset="-120"/>
+              </a:rPr>
+              <a:t>ハンズオン② 20分</a:t>
+            </a:r>
+            <a:endParaRPr lang="ja-JP" sz="1100" dirty="0"/>
+          </a:p>
+        </p:txBody>
+      </p:sp>
+      <p:sp>
+        <p:nvSpPr>
+          <p:cNvPr id="3" name="Text 1"/>
+          <p:cNvSpPr txBox="1"/>
+          <p:nvPr/>
+        </p:nvSpPr>
+        <p:spPr>
+          <a:xfrm>
+            <a:off x="411480" y="502920"/>
+            <a:ext cx="8321040" cy="685800"/>
           </a:xfrm>
           <a:prstGeom prst="rect">
             <a:avLst/>
@@ -5440,122 +5541,118 @@
           <a:ln/>
         </p:spPr>
         <p:txBody>
-          <a:bodyPr wrap="square" lIns="0" tIns="0" rIns="0" bIns="0" rtlCol="0" anchor="ctr"/>
-          <a:lstStyle/>
-          <a:p>
-            <a:pPr algn="l" indent="0" marL="0">
-              <a:buNone/>
-            </a:pPr>
-            <a:r>
-              <a:rPr lang="en-US" sz="2400" b="1" dirty="0">
-                <a:solidFill>
-                  <a:schemeClr val="tx1"/>
-                </a:solidFill>
+          <a:bodyPr wrap="square" lIns="0" tIns="0" rIns="0" bIns="0" rtlCol="0" anchor="ctr">
+            <a:normAutofit/>
+          </a:bodyPr>
+          <a:lstStyle/>
+          <a:p>
+            <a:pPr indent="0" marL="0">
+              <a:buNone/>
+            </a:pPr>
+            <a:r>
+              <a:rPr lang="ja-JP" altLang="en-US" sz="2600" dirty="0">
+                <a:solidFill>
+                  <a:srgbClr val="1A1A1A"/>
+                </a:solidFill>
+                <a:latin typeface="Dela Gothic One" pitchFamily="34" charset="0"/>
+                <a:ea typeface="けいふぉんと" pitchFamily="34" charset="-122"/>
+                <a:cs typeface="Dela Gothic One" pitchFamily="34" charset="-120"/>
               </a:rPr>
               <a:t>1つ直す</a:t>
             </a:r>
-            <a:endParaRPr lang="en-US" sz="2400" dirty="0"/>
-          </a:p>
-        </p:txBody>
-      </p:sp>
-      <p:sp>
-        <p:nvSpPr>
-          <p:cNvPr id="3" name="chip"/>
+            <a:endParaRPr lang="ja-JP" sz="2600" dirty="0"/>
+          </a:p>
+        </p:txBody>
+      </p:sp>
+      <p:sp>
+        <p:nvSpPr>
+          <p:cNvPr id="4" name="card"/>
           <p:cNvSpPr/>
           <p:nvPr/>
         </p:nvSpPr>
         <p:spPr>
           <a:xfrm>
-            <a:off x="548640" y="292608"/>
-            <a:ext cx="1755648" cy="292608"/>
+            <a:off x="502920" y="1417320"/>
+            <a:ext cx="8138160" cy="509778"/>
           </a:xfrm>
           <a:prstGeom prst="roundRect">
             <a:avLst>
-              <a:gd name="adj" fmla="val 50000"/>
+              <a:gd name="adj" fmla="val 17937"/>
             </a:avLst>
           </a:prstGeom>
           <a:solidFill>
-            <a:schemeClr val="accent2"/>
-          </a:solidFill>
-          <a:ln w="12700">
-            <a:solidFill>
-              <a:schemeClr val="accent2"/>
-            </a:solidFill>
-            <a:prstDash val="solid"/>
-          </a:ln>
-        </p:spPr>
-      </p:sp>
-      <p:sp>
-        <p:nvSpPr>
-          <p:cNvPr id="4" name="chip-text"/>
-          <p:cNvSpPr txBox="1"/>
-          <p:nvPr/>
-        </p:nvSpPr>
-        <p:spPr>
-          <a:xfrm>
-            <a:off x="548640" y="292608"/>
-            <a:ext cx="1755648" cy="292608"/>
-          </a:xfrm>
-          <a:prstGeom prst="rect">
-            <a:avLst/>
-          </a:prstGeom>
-          <a:noFill/>
-          <a:ln/>
-        </p:spPr>
-        <p:txBody>
-          <a:bodyPr wrap="square" lIns="0" tIns="0" rIns="0" bIns="0" rtlCol="0" anchor="ctr"/>
-          <a:lstStyle/>
-          <a:p>
-            <a:pPr algn="ctr" indent="0" marL="0">
-              <a:buNone/>
-            </a:pPr>
-            <a:r>
-              <a:rPr lang="en-US" sz="1100" b="1" dirty="0">
-                <a:solidFill>
-                  <a:schemeClr val="bg1"/>
-                </a:solidFill>
-              </a:rPr>
-              <a:t>ハンズオン② 20分</a:t>
-            </a:r>
-            <a:endParaRPr lang="en-US" sz="1100" dirty="0"/>
-          </a:p>
-        </p:txBody>
-      </p:sp>
-      <p:sp>
-        <p:nvSpPr>
-          <p:cNvPr id="5" name="step-num"/>
-          <p:cNvSpPr/>
-          <p:nvPr/>
-        </p:nvSpPr>
-        <p:spPr>
-          <a:xfrm>
-            <a:off x="548640" y="1572768"/>
-            <a:ext cx="384048" cy="384048"/>
-          </a:xfrm>
-          <a:prstGeom prst="ellipse">
-            <a:avLst/>
-          </a:prstGeom>
-          <a:solidFill>
-            <a:schemeClr val="accent1"/>
-          </a:solidFill>
-          <a:ln w="15875">
+            <a:srgbClr val="FFFFFF"/>
+          </a:solidFill>
+          <a:ln w="25400">
             <a:solidFill>
               <a:srgbClr val="1A1A1A"/>
             </a:solidFill>
             <a:prstDash val="solid"/>
           </a:ln>
-        </p:spPr>
-      </p:sp>
-      <p:sp>
-        <p:nvSpPr>
-          <p:cNvPr id="6" name="step-num-text"/>
+          <a:effectLst>
+            <a:outerShdw sx="100000" sy="100000" kx="0" ky="0" algn="bl" rotWithShape="0" blurRad="101600" dist="38100" dir="2700000">
+              <a:srgbClr val="1A1A1A">
+                <a:alpha val="100000"/>
+              </a:srgbClr>
+            </a:outerShdw>
+          </a:effectLst>
+        </p:spPr>
+      </p:sp>
+      <p:sp>
+        <p:nvSpPr>
+          <p:cNvPr id="5" name="Text 3"/>
           <p:cNvSpPr txBox="1"/>
           <p:nvPr/>
         </p:nvSpPr>
         <p:spPr>
           <a:xfrm>
-            <a:off x="548640" y="1572768"/>
-            <a:ext cx="384048" cy="384048"/>
+            <a:off x="640080" y="1472184"/>
+            <a:ext cx="400050" cy="400050"/>
+          </a:xfrm>
+          <a:prstGeom prst="ellipse">
+            <a:avLst/>
+          </a:prstGeom>
+          <a:solidFill>
+            <a:srgbClr val="DD6420"/>
+          </a:solidFill>
+          <a:ln w="19050">
+            <a:solidFill>
+              <a:srgbClr val="1A1A1A"/>
+            </a:solidFill>
+          </a:ln>
+        </p:spPr>
+        <p:txBody>
+          <a:bodyPr wrap="square" lIns="0" tIns="0" rIns="0" bIns="0" rtlCol="0" anchor="ctr"/>
+          <a:lstStyle/>
+          <a:p>
+            <a:pPr algn="ctr" indent="0" marL="0">
+              <a:buNone/>
+            </a:pPr>
+            <a:r>
+              <a:rPr lang="ja-JP" altLang="en-US" sz="1500" dirty="0">
+                <a:solidFill>
+                  <a:srgbClr val="FFFFFF"/>
+                </a:solidFill>
+                <a:latin typeface="Dela Gothic One" pitchFamily="34" charset="0"/>
+                <a:ea typeface="けいふぉんと" pitchFamily="34" charset="-122"/>
+                <a:cs typeface="Dela Gothic One" pitchFamily="34" charset="-120"/>
+              </a:rPr>
+              <a:t>1</a:t>
+            </a:r>
+            <a:endParaRPr lang="ja-JP" sz="1500" dirty="0"/>
+          </a:p>
+        </p:txBody>
+      </p:sp>
+      <p:sp>
+        <p:nvSpPr>
+          <p:cNvPr id="6" name="step-text"/>
+          <p:cNvSpPr txBox="1"/>
+          <p:nvPr/>
+        </p:nvSpPr>
+        <p:spPr>
+          <a:xfrm>
+            <a:off x="1234440" y="1417320"/>
+            <a:ext cx="7269480" cy="509778"/>
           </a:xfrm>
           <a:prstGeom prst="rect">
             <a:avLst/>
@@ -5564,95 +5661,118 @@
           <a:ln/>
         </p:spPr>
         <p:txBody>
-          <a:bodyPr wrap="square" lIns="0" tIns="0" rIns="0" bIns="0" rtlCol="0" anchor="ctr"/>
-          <a:lstStyle/>
-          <a:p>
-            <a:pPr algn="ctr" indent="0" marL="0">
-              <a:buNone/>
-            </a:pPr>
-            <a:r>
-              <a:rPr lang="en-US" sz="1400" b="1" dirty="0">
-                <a:solidFill>
-                  <a:schemeClr val="tx1"/>
-                </a:solidFill>
-              </a:rPr>
-              <a:t>1</a:t>
-            </a:r>
-            <a:endParaRPr lang="en-US" sz="1400" dirty="0"/>
-          </a:p>
-        </p:txBody>
-      </p:sp>
-      <p:sp>
-        <p:nvSpPr>
-          <p:cNvPr id="7" name="step-text"/>
-          <p:cNvSpPr txBox="1"/>
-          <p:nvPr/>
-        </p:nvSpPr>
-        <p:spPr>
-          <a:xfrm>
-            <a:off x="1097280" y="1463040"/>
-            <a:ext cx="7498080" cy="603504"/>
-          </a:xfrm>
-          <a:prstGeom prst="rect">
-            <a:avLst/>
-          </a:prstGeom>
-          <a:noFill/>
-          <a:ln/>
-        </p:spPr>
-        <p:txBody>
-          <a:bodyPr wrap="square" lIns="0" tIns="0" rIns="0" bIns="0" rtlCol="0" anchor="ctr"/>
+          <a:bodyPr wrap="square" lIns="0" tIns="0" rIns="0" bIns="0" rtlCol="0" anchor="ctr">
+            <a:normAutofit/>
+          </a:bodyPr>
           <a:lstStyle/>
           <a:p>
             <a:pPr indent="0" marL="0">
               <a:buNone/>
             </a:pPr>
             <a:r>
-              <a:rPr lang="en-US" sz="1450" dirty="0">
-                <a:solidFill>
-                  <a:schemeClr val="tx1"/>
-                </a:solidFill>
+              <a:rPr lang="ja-JP" altLang="en-US" sz="1400" b="1" dirty="0">
+                <a:solidFill>
+                  <a:srgbClr val="1A1A1A"/>
+                </a:solidFill>
+                <a:latin typeface="Noto Sans JP" pitchFamily="34" charset="0"/>
+                <a:ea typeface="Noto Sans JP" pitchFamily="34" charset="-122"/>
+                <a:cs typeface="Noto Sans JP" pitchFamily="34" charset="-120"/>
               </a:rPr>
               <a:t>第8回で集めた改善要望から、1つ選ぶ</a:t>
             </a:r>
-            <a:endParaRPr lang="en-US" sz="1450" dirty="0"/>
-          </a:p>
-        </p:txBody>
-      </p:sp>
-      <p:sp>
-        <p:nvSpPr>
-          <p:cNvPr id="8" name="step-num"/>
+            <a:endParaRPr lang="ja-JP" sz="1400" dirty="0"/>
+          </a:p>
+        </p:txBody>
+      </p:sp>
+      <p:sp>
+        <p:nvSpPr>
+          <p:cNvPr id="7" name="card"/>
           <p:cNvSpPr/>
           <p:nvPr/>
         </p:nvSpPr>
         <p:spPr>
           <a:xfrm>
-            <a:off x="548640" y="2176272"/>
-            <a:ext cx="384048" cy="384048"/>
-          </a:xfrm>
-          <a:prstGeom prst="ellipse">
-            <a:avLst/>
-          </a:prstGeom>
-          <a:solidFill>
-            <a:schemeClr val="accent1"/>
-          </a:solidFill>
-          <a:ln w="15875">
+            <a:off x="502920" y="2055114"/>
+            <a:ext cx="8138160" cy="509778"/>
+          </a:xfrm>
+          <a:prstGeom prst="roundRect">
+            <a:avLst>
+              <a:gd name="adj" fmla="val 17937"/>
+            </a:avLst>
+          </a:prstGeom>
+          <a:solidFill>
+            <a:srgbClr val="FFFFFF"/>
+          </a:solidFill>
+          <a:ln w="25400">
             <a:solidFill>
               <a:srgbClr val="1A1A1A"/>
             </a:solidFill>
             <a:prstDash val="solid"/>
           </a:ln>
-        </p:spPr>
-      </p:sp>
-      <p:sp>
-        <p:nvSpPr>
-          <p:cNvPr id="9" name="step-num-text"/>
+          <a:effectLst>
+            <a:outerShdw sx="100000" sy="100000" kx="0" ky="0" algn="bl" rotWithShape="0" blurRad="101600" dist="38100" dir="2700000">
+              <a:srgbClr val="1A1A1A">
+                <a:alpha val="100000"/>
+              </a:srgbClr>
+            </a:outerShdw>
+          </a:effectLst>
+        </p:spPr>
+      </p:sp>
+      <p:sp>
+        <p:nvSpPr>
+          <p:cNvPr id="8" name="Text 6"/>
           <p:cNvSpPr txBox="1"/>
           <p:nvPr/>
         </p:nvSpPr>
         <p:spPr>
           <a:xfrm>
-            <a:off x="548640" y="2176272"/>
-            <a:ext cx="384048" cy="384048"/>
+            <a:off x="640080" y="2109978"/>
+            <a:ext cx="400050" cy="400050"/>
+          </a:xfrm>
+          <a:prstGeom prst="ellipse">
+            <a:avLst/>
+          </a:prstGeom>
+          <a:solidFill>
+            <a:srgbClr val="DD6420"/>
+          </a:solidFill>
+          <a:ln w="19050">
+            <a:solidFill>
+              <a:srgbClr val="1A1A1A"/>
+            </a:solidFill>
+          </a:ln>
+        </p:spPr>
+        <p:txBody>
+          <a:bodyPr wrap="square" lIns="0" tIns="0" rIns="0" bIns="0" rtlCol="0" anchor="ctr"/>
+          <a:lstStyle/>
+          <a:p>
+            <a:pPr algn="ctr" indent="0" marL="0">
+              <a:buNone/>
+            </a:pPr>
+            <a:r>
+              <a:rPr lang="ja-JP" altLang="en-US" sz="1500" dirty="0">
+                <a:solidFill>
+                  <a:srgbClr val="FFFFFF"/>
+                </a:solidFill>
+                <a:latin typeface="Dela Gothic One" pitchFamily="34" charset="0"/>
+                <a:ea typeface="けいふぉんと" pitchFamily="34" charset="-122"/>
+                <a:cs typeface="Dela Gothic One" pitchFamily="34" charset="-120"/>
+              </a:rPr>
+              <a:t>2</a:t>
+            </a:r>
+            <a:endParaRPr lang="ja-JP" sz="1500" dirty="0"/>
+          </a:p>
+        </p:txBody>
+      </p:sp>
+      <p:sp>
+        <p:nvSpPr>
+          <p:cNvPr id="9" name="step-text"/>
+          <p:cNvSpPr txBox="1"/>
+          <p:nvPr/>
+        </p:nvSpPr>
+        <p:spPr>
+          <a:xfrm>
+            <a:off x="1234440" y="2055114"/>
+            <a:ext cx="7269480" cy="509778"/>
           </a:xfrm>
           <a:prstGeom prst="rect">
             <a:avLst/>
@@ -5661,95 +5781,118 @@
           <a:ln/>
         </p:spPr>
         <p:txBody>
-          <a:bodyPr wrap="square" lIns="0" tIns="0" rIns="0" bIns="0" rtlCol="0" anchor="ctr"/>
-          <a:lstStyle/>
-          <a:p>
-            <a:pPr algn="ctr" indent="0" marL="0">
-              <a:buNone/>
-            </a:pPr>
-            <a:r>
-              <a:rPr lang="en-US" sz="1400" b="1" dirty="0">
-                <a:solidFill>
-                  <a:schemeClr val="tx1"/>
-                </a:solidFill>
-              </a:rPr>
-              <a:t>2</a:t>
-            </a:r>
-            <a:endParaRPr lang="en-US" sz="1400" dirty="0"/>
-          </a:p>
-        </p:txBody>
-      </p:sp>
-      <p:sp>
-        <p:nvSpPr>
-          <p:cNvPr id="10" name="step-text"/>
-          <p:cNvSpPr txBox="1"/>
-          <p:nvPr/>
-        </p:nvSpPr>
-        <p:spPr>
-          <a:xfrm>
-            <a:off x="1097280" y="2066544"/>
-            <a:ext cx="7498080" cy="603504"/>
-          </a:xfrm>
-          <a:prstGeom prst="rect">
-            <a:avLst/>
-          </a:prstGeom>
-          <a:noFill/>
-          <a:ln/>
-        </p:spPr>
-        <p:txBody>
-          <a:bodyPr wrap="square" lIns="0" tIns="0" rIns="0" bIns="0" rtlCol="0" anchor="ctr"/>
+          <a:bodyPr wrap="square" lIns="0" tIns="0" rIns="0" bIns="0" rtlCol="0" anchor="ctr">
+            <a:normAutofit/>
+          </a:bodyPr>
           <a:lstStyle/>
           <a:p>
             <a:pPr indent="0" marL="0">
               <a:buNone/>
             </a:pPr>
             <a:r>
-              <a:rPr lang="en-US" sz="1450" dirty="0">
-                <a:solidFill>
-                  <a:schemeClr val="tx1"/>
-                </a:solidFill>
+              <a:rPr lang="ja-JP" altLang="en-US" sz="1400" b="1" dirty="0">
+                <a:solidFill>
+                  <a:srgbClr val="1A1A1A"/>
+                </a:solidFill>
+                <a:latin typeface="Noto Sans JP" pitchFamily="34" charset="0"/>
+                <a:ea typeface="Noto Sans JP" pitchFamily="34" charset="-122"/>
+                <a:cs typeface="Noto Sans JP" pitchFamily="34" charset="-120"/>
               </a:rPr>
               <a:t>直す前にGitで記録する</a:t>
             </a:r>
-            <a:endParaRPr lang="en-US" sz="1450" dirty="0"/>
-          </a:p>
-        </p:txBody>
-      </p:sp>
-      <p:sp>
-        <p:nvSpPr>
-          <p:cNvPr id="11" name="step-num"/>
+            <a:endParaRPr lang="ja-JP" sz="1400" dirty="0"/>
+          </a:p>
+        </p:txBody>
+      </p:sp>
+      <p:sp>
+        <p:nvSpPr>
+          <p:cNvPr id="10" name="card"/>
           <p:cNvSpPr/>
           <p:nvPr/>
         </p:nvSpPr>
         <p:spPr>
           <a:xfrm>
-            <a:off x="548640" y="2779776"/>
-            <a:ext cx="384048" cy="384048"/>
-          </a:xfrm>
-          <a:prstGeom prst="ellipse">
-            <a:avLst/>
-          </a:prstGeom>
-          <a:solidFill>
-            <a:schemeClr val="accent1"/>
-          </a:solidFill>
-          <a:ln w="15875">
+            <a:off x="502920" y="2692908"/>
+            <a:ext cx="8138160" cy="509778"/>
+          </a:xfrm>
+          <a:prstGeom prst="roundRect">
+            <a:avLst>
+              <a:gd name="adj" fmla="val 17937"/>
+            </a:avLst>
+          </a:prstGeom>
+          <a:solidFill>
+            <a:srgbClr val="FFFFFF"/>
+          </a:solidFill>
+          <a:ln w="25400">
             <a:solidFill>
               <a:srgbClr val="1A1A1A"/>
             </a:solidFill>
             <a:prstDash val="solid"/>
           </a:ln>
-        </p:spPr>
-      </p:sp>
-      <p:sp>
-        <p:nvSpPr>
-          <p:cNvPr id="12" name="step-num-text"/>
+          <a:effectLst>
+            <a:outerShdw sx="100000" sy="100000" kx="0" ky="0" algn="bl" rotWithShape="0" blurRad="101600" dist="38100" dir="2700000">
+              <a:srgbClr val="1A1A1A">
+                <a:alpha val="100000"/>
+              </a:srgbClr>
+            </a:outerShdw>
+          </a:effectLst>
+        </p:spPr>
+      </p:sp>
+      <p:sp>
+        <p:nvSpPr>
+          <p:cNvPr id="11" name="Text 9"/>
           <p:cNvSpPr txBox="1"/>
           <p:nvPr/>
         </p:nvSpPr>
         <p:spPr>
           <a:xfrm>
-            <a:off x="548640" y="2779776"/>
-            <a:ext cx="384048" cy="384048"/>
+            <a:off x="640080" y="2747772"/>
+            <a:ext cx="400050" cy="400050"/>
+          </a:xfrm>
+          <a:prstGeom prst="ellipse">
+            <a:avLst/>
+          </a:prstGeom>
+          <a:solidFill>
+            <a:srgbClr val="DD6420"/>
+          </a:solidFill>
+          <a:ln w="19050">
+            <a:solidFill>
+              <a:srgbClr val="1A1A1A"/>
+            </a:solidFill>
+          </a:ln>
+        </p:spPr>
+        <p:txBody>
+          <a:bodyPr wrap="square" lIns="0" tIns="0" rIns="0" bIns="0" rtlCol="0" anchor="ctr"/>
+          <a:lstStyle/>
+          <a:p>
+            <a:pPr algn="ctr" indent="0" marL="0">
+              <a:buNone/>
+            </a:pPr>
+            <a:r>
+              <a:rPr lang="ja-JP" altLang="en-US" sz="1500" dirty="0">
+                <a:solidFill>
+                  <a:srgbClr val="FFFFFF"/>
+                </a:solidFill>
+                <a:latin typeface="Dela Gothic One" pitchFamily="34" charset="0"/>
+                <a:ea typeface="けいふぉんと" pitchFamily="34" charset="-122"/>
+                <a:cs typeface="Dela Gothic One" pitchFamily="34" charset="-120"/>
+              </a:rPr>
+              <a:t>3</a:t>
+            </a:r>
+            <a:endParaRPr lang="ja-JP" sz="1500" dirty="0"/>
+          </a:p>
+        </p:txBody>
+      </p:sp>
+      <p:sp>
+        <p:nvSpPr>
+          <p:cNvPr id="12" name="step-text"/>
+          <p:cNvSpPr txBox="1"/>
+          <p:nvPr/>
+        </p:nvSpPr>
+        <p:spPr>
+          <a:xfrm>
+            <a:off x="1234440" y="2692908"/>
+            <a:ext cx="7269480" cy="509778"/>
           </a:xfrm>
           <a:prstGeom prst="rect">
             <a:avLst/>
@@ -5758,95 +5901,118 @@
           <a:ln/>
         </p:spPr>
         <p:txBody>
-          <a:bodyPr wrap="square" lIns="0" tIns="0" rIns="0" bIns="0" rtlCol="0" anchor="ctr"/>
-          <a:lstStyle/>
-          <a:p>
-            <a:pPr algn="ctr" indent="0" marL="0">
-              <a:buNone/>
-            </a:pPr>
-            <a:r>
-              <a:rPr lang="en-US" sz="1400" b="1" dirty="0">
-                <a:solidFill>
-                  <a:schemeClr val="tx1"/>
-                </a:solidFill>
-              </a:rPr>
-              <a:t>3</a:t>
-            </a:r>
-            <a:endParaRPr lang="en-US" sz="1400" dirty="0"/>
-          </a:p>
-        </p:txBody>
-      </p:sp>
-      <p:sp>
-        <p:nvSpPr>
-          <p:cNvPr id="13" name="step-text"/>
-          <p:cNvSpPr txBox="1"/>
-          <p:nvPr/>
-        </p:nvSpPr>
-        <p:spPr>
-          <a:xfrm>
-            <a:off x="1097280" y="2670048"/>
-            <a:ext cx="7498080" cy="603504"/>
-          </a:xfrm>
-          <a:prstGeom prst="rect">
-            <a:avLst/>
-          </a:prstGeom>
-          <a:noFill/>
-          <a:ln/>
-        </p:spPr>
-        <p:txBody>
-          <a:bodyPr wrap="square" lIns="0" tIns="0" rIns="0" bIns="0" rtlCol="0" anchor="ctr"/>
+          <a:bodyPr wrap="square" lIns="0" tIns="0" rIns="0" bIns="0" rtlCol="0" anchor="ctr">
+            <a:normAutofit/>
+          </a:bodyPr>
           <a:lstStyle/>
           <a:p>
             <a:pPr indent="0" marL="0">
               <a:buNone/>
             </a:pPr>
             <a:r>
-              <a:rPr lang="en-US" sz="1450" dirty="0">
-                <a:solidFill>
-                  <a:schemeClr val="tx1"/>
-                </a:solidFill>
+              <a:rPr lang="ja-JP" altLang="en-US" sz="1400" b="1" dirty="0">
+                <a:solidFill>
+                  <a:srgbClr val="1A1A1A"/>
+                </a:solidFill>
+                <a:latin typeface="Noto Sans JP" pitchFamily="34" charset="0"/>
+                <a:ea typeface="Noto Sans JP" pitchFamily="34" charset="-122"/>
+                <a:cs typeface="Noto Sans JP" pitchFamily="34" charset="-120"/>
               </a:rPr>
               <a:t>Claude Codeに頼んで直し、手元で確認して公開する</a:t>
             </a:r>
-            <a:endParaRPr lang="en-US" sz="1450" dirty="0"/>
-          </a:p>
-        </p:txBody>
-      </p:sp>
-      <p:sp>
-        <p:nvSpPr>
-          <p:cNvPr id="14" name="step-num"/>
+            <a:endParaRPr lang="ja-JP" sz="1400" dirty="0"/>
+          </a:p>
+        </p:txBody>
+      </p:sp>
+      <p:sp>
+        <p:nvSpPr>
+          <p:cNvPr id="13" name="card"/>
           <p:cNvSpPr/>
           <p:nvPr/>
         </p:nvSpPr>
         <p:spPr>
           <a:xfrm>
-            <a:off x="548640" y="3383280"/>
-            <a:ext cx="384048" cy="384048"/>
-          </a:xfrm>
-          <a:prstGeom prst="ellipse">
-            <a:avLst/>
-          </a:prstGeom>
-          <a:solidFill>
-            <a:schemeClr val="accent1"/>
-          </a:solidFill>
-          <a:ln w="15875">
+            <a:off x="502920" y="3330702"/>
+            <a:ext cx="8138160" cy="509778"/>
+          </a:xfrm>
+          <a:prstGeom prst="roundRect">
+            <a:avLst>
+              <a:gd name="adj" fmla="val 17937"/>
+            </a:avLst>
+          </a:prstGeom>
+          <a:solidFill>
+            <a:srgbClr val="FFFFFF"/>
+          </a:solidFill>
+          <a:ln w="25400">
             <a:solidFill>
               <a:srgbClr val="1A1A1A"/>
             </a:solidFill>
             <a:prstDash val="solid"/>
           </a:ln>
-        </p:spPr>
-      </p:sp>
-      <p:sp>
-        <p:nvSpPr>
-          <p:cNvPr id="15" name="step-num-text"/>
+          <a:effectLst>
+            <a:outerShdw sx="100000" sy="100000" kx="0" ky="0" algn="bl" rotWithShape="0" blurRad="101600" dist="38100" dir="2700000">
+              <a:srgbClr val="1A1A1A">
+                <a:alpha val="100000"/>
+              </a:srgbClr>
+            </a:outerShdw>
+          </a:effectLst>
+        </p:spPr>
+      </p:sp>
+      <p:sp>
+        <p:nvSpPr>
+          <p:cNvPr id="14" name="Text 12"/>
           <p:cNvSpPr txBox="1"/>
           <p:nvPr/>
         </p:nvSpPr>
         <p:spPr>
           <a:xfrm>
-            <a:off x="548640" y="3383280"/>
-            <a:ext cx="384048" cy="384048"/>
+            <a:off x="640080" y="3385566"/>
+            <a:ext cx="400050" cy="400050"/>
+          </a:xfrm>
+          <a:prstGeom prst="ellipse">
+            <a:avLst/>
+          </a:prstGeom>
+          <a:solidFill>
+            <a:srgbClr val="DD6420"/>
+          </a:solidFill>
+          <a:ln w="19050">
+            <a:solidFill>
+              <a:srgbClr val="1A1A1A"/>
+            </a:solidFill>
+          </a:ln>
+        </p:spPr>
+        <p:txBody>
+          <a:bodyPr wrap="square" lIns="0" tIns="0" rIns="0" bIns="0" rtlCol="0" anchor="ctr"/>
+          <a:lstStyle/>
+          <a:p>
+            <a:pPr algn="ctr" indent="0" marL="0">
+              <a:buNone/>
+            </a:pPr>
+            <a:r>
+              <a:rPr lang="ja-JP" altLang="en-US" sz="1500" dirty="0">
+                <a:solidFill>
+                  <a:srgbClr val="FFFFFF"/>
+                </a:solidFill>
+                <a:latin typeface="Dela Gothic One" pitchFamily="34" charset="0"/>
+                <a:ea typeface="けいふぉんと" pitchFamily="34" charset="-122"/>
+                <a:cs typeface="Dela Gothic One" pitchFamily="34" charset="-120"/>
+              </a:rPr>
+              <a:t>4</a:t>
+            </a:r>
+            <a:endParaRPr lang="ja-JP" sz="1500" dirty="0"/>
+          </a:p>
+        </p:txBody>
+      </p:sp>
+      <p:sp>
+        <p:nvSpPr>
+          <p:cNvPr id="15" name="step-text"/>
+          <p:cNvSpPr txBox="1"/>
+          <p:nvPr/>
+        </p:nvSpPr>
+        <p:spPr>
+          <a:xfrm>
+            <a:off x="1234440" y="3330702"/>
+            <a:ext cx="7269480" cy="509778"/>
           </a:xfrm>
           <a:prstGeom prst="rect">
             <a:avLst/>
@@ -5855,144 +6021,80 @@
           <a:ln/>
         </p:spPr>
         <p:txBody>
-          <a:bodyPr wrap="square" lIns="0" tIns="0" rIns="0" bIns="0" rtlCol="0" anchor="ctr"/>
+          <a:bodyPr wrap="square" lIns="0" tIns="0" rIns="0" bIns="0" rtlCol="0" anchor="ctr">
+            <a:normAutofit/>
+          </a:bodyPr>
+          <a:lstStyle/>
+          <a:p>
+            <a:pPr indent="0" marL="0">
+              <a:buNone/>
+            </a:pPr>
+            <a:r>
+              <a:rPr lang="ja-JP" altLang="en-US" sz="1400" b="1" dirty="0">
+                <a:solidFill>
+                  <a:srgbClr val="1A1A1A"/>
+                </a:solidFill>
+                <a:latin typeface="Noto Sans JP" pitchFamily="34" charset="0"/>
+                <a:ea typeface="Noto Sans JP" pitchFamily="34" charset="-122"/>
+                <a:cs typeface="Noto Sans JP" pitchFamily="34" charset="-120"/>
+              </a:rPr>
+              <a:t>Wikiの「04 改善メモ」に1行残す</a:t>
+            </a:r>
+            <a:endParaRPr lang="ja-JP" sz="1400" dirty="0"/>
+          </a:p>
+        </p:txBody>
+      </p:sp>
+      <p:sp>
+        <p:nvSpPr>
+          <p:cNvPr id="16" name="Text 14"/>
+          <p:cNvSpPr txBox="1"/>
+          <p:nvPr/>
+        </p:nvSpPr>
+        <p:spPr>
+          <a:xfrm rot="-60000">
+            <a:off x="502920" y="4005072"/>
+            <a:ext cx="8138160" cy="502920"/>
+          </a:xfrm>
+          <a:prstGeom prst="rect">
+            <a:avLst/>
+          </a:prstGeom>
+          <a:solidFill>
+            <a:srgbClr val="DD6420"/>
+          </a:solidFill>
+          <a:ln w="19050">
+            <a:solidFill>
+              <a:srgbClr val="1A1A1A"/>
+            </a:solidFill>
+          </a:ln>
+          <a:effectLst>
+            <a:outerShdw sx="100000" sy="100000" kx="0" ky="0" algn="bl" rotWithShape="0" blurRad="101600" dist="38100" dir="2700000">
+              <a:srgbClr val="1A1A1A">
+                <a:alpha val="100000"/>
+              </a:srgbClr>
+            </a:outerShdw>
+          </a:effectLst>
+        </p:spPr>
+        <p:txBody>
+          <a:bodyPr wrap="square" lIns="0" tIns="1905" rIns="1905" bIns="0" rtlCol="0" anchor="ctr">
+            <a:normAutofit/>
+          </a:bodyPr>
           <a:lstStyle/>
           <a:p>
             <a:pPr algn="ctr" indent="0" marL="0">
               <a:buNone/>
             </a:pPr>
             <a:r>
-              <a:rPr lang="en-US" sz="1400" b="1" dirty="0">
-                <a:solidFill>
-                  <a:schemeClr val="tx1"/>
-                </a:solidFill>
-              </a:rPr>
-              <a:t>4</a:t>
-            </a:r>
-            <a:endParaRPr lang="en-US" sz="1400" dirty="0"/>
-          </a:p>
-        </p:txBody>
-      </p:sp>
-      <p:sp>
-        <p:nvSpPr>
-          <p:cNvPr id="16" name="step-text"/>
-          <p:cNvSpPr txBox="1"/>
-          <p:nvPr/>
-        </p:nvSpPr>
-        <p:spPr>
-          <a:xfrm>
-            <a:off x="1097280" y="3273552"/>
-            <a:ext cx="7498080" cy="603504"/>
-          </a:xfrm>
-          <a:prstGeom prst="rect">
-            <a:avLst/>
-          </a:prstGeom>
-          <a:noFill/>
-          <a:ln/>
-        </p:spPr>
-        <p:txBody>
-          <a:bodyPr wrap="square" lIns="0" tIns="0" rIns="0" bIns="0" rtlCol="0" anchor="ctr"/>
-          <a:lstStyle/>
-          <a:p>
-            <a:pPr indent="0" marL="0">
-              <a:buNone/>
-            </a:pPr>
-            <a:r>
-              <a:rPr lang="en-US" sz="1450" dirty="0">
-                <a:solidFill>
-                  <a:schemeClr val="tx1"/>
-                </a:solidFill>
-              </a:rPr>
-              <a:t>Wikiの「04 改善メモ」に1行残す</a:t>
-            </a:r>
-            <a:endParaRPr lang="en-US" sz="1450" dirty="0"/>
-          </a:p>
-        </p:txBody>
-      </p:sp>
-      <p:sp>
-        <p:nvSpPr>
-          <p:cNvPr id="17" name="foot-box"/>
-          <p:cNvSpPr/>
-          <p:nvPr/>
-        </p:nvSpPr>
-        <p:spPr>
-          <a:xfrm>
-            <a:off x="548640" y="3977640"/>
-            <a:ext cx="8046720" cy="502920"/>
-          </a:xfrm>
-          <a:prstGeom prst="roundRect">
-            <a:avLst>
-              <a:gd name="adj" fmla="val 18182"/>
-            </a:avLst>
-          </a:prstGeom>
-          <a:solidFill>
-            <a:schemeClr val="bg2"/>
-          </a:solidFill>
-          <a:ln w="12700">
-            <a:solidFill>
-              <a:schemeClr val="bg2"/>
-            </a:solidFill>
-            <a:prstDash val="solid"/>
-          </a:ln>
-        </p:spPr>
-      </p:sp>
-      <p:pic>
-        <p:nvPicPr>
-          <p:cNvPr id="18" name="foot-icon" descr="preencoded.png">    </p:cNvPr>
-          <p:cNvPicPr>
-            <a:picLocks noChangeAspect="1"/>
-          </p:cNvPicPr>
-          <p:nvPr/>
-        </p:nvPicPr>
-        <p:blipFill>
-          <a:blip r:embed="rId1"/>
-          <a:stretch>
-            <a:fillRect/>
-          </a:stretch>
-        </p:blipFill>
-        <p:spPr>
-          <a:xfrm>
-            <a:off x="685800" y="4105656"/>
-            <a:ext cx="246888" cy="246888"/>
-          </a:xfrm>
-          <a:prstGeom prst="rect">
-            <a:avLst/>
-          </a:prstGeom>
-        </p:spPr>
-      </p:pic>
-      <p:sp>
-        <p:nvSpPr>
-          <p:cNvPr id="19" name="foot-text"/>
-          <p:cNvSpPr txBox="1"/>
-          <p:nvPr/>
-        </p:nvSpPr>
-        <p:spPr>
-          <a:xfrm>
-            <a:off x="1051560" y="3977640"/>
-            <a:ext cx="7406640" cy="502920"/>
-          </a:xfrm>
-          <a:prstGeom prst="rect">
-            <a:avLst/>
-          </a:prstGeom>
-          <a:noFill/>
-          <a:ln/>
-        </p:spPr>
-        <p:txBody>
-          <a:bodyPr wrap="square" lIns="0" tIns="0" rIns="0" bIns="0" rtlCol="0" anchor="ctr"/>
-          <a:lstStyle/>
-          <a:p>
-            <a:pPr indent="0" marL="0">
-              <a:buNone/>
-            </a:pPr>
-            <a:r>
-              <a:rPr lang="en-US" sz="1150" dirty="0">
-                <a:solidFill>
-                  <a:schemeClr val="tx1"/>
-                </a:solidFill>
+              <a:rPr lang="ja-JP" altLang="en-US" sz="1300" b="1" dirty="0">
+                <a:solidFill>
+                  <a:srgbClr val="FFFFFF"/>
+                </a:solidFill>
+                <a:latin typeface="Noto Sans JP" pitchFamily="34" charset="0"/>
+                <a:ea typeface="Noto Sans JP" pitchFamily="34" charset="-122"/>
+                <a:cs typeface="Noto Sans JP" pitchFamily="34" charset="-120"/>
               </a:rPr>
               <a:t>変更の説明は P-10 で頼む</a:t>
             </a:r>
-            <a:endParaRPr lang="en-US" sz="1150" dirty="0"/>
+            <a:endParaRPr lang="ja-JP" sz="1300" dirty="0"/>
           </a:p>
         </p:txBody>
       </p:sp>
@@ -6008,8 +6110,8 @@
         </p:nvSpPr>
         <p:spPr>
           <a:xfrm>
-            <a:off x="8229600" y="4773168"/>
-            <a:ext cx="365760" cy="228600"/>
+            <a:off x="8366760" y="4754880"/>
+            <a:ext cx="365760" cy="274320"/>
           </a:xfrm>
           <a:prstGeom prst="rect">
             <a:avLst/>
@@ -6021,20 +6123,23 @@
           </a:extLst>
         </p:spPr>
         <p:txBody>
-          <a:bodyPr/>
+          <a:bodyPr anchor="ctr"/>
           <a:lstStyle>
             <a:lvl1pPr>
-              <a:defRPr sz="900">
-                <a:solidFill>
-                  <a:srgbClr val="5A6872"/>
-                </a:solidFill>
+              <a:defRPr sz="850">
+                <a:solidFill>
+                  <a:srgbClr val="FFFFFF"/>
+                </a:solidFill>
+                <a:latin typeface="Noto Sans JP"/>
+                <a:ea typeface="Noto Sans JP"/>
+                <a:cs typeface="Noto Sans JP"/>
               </a:defRPr>
             </a:lvl1pPr>
           </a:lstStyle>
           <a:p>
             <a:pPr algn="r"/>
             <a:fld id="{F7021451-1387-4CA6-816F-3879F97B5CBC}" type="slidenum">
-              <a:rPr b="0" lang="en-US"/>
+              <a:rPr b="1" lang="en-US"/>
               <a:t>6</a:t>
             </a:fld>
             <a:endParaRPr lang="en-US"/>
@@ -6069,15 +6174,58 @@
       <p:sp>
         <p:nvSpPr>
           <p:cNvPr id="2" name="Text 0"/>
-          <p:cNvSpPr/>
-          <p:nvPr>
-            <p:ph idx="100" type="title" hasCustomPrompt="1"/>
-          </p:nvPr>
-        </p:nvSpPr>
-        <p:spPr>
-          <a:xfrm>
-            <a:off x="548640" y="658368"/>
-            <a:ext cx="8046720" cy="566928"/>
+          <p:cNvSpPr txBox="1"/>
+          <p:nvPr/>
+        </p:nvSpPr>
+        <p:spPr>
+          <a:xfrm rot="-180000">
+            <a:off x="411480" y="201168"/>
+            <a:ext cx="894740" cy="352044"/>
+          </a:xfrm>
+          <a:prstGeom prst="rect">
+            <a:avLst/>
+          </a:prstGeom>
+          <a:solidFill>
+            <a:srgbClr val="1A1A1A"/>
+          </a:solidFill>
+          <a:ln>
+            <a:solidFill>
+              <a:srgbClr val="1A1A1A"/>
+            </a:solidFill>
+          </a:ln>
+        </p:spPr>
+        <p:txBody>
+          <a:bodyPr wrap="square" lIns="0" tIns="0" rIns="0" bIns="0" rtlCol="0" anchor="ctr"/>
+          <a:lstStyle/>
+          <a:p>
+            <a:pPr algn="ctr" indent="0" marL="0">
+              <a:buNone/>
+            </a:pPr>
+            <a:r>
+              <a:rPr lang="ja-JP" altLang="en-US" sz="1100" dirty="0">
+                <a:solidFill>
+                  <a:srgbClr val="FFFFFF"/>
+                </a:solidFill>
+                <a:latin typeface="Dela Gothic One" pitchFamily="34" charset="0"/>
+                <a:ea typeface="けいふぉんと" pitchFamily="34" charset="-122"/>
+                <a:cs typeface="Dela Gothic One" pitchFamily="34" charset="-120"/>
+              </a:rPr>
+              <a:t>まとめ</a:t>
+            </a:r>
+            <a:endParaRPr lang="ja-JP" sz="1100" dirty="0"/>
+          </a:p>
+        </p:txBody>
+      </p:sp>
+      <p:sp>
+        <p:nvSpPr>
+          <p:cNvPr id="3" name="Text 1"/>
+          <p:cNvSpPr txBox="1"/>
+          <p:nvPr/>
+        </p:nvSpPr>
+        <p:spPr>
+          <a:xfrm>
+            <a:off x="411480" y="502920"/>
+            <a:ext cx="8321040" cy="685800"/>
           </a:xfrm>
           <a:prstGeom prst="rect">
             <a:avLst/>
@@ -6086,105 +6234,79 @@
           <a:ln/>
         </p:spPr>
         <p:txBody>
-          <a:bodyPr wrap="square" lIns="0" tIns="0" rIns="0" bIns="0" rtlCol="0" anchor="ctr"/>
-          <a:lstStyle/>
-          <a:p>
-            <a:pPr algn="l" indent="0" marL="0">
-              <a:buNone/>
-            </a:pPr>
-            <a:r>
-              <a:rPr lang="en-US" sz="2400" b="1" dirty="0">
-                <a:solidFill>
-                  <a:schemeClr val="tx1"/>
-                </a:solidFill>
+          <a:bodyPr wrap="square" lIns="0" tIns="0" rIns="0" bIns="0" rtlCol="0" anchor="ctr">
+            <a:normAutofit/>
+          </a:bodyPr>
+          <a:lstStyle/>
+          <a:p>
+            <a:pPr indent="0" marL="0">
+              <a:buNone/>
+            </a:pPr>
+            <a:r>
+              <a:rPr lang="ja-JP" altLang="en-US" sz="2600" dirty="0">
+                <a:solidFill>
+                  <a:srgbClr val="1A1A1A"/>
+                </a:solidFill>
+                <a:latin typeface="Dela Gothic One" pitchFamily="34" charset="0"/>
+                <a:ea typeface="けいふぉんと" pitchFamily="34" charset="-122"/>
+                <a:cs typeface="Dela Gothic One" pitchFamily="34" charset="-120"/>
               </a:rPr>
               <a:t>宿題と、今日のチェック</a:t>
             </a:r>
-            <a:endParaRPr lang="en-US" sz="2400" dirty="0"/>
-          </a:p>
-        </p:txBody>
-      </p:sp>
-      <p:sp>
-        <p:nvSpPr>
-          <p:cNvPr id="3" name="chip"/>
+            <a:endParaRPr lang="ja-JP" sz="2600" dirty="0"/>
+          </a:p>
+        </p:txBody>
+      </p:sp>
+      <p:sp>
+        <p:nvSpPr>
+          <p:cNvPr id="4" name="card"/>
           <p:cNvSpPr/>
           <p:nvPr/>
         </p:nvSpPr>
         <p:spPr>
           <a:xfrm>
-            <a:off x="548640" y="292608"/>
-            <a:ext cx="795528" cy="292608"/>
+            <a:off x="502920" y="1417320"/>
+            <a:ext cx="3931920" cy="3108960"/>
           </a:xfrm>
           <a:prstGeom prst="roundRect">
             <a:avLst>
-              <a:gd name="adj" fmla="val 50000"/>
+              <a:gd name="adj" fmla="val 2941"/>
             </a:avLst>
           </a:prstGeom>
           <a:solidFill>
-            <a:schemeClr val="tx1"/>
-          </a:solidFill>
-          <a:ln w="12700">
+            <a:srgbClr val="FFFFFF"/>
+          </a:solidFill>
+          <a:ln w="25400">
             <a:solidFill>
-              <a:schemeClr val="tx1"/>
+              <a:srgbClr val="1A1A1A"/>
             </a:solidFill>
             <a:prstDash val="solid"/>
           </a:ln>
-        </p:spPr>
-      </p:sp>
-      <p:sp>
-        <p:nvSpPr>
-          <p:cNvPr id="4" name="chip-text"/>
-          <p:cNvSpPr txBox="1"/>
-          <p:nvPr/>
-        </p:nvSpPr>
-        <p:spPr>
-          <a:xfrm>
-            <a:off x="548640" y="292608"/>
-            <a:ext cx="795528" cy="292608"/>
-          </a:xfrm>
-          <a:prstGeom prst="rect">
-            <a:avLst/>
-          </a:prstGeom>
-          <a:noFill/>
-          <a:ln/>
-        </p:spPr>
-        <p:txBody>
-          <a:bodyPr wrap="square" lIns="0" tIns="0" rIns="0" bIns="0" rtlCol="0" anchor="ctr"/>
-          <a:lstStyle/>
-          <a:p>
-            <a:pPr algn="ctr" indent="0" marL="0">
-              <a:buNone/>
-            </a:pPr>
-            <a:r>
-              <a:rPr lang="en-US" sz="1100" b="1" dirty="0">
-                <a:solidFill>
-                  <a:schemeClr val="accent1"/>
-                </a:solidFill>
-              </a:rPr>
-              <a:t>まとめ</a:t>
-            </a:r>
-            <a:endParaRPr lang="en-US" sz="1100" dirty="0"/>
-          </a:p>
-        </p:txBody>
-      </p:sp>
-      <p:sp>
-        <p:nvSpPr>
-          <p:cNvPr id="5" name="card"/>
+          <a:effectLst>
+            <a:outerShdw sx="100000" sy="100000" kx="0" ky="0" algn="bl" rotWithShape="0" blurRad="101600" dist="50800" dir="2700000">
+              <a:srgbClr val="1A1A1A">
+                <a:alpha val="100000"/>
+              </a:srgbClr>
+            </a:outerShdw>
+          </a:effectLst>
+        </p:spPr>
+      </p:sp>
+      <p:sp>
+        <p:nvSpPr>
+          <p:cNvPr id="5" name="icon-circle"/>
           <p:cNvSpPr/>
           <p:nvPr/>
         </p:nvSpPr>
         <p:spPr>
           <a:xfrm>
-            <a:off x="548640" y="1463040"/>
-            <a:ext cx="3886200" cy="3017520"/>
-          </a:xfrm>
-          <a:prstGeom prst="roundRect">
-            <a:avLst>
-              <a:gd name="adj" fmla="val 3636"/>
-            </a:avLst>
-          </a:prstGeom>
-          <a:solidFill>
-            <a:schemeClr val="bg2"/>
+            <a:off x="704088" y="1600200"/>
+            <a:ext cx="457200" cy="457200"/>
+          </a:xfrm>
+          <a:prstGeom prst="ellipse">
+            <a:avLst/>
+          </a:prstGeom>
+          <a:solidFill>
+            <a:srgbClr val="DD6420"/>
           </a:solidFill>
           <a:ln w="19050">
             <a:solidFill>
@@ -6192,43 +6314,11 @@
             </a:solidFill>
             <a:prstDash val="solid"/>
           </a:ln>
-          <a:effectLst>
-            <a:outerShdw sx="100000" sy="100000" kx="0" ky="0" algn="bl" rotWithShape="0" blurRad="101600" dist="38100" dir="2700000">
-              <a:srgbClr val="000000">
-                <a:alpha val="18000"/>
-              </a:srgbClr>
-            </a:outerShdw>
-          </a:effectLst>
-        </p:spPr>
-      </p:sp>
-      <p:sp>
-        <p:nvSpPr>
-          <p:cNvPr id="6" name="icon-circle"/>
-          <p:cNvSpPr/>
-          <p:nvPr/>
-        </p:nvSpPr>
-        <p:spPr>
-          <a:xfrm>
-            <a:off x="777240" y="1645920"/>
-            <a:ext cx="457200" cy="457200"/>
-          </a:xfrm>
-          <a:prstGeom prst="ellipse">
-            <a:avLst/>
-          </a:prstGeom>
-          <a:solidFill>
-            <a:schemeClr val="accent1"/>
-          </a:solidFill>
-          <a:ln w="15875">
-            <a:solidFill>
-              <a:srgbClr val="1A1A1A"/>
-            </a:solidFill>
-            <a:prstDash val="solid"/>
-          </a:ln>
         </p:spPr>
       </p:sp>
       <p:pic>
         <p:nvPicPr>
-          <p:cNvPr id="7" name="icon" descr="preencoded.png">    </p:cNvPr>
+          <p:cNvPr id="6" name="icon" descr="preencoded.png">    </p:cNvPr>
           <p:cNvPicPr>
             <a:picLocks noChangeAspect="1"/>
           </p:cNvPicPr>
@@ -6242,14 +6332,53 @@
         </p:blipFill>
         <p:spPr>
           <a:xfrm>
-            <a:off x="896112" y="1764792"/>
-            <a:ext cx="219456" cy="219456"/>
+            <a:off x="818388" y="1714500"/>
+            <a:ext cx="228600" cy="228600"/>
           </a:xfrm>
           <a:prstGeom prst="rect">
             <a:avLst/>
           </a:prstGeom>
         </p:spPr>
       </p:pic>
+      <p:sp>
+        <p:nvSpPr>
+          <p:cNvPr id="7" name="Text 4"/>
+          <p:cNvSpPr txBox="1"/>
+          <p:nvPr/>
+        </p:nvSpPr>
+        <p:spPr>
+          <a:xfrm>
+            <a:off x="1280160" y="1600200"/>
+            <a:ext cx="2743200" cy="457200"/>
+          </a:xfrm>
+          <a:prstGeom prst="rect">
+            <a:avLst/>
+          </a:prstGeom>
+          <a:noFill/>
+          <a:ln/>
+        </p:spPr>
+        <p:txBody>
+          <a:bodyPr wrap="square" lIns="0" tIns="0" rIns="0" bIns="0" rtlCol="0" anchor="ctr"/>
+          <a:lstStyle/>
+          <a:p>
+            <a:pPr indent="0" marL="0">
+              <a:buNone/>
+            </a:pPr>
+            <a:r>
+              <a:rPr lang="ja-JP" altLang="en-US" sz="1800" dirty="0">
+                <a:solidFill>
+                  <a:srgbClr val="1A1A1A"/>
+                </a:solidFill>
+                <a:latin typeface="Dela Gothic One" pitchFamily="34" charset="0"/>
+                <a:ea typeface="けいふぉんと" pitchFamily="34" charset="-122"/>
+                <a:cs typeface="Dela Gothic One" pitchFamily="34" charset="-120"/>
+              </a:rPr>
+              <a:t>宿題</a:t>
+            </a:r>
+            <a:endParaRPr lang="ja-JP" sz="1800" dirty="0"/>
+          </a:p>
+        </p:txBody>
+      </p:sp>
       <p:sp>
         <p:nvSpPr>
           <p:cNvPr id="8" name="Text 5"/>
@@ -6258,8 +6387,8 @@
         </p:nvSpPr>
         <p:spPr>
           <a:xfrm>
-            <a:off x="1371600" y="1645920"/>
-            <a:ext cx="2743200" cy="457200"/>
+            <a:off x="731520" y="2240280"/>
+            <a:ext cx="3474720" cy="2148840"/>
           </a:xfrm>
           <a:prstGeom prst="rect">
             <a:avLst/>
@@ -6268,43 +6397,9 @@
           <a:ln/>
         </p:spPr>
         <p:txBody>
-          <a:bodyPr wrap="square" lIns="0" tIns="0" rIns="0" bIns="0" rtlCol="0" anchor="ctr"/>
-          <a:lstStyle/>
-          <a:p>
-            <a:pPr indent="0" marL="0">
-              <a:buNone/>
-            </a:pPr>
-            <a:r>
-              <a:rPr lang="en-US" sz="1700" b="1" dirty="0">
-                <a:solidFill>
-                  <a:schemeClr val="tx1"/>
-                </a:solidFill>
-              </a:rPr>
-              <a:t>宿題</a:t>
-            </a:r>
-            <a:endParaRPr lang="en-US" sz="1700" dirty="0"/>
-          </a:p>
-        </p:txBody>
-      </p:sp>
-      <p:sp>
-        <p:nvSpPr>
-          <p:cNvPr id="9" name="Text 6"/>
-          <p:cNvSpPr txBox="1"/>
-          <p:nvPr/>
-        </p:nvSpPr>
-        <p:spPr>
-          <a:xfrm>
-            <a:off x="777240" y="2286000"/>
-            <a:ext cx="3474720" cy="2057400"/>
-          </a:xfrm>
-          <a:prstGeom prst="rect">
-            <a:avLst/>
-          </a:prstGeom>
-          <a:noFill/>
-          <a:ln/>
-        </p:spPr>
-        <p:txBody>
-          <a:bodyPr wrap="square" lIns="0" tIns="0" rIns="0" bIns="0" rtlCol="0" anchor="t"/>
+          <a:bodyPr wrap="square" lIns="0" tIns="0" rIns="0" bIns="0" rtlCol="0" anchor="t">
+            <a:normAutofit/>
+          </a:bodyPr>
           <a:lstStyle/>
           <a:p>
             <a:pPr marL="342900" indent="-342900">
@@ -6312,38 +6407,73 @@
                 <a:spcPts val="800"/>
               </a:spcAft>
               <a:buSzPct val="100000"/>
-              <a:buChar char="•"/>
-            </a:pPr>
-            <a:r>
-              <a:rPr lang="en-US" sz="1350" dirty="0">
-                <a:solidFill>
-                  <a:schemeClr val="tx1"/>
-                </a:solidFill>
+              <a:buChar char="●"/>
+            </a:pPr>
+            <a:r>
+              <a:rPr lang="ja-JP" altLang="en-US" sz="1350" b="1" dirty="0">
+                <a:solidFill>
+                  <a:srgbClr val="1A1A1A"/>
+                </a:solidFill>
+                <a:latin typeface="Noto Sans JP" pitchFamily="34" charset="0"/>
+                <a:ea typeface="Noto Sans JP" pitchFamily="34" charset="-122"/>
+                <a:cs typeface="Noto Sans JP" pitchFamily="34" charset="-120"/>
               </a:rPr>
               <a:t>成果発表の資料（5分）を作る</a:t>
             </a:r>
-            <a:endParaRPr lang="en-US" sz="1350" dirty="0"/>
-          </a:p>
-        </p:txBody>
-      </p:sp>
-      <p:sp>
-        <p:nvSpPr>
-          <p:cNvPr id="10" name="card"/>
+            <a:endParaRPr lang="ja-JP" sz="1350" dirty="0"/>
+          </a:p>
+        </p:txBody>
+      </p:sp>
+      <p:sp>
+        <p:nvSpPr>
+          <p:cNvPr id="9" name="card"/>
           <p:cNvSpPr/>
           <p:nvPr/>
         </p:nvSpPr>
         <p:spPr>
           <a:xfrm>
-            <a:off x="4709160" y="1463040"/>
-            <a:ext cx="3886200" cy="3017520"/>
+            <a:off x="4709160" y="1417320"/>
+            <a:ext cx="3931920" cy="3108960"/>
           </a:xfrm>
           <a:prstGeom prst="roundRect">
             <a:avLst>
-              <a:gd name="adj" fmla="val 3636"/>
+              <a:gd name="adj" fmla="val 2941"/>
             </a:avLst>
           </a:prstGeom>
           <a:solidFill>
-            <a:schemeClr val="bg1"/>
+            <a:srgbClr val="FFFFFF"/>
+          </a:solidFill>
+          <a:ln w="25400">
+            <a:solidFill>
+              <a:srgbClr val="1A1A1A"/>
+            </a:solidFill>
+            <a:prstDash val="solid"/>
+          </a:ln>
+          <a:effectLst>
+            <a:outerShdw sx="100000" sy="100000" kx="0" ky="0" algn="bl" rotWithShape="0" blurRad="101600" dist="50800" dir="2700000">
+              <a:srgbClr val="1A1A1A">
+                <a:alpha val="100000"/>
+              </a:srgbClr>
+            </a:outerShdw>
+          </a:effectLst>
+        </p:spPr>
+      </p:sp>
+      <p:sp>
+        <p:nvSpPr>
+          <p:cNvPr id="10" name="icon-circle"/>
+          <p:cNvSpPr/>
+          <p:nvPr/>
+        </p:nvSpPr>
+        <p:spPr>
+          <a:xfrm>
+            <a:off x="4910328" y="1600200"/>
+            <a:ext cx="457200" cy="457200"/>
+          </a:xfrm>
+          <a:prstGeom prst="ellipse">
+            <a:avLst/>
+          </a:prstGeom>
+          <a:solidFill>
+            <a:srgbClr val="DD6420"/>
           </a:solidFill>
           <a:ln w="19050">
             <a:solidFill>
@@ -6351,43 +6481,11 @@
             </a:solidFill>
             <a:prstDash val="solid"/>
           </a:ln>
-          <a:effectLst>
-            <a:outerShdw sx="100000" sy="100000" kx="0" ky="0" algn="bl" rotWithShape="0" blurRad="101600" dist="38100" dir="2700000">
-              <a:srgbClr val="000000">
-                <a:alpha val="18000"/>
-              </a:srgbClr>
-            </a:outerShdw>
-          </a:effectLst>
-        </p:spPr>
-      </p:sp>
-      <p:sp>
-        <p:nvSpPr>
-          <p:cNvPr id="11" name="icon-circle"/>
-          <p:cNvSpPr/>
-          <p:nvPr/>
-        </p:nvSpPr>
-        <p:spPr>
-          <a:xfrm>
-            <a:off x="4937760" y="1645920"/>
-            <a:ext cx="457200" cy="457200"/>
-          </a:xfrm>
-          <a:prstGeom prst="ellipse">
-            <a:avLst/>
-          </a:prstGeom>
-          <a:solidFill>
-            <a:schemeClr val="accent1"/>
-          </a:solidFill>
-          <a:ln w="15875">
-            <a:solidFill>
-              <a:srgbClr val="1A1A1A"/>
-            </a:solidFill>
-            <a:prstDash val="solid"/>
-          </a:ln>
         </p:spPr>
       </p:sp>
       <p:pic>
         <p:nvPicPr>
-          <p:cNvPr id="12" name="icon" descr="preencoded.png">    </p:cNvPr>
+          <p:cNvPr id="11" name="icon" descr="preencoded.png">    </p:cNvPr>
           <p:cNvPicPr>
             <a:picLocks noChangeAspect="1"/>
           </p:cNvPicPr>
@@ -6401,14 +6499,53 @@
         </p:blipFill>
         <p:spPr>
           <a:xfrm>
-            <a:off x="5056632" y="1764792"/>
-            <a:ext cx="219456" cy="219456"/>
+            <a:off x="5024628" y="1714500"/>
+            <a:ext cx="228600" cy="228600"/>
           </a:xfrm>
           <a:prstGeom prst="rect">
             <a:avLst/>
           </a:prstGeom>
         </p:spPr>
       </p:pic>
+      <p:sp>
+        <p:nvSpPr>
+          <p:cNvPr id="12" name="Text 8"/>
+          <p:cNvSpPr txBox="1"/>
+          <p:nvPr/>
+        </p:nvSpPr>
+        <p:spPr>
+          <a:xfrm>
+            <a:off x="5486400" y="1600200"/>
+            <a:ext cx="2743200" cy="457200"/>
+          </a:xfrm>
+          <a:prstGeom prst="rect">
+            <a:avLst/>
+          </a:prstGeom>
+          <a:noFill/>
+          <a:ln/>
+        </p:spPr>
+        <p:txBody>
+          <a:bodyPr wrap="square" lIns="0" tIns="0" rIns="0" bIns="0" rtlCol="0" anchor="ctr"/>
+          <a:lstStyle/>
+          <a:p>
+            <a:pPr indent="0" marL="0">
+              <a:buNone/>
+            </a:pPr>
+            <a:r>
+              <a:rPr lang="ja-JP" altLang="en-US" sz="1800" dirty="0">
+                <a:solidFill>
+                  <a:srgbClr val="1A1A1A"/>
+                </a:solidFill>
+                <a:latin typeface="Dela Gothic One" pitchFamily="34" charset="0"/>
+                <a:ea typeface="けいふぉんと" pitchFamily="34" charset="-122"/>
+                <a:cs typeface="Dela Gothic One" pitchFamily="34" charset="-120"/>
+              </a:rPr>
+              <a:t>できたらチェック</a:t>
+            </a:r>
+            <a:endParaRPr lang="ja-JP" sz="1800" dirty="0"/>
+          </a:p>
+        </p:txBody>
+      </p:sp>
       <p:sp>
         <p:nvSpPr>
           <p:cNvPr id="13" name="Text 9"/>
@@ -6417,8 +6554,8 @@
         </p:nvSpPr>
         <p:spPr>
           <a:xfrm>
-            <a:off x="5532120" y="1645920"/>
-            <a:ext cx="2743200" cy="457200"/>
+            <a:off x="4937760" y="2240280"/>
+            <a:ext cx="3474720" cy="2148840"/>
           </a:xfrm>
           <a:prstGeom prst="rect">
             <a:avLst/>
@@ -6427,43 +6564,9 @@
           <a:ln/>
         </p:spPr>
         <p:txBody>
-          <a:bodyPr wrap="square" lIns="0" tIns="0" rIns="0" bIns="0" rtlCol="0" anchor="ctr"/>
-          <a:lstStyle/>
-          <a:p>
-            <a:pPr indent="0" marL="0">
-              <a:buNone/>
-            </a:pPr>
-            <a:r>
-              <a:rPr lang="en-US" sz="1700" b="1" dirty="0">
-                <a:solidFill>
-                  <a:schemeClr val="tx1"/>
-                </a:solidFill>
-              </a:rPr>
-              <a:t>できたらチェック</a:t>
-            </a:r>
-            <a:endParaRPr lang="en-US" sz="1700" dirty="0"/>
-          </a:p>
-        </p:txBody>
-      </p:sp>
-      <p:sp>
-        <p:nvSpPr>
-          <p:cNvPr id="14" name="Text 10"/>
-          <p:cNvSpPr txBox="1"/>
-          <p:nvPr/>
-        </p:nvSpPr>
-        <p:spPr>
-          <a:xfrm>
-            <a:off x="4937760" y="2286000"/>
-            <a:ext cx="3474720" cy="2057400"/>
-          </a:xfrm>
-          <a:prstGeom prst="rect">
-            <a:avLst/>
-          </a:prstGeom>
-          <a:noFill/>
-          <a:ln/>
-        </p:spPr>
-        <p:txBody>
-          <a:bodyPr wrap="square" lIns="0" tIns="0" rIns="0" bIns="0" rtlCol="0" anchor="t"/>
+          <a:bodyPr wrap="square" lIns="0" tIns="0" rIns="0" bIns="0" rtlCol="0" anchor="t">
+            <a:normAutofit/>
+          </a:bodyPr>
           <a:lstStyle/>
           <a:p>
             <a:pPr indent="0" marL="0">
@@ -6473,14 +6576,17 @@
               <a:buNone/>
             </a:pPr>
             <a:r>
-              <a:rPr lang="en-US" sz="1350" dirty="0">
-                <a:solidFill>
-                  <a:schemeClr val="tx1"/>
-                </a:solidFill>
+              <a:rPr lang="ja-JP" altLang="en-US" sz="1350" b="1" dirty="0">
+                <a:solidFill>
+                  <a:srgbClr val="1A1A1A"/>
+                </a:solidFill>
+                <a:latin typeface="Noto Sans JP" pitchFamily="34" charset="0"/>
+                <a:ea typeface="Noto Sans JP" pitchFamily="34" charset="-122"/>
+                <a:cs typeface="Noto Sans JP" pitchFamily="34" charset="-120"/>
               </a:rPr>
               <a:t>☐ 運用ルール表がWikiにある</a:t>
             </a:r>
-            <a:endParaRPr lang="en-US" sz="1350" dirty="0"/>
+            <a:endParaRPr lang="ja-JP" sz="1350" dirty="0"/>
           </a:p>
           <a:p>
             <a:pPr indent="0" marL="0">
@@ -6490,14 +6596,17 @@
               <a:buNone/>
             </a:pPr>
             <a:r>
-              <a:rPr lang="en-US" sz="1350" dirty="0">
-                <a:solidFill>
-                  <a:schemeClr val="tx1"/>
-                </a:solidFill>
+              <a:rPr lang="ja-JP" altLang="en-US" sz="1350" b="1" dirty="0">
+                <a:solidFill>
+                  <a:srgbClr val="1A1A1A"/>
+                </a:solidFill>
+                <a:latin typeface="Noto Sans JP" pitchFamily="34" charset="0"/>
+                <a:ea typeface="Noto Sans JP" pitchFamily="34" charset="-122"/>
+                <a:cs typeface="Noto Sans JP" pitchFamily="34" charset="-120"/>
               </a:rPr>
               <a:t>☐ 改善が1回まわった（要望 → 修正 → 公開 → 記録）</a:t>
             </a:r>
-            <a:endParaRPr lang="en-US" sz="1350" dirty="0"/>
+            <a:endParaRPr lang="ja-JP" sz="1350" dirty="0"/>
           </a:p>
         </p:txBody>
       </p:sp>
@@ -6513,8 +6622,8 @@
         </p:nvSpPr>
         <p:spPr>
           <a:xfrm>
-            <a:off x="8229600" y="4773168"/>
-            <a:ext cx="365760" cy="228600"/>
+            <a:off x="8366760" y="4754880"/>
+            <a:ext cx="365760" cy="274320"/>
           </a:xfrm>
           <a:prstGeom prst="rect">
             <a:avLst/>
@@ -6526,20 +6635,23 @@
           </a:extLst>
         </p:spPr>
         <p:txBody>
-          <a:bodyPr/>
+          <a:bodyPr anchor="ctr"/>
           <a:lstStyle>
             <a:lvl1pPr>
-              <a:defRPr sz="900">
-                <a:solidFill>
-                  <a:srgbClr val="5A6872"/>
-                </a:solidFill>
+              <a:defRPr sz="850">
+                <a:solidFill>
+                  <a:srgbClr val="FFFFFF"/>
+                </a:solidFill>
+                <a:latin typeface="Noto Sans JP"/>
+                <a:ea typeface="Noto Sans JP"/>
+                <a:cs typeface="Noto Sans JP"/>
               </a:defRPr>
             </a:lvl1pPr>
           </a:lstStyle>
           <a:p>
             <a:pPr algn="r"/>
             <a:fld id="{F7021451-1387-4CA6-816F-3879F97B5CBC}" type="slidenum">
-              <a:rPr b="0" lang="en-US"/>
+              <a:rPr b="1" lang="en-US"/>
               <a:t>7</a:t>
             </a:fld>
             <a:endParaRPr lang="en-US"/>
@@ -6571,18 +6683,92 @@
           <a:chExt cx="0" cy="0"/>
         </a:xfrm>
       </p:grpSpPr>
-      <p:sp>
-        <p:nvSpPr>
-          <p:cNvPr id="2" name="Text 0"/>
-          <p:cNvSpPr/>
-          <p:nvPr>
-            <p:ph idx="100" type="title" hasCustomPrompt="1"/>
-          </p:nvPr>
-        </p:nvSpPr>
-        <p:spPr>
-          <a:xfrm>
-            <a:off x="548640" y="1463040"/>
-            <a:ext cx="8046720" cy="1005840"/>
+      <p:pic>
+        <p:nvPicPr>
+          <p:cNvPr id="2" name="portrait" descr="講師 笹原彰朗">    </p:cNvPr>
+          <p:cNvPicPr>
+            <a:picLocks noChangeAspect="1"/>
+          </p:cNvPicPr>
+          <p:nvPr/>
+        </p:nvPicPr>
+        <p:blipFill>
+          <a:blip r:embed="rId1"/>
+          <a:stretch>
+            <a:fillRect/>
+          </a:stretch>
+        </p:blipFill>
+        <p:spPr>
+          <a:xfrm>
+            <a:off x="6003588" y="1211580"/>
+            <a:ext cx="2866092" cy="3931920"/>
+          </a:xfrm>
+          <a:prstGeom prst="rect">
+            <a:avLst/>
+          </a:prstGeom>
+        </p:spPr>
+      </p:pic>
+      <p:sp>
+        <p:nvSpPr>
+          <p:cNvPr id="3" name="Text 0"/>
+          <p:cNvSpPr txBox="1"/>
+          <p:nvPr/>
+        </p:nvSpPr>
+        <p:spPr>
+          <a:xfrm rot="-240000">
+            <a:off x="457200" y="548640"/>
+            <a:ext cx="1280160" cy="548640"/>
+          </a:xfrm>
+          <a:prstGeom prst="rect">
+            <a:avLst/>
+          </a:prstGeom>
+          <a:solidFill>
+            <a:srgbClr val="1A1A1A"/>
+          </a:solidFill>
+          <a:ln>
+            <a:solidFill>
+              <a:srgbClr val="1A1A1A"/>
+            </a:solidFill>
+          </a:ln>
+          <a:effectLst>
+            <a:outerShdw sx="100000" sy="100000" kx="0" ky="0" algn="bl" rotWithShape="0" blurRad="101600" dist="38100" dir="2700000">
+              <a:srgbClr val="1A1A1A">
+                <a:alpha val="100000"/>
+              </a:srgbClr>
+            </a:outerShdw>
+          </a:effectLst>
+        </p:spPr>
+        <p:txBody>
+          <a:bodyPr wrap="square" lIns="0" tIns="0" rIns="0" bIns="0" rtlCol="0" anchor="ctr"/>
+          <a:lstStyle/>
+          <a:p>
+            <a:pPr algn="ctr" indent="0" marL="0">
+              <a:buNone/>
+            </a:pPr>
+            <a:r>
+              <a:rPr lang="ja-JP" altLang="en-US" sz="2000" dirty="0">
+                <a:solidFill>
+                  <a:srgbClr val="FFD600"/>
+                </a:solidFill>
+                <a:latin typeface="Dela Gothic One" pitchFamily="34" charset="0"/>
+                <a:ea typeface="けいふぉんと" pitchFamily="34" charset="-122"/>
+                <a:cs typeface="Dela Gothic One" pitchFamily="34" charset="-120"/>
+              </a:rPr>
+              <a:t>次回</a:t>
+            </a:r>
+            <a:endParaRPr lang="ja-JP" sz="2000" dirty="0"/>
+          </a:p>
+        </p:txBody>
+      </p:sp>
+      <p:sp>
+        <p:nvSpPr>
+          <p:cNvPr id="4" name="Text 1"/>
+          <p:cNvSpPr txBox="1"/>
+          <p:nvPr/>
+        </p:nvSpPr>
+        <p:spPr>
+          <a:xfrm>
+            <a:off x="457200" y="1280160"/>
+            <a:ext cx="5852160" cy="1554480"/>
           </a:xfrm>
           <a:prstGeom prst="rect">
             <a:avLst/>
@@ -6591,36 +6777,90 @@
           <a:ln/>
         </p:spPr>
         <p:txBody>
-          <a:bodyPr wrap="square" lIns="0" tIns="0" rIns="0" bIns="0" rtlCol="0" anchor="t"/>
-          <a:lstStyle/>
-          <a:p>
-            <a:pPr algn="l" indent="0" marL="0">
-              <a:buNone/>
-            </a:pPr>
-            <a:r>
-              <a:rPr lang="en-US" sz="3000" b="1" dirty="0">
-                <a:solidFill>
-                  <a:schemeClr val="accent1"/>
-                </a:solidFill>
-              </a:rPr>
-              <a:t>次回：第12回 成果発表・構築者チェック</a:t>
-            </a:r>
-            <a:endParaRPr lang="en-US" sz="3000" dirty="0"/>
-          </a:p>
-        </p:txBody>
-      </p:sp>
-      <p:sp>
-        <p:nvSpPr>
-          <p:cNvPr id="3" name="Text 0"/>
+          <a:bodyPr wrap="square" lIns="0" tIns="0" rIns="0" bIns="0" rtlCol="0" anchor="ctr">
+            <a:normAutofit/>
+          </a:bodyPr>
+          <a:lstStyle/>
+          <a:p>
+            <a:pPr indent="0" marL="0">
+              <a:buNone/>
+            </a:pPr>
+            <a:r>
+              <a:rPr lang="ja-JP" altLang="en-US" sz="3200" dirty="0">
+                <a:solidFill>
+                  <a:srgbClr val="1A1A1A"/>
+                </a:solidFill>
+                <a:latin typeface="Dela Gothic One" pitchFamily="34" charset="0"/>
+                <a:ea typeface="けいふぉんと" pitchFamily="34" charset="-122"/>
+                <a:cs typeface="Dela Gothic One" pitchFamily="34" charset="-120"/>
+              </a:rPr>
+              <a:t>第12回</a:t>
+            </a:r>
+            <a:endParaRPr lang="ja-JP" sz="3200" dirty="0"/>
+          </a:p>
+          <a:p>
+            <a:pPr indent="0" marL="0">
+              <a:buNone/>
+            </a:pPr>
+            <a:r>
+              <a:rPr lang="ja-JP" altLang="en-US" sz="3200" dirty="0">
+                <a:solidFill>
+                  <a:srgbClr val="1A1A1A"/>
+                </a:solidFill>
+                <a:latin typeface="Dela Gothic One" pitchFamily="34" charset="0"/>
+                <a:ea typeface="けいふぉんと" pitchFamily="34" charset="-122"/>
+                <a:cs typeface="Dela Gothic One" pitchFamily="34" charset="-120"/>
+              </a:rPr>
+              <a:t>成果発表・構築者チェック</a:t>
+            </a:r>
+            <a:endParaRPr lang="ja-JP" sz="3200" dirty="0"/>
+          </a:p>
+        </p:txBody>
+      </p:sp>
+      <p:sp>
+        <p:nvSpPr>
+          <p:cNvPr id="5" name="card"/>
           <p:cNvSpPr/>
-          <p:nvPr>
-            <p:ph idx="101" type="body" hasCustomPrompt="1"/>
-          </p:nvPr>
-        </p:nvSpPr>
-        <p:spPr>
-          <a:xfrm>
-            <a:off x="548640" y="2606040"/>
-            <a:ext cx="8046720" cy="1097280"/>
+          <p:nvPr/>
+        </p:nvSpPr>
+        <p:spPr>
+          <a:xfrm>
+            <a:off x="457200" y="3108960"/>
+            <a:ext cx="5394960" cy="1325880"/>
+          </a:xfrm>
+          <a:prstGeom prst="roundRect">
+            <a:avLst>
+              <a:gd name="adj" fmla="val 6897"/>
+            </a:avLst>
+          </a:prstGeom>
+          <a:solidFill>
+            <a:srgbClr val="FFFFFF"/>
+          </a:solidFill>
+          <a:ln w="25400">
+            <a:solidFill>
+              <a:srgbClr val="1A1A1A"/>
+            </a:solidFill>
+            <a:prstDash val="solid"/>
+          </a:ln>
+          <a:effectLst>
+            <a:outerShdw sx="100000" sy="100000" kx="0" ky="0" algn="bl" rotWithShape="0" blurRad="101600" dist="50800" dir="2700000">
+              <a:srgbClr val="1A1A1A">
+                <a:alpha val="100000"/>
+              </a:srgbClr>
+            </a:outerShdw>
+          </a:effectLst>
+        </p:spPr>
+      </p:sp>
+      <p:sp>
+        <p:nvSpPr>
+          <p:cNvPr id="6" name="Text 3"/>
+          <p:cNvSpPr txBox="1"/>
+          <p:nvPr/>
+        </p:nvSpPr>
+        <p:spPr>
+          <a:xfrm>
+            <a:off x="685800" y="3200400"/>
+            <a:ext cx="4937760" cy="1143000"/>
           </a:xfrm>
           <a:prstGeom prst="rect">
             <a:avLst/>
@@ -6629,35 +6869,49 @@
           <a:ln/>
         </p:spPr>
         <p:txBody>
-          <a:bodyPr wrap="square" lIns="0" tIns="0" rIns="0" bIns="0" rtlCol="0" anchor="t"/>
+          <a:bodyPr wrap="square" lIns="0" tIns="0" rIns="0" bIns="0" rtlCol="0" anchor="ctr">
+            <a:normAutofit/>
+          </a:bodyPr>
           <a:lstStyle/>
           <a:p>
             <a:pPr indent="0" marL="0">
-              <a:buNone/>
-            </a:pPr>
-            <a:r>
-              <a:rPr lang="en-US" sz="1500" dirty="0">
-                <a:solidFill>
-                  <a:schemeClr val="bg1"/>
-                </a:solidFill>
+              <a:spcAft>
+                <a:spcPts val="400"/>
+              </a:spcAft>
+              <a:buNone/>
+            </a:pPr>
+            <a:r>
+              <a:rPr lang="ja-JP" altLang="en-US" sz="1400" b="1" dirty="0">
+                <a:solidFill>
+                  <a:srgbClr val="1A1A1A"/>
+                </a:solidFill>
+                <a:latin typeface="Noto Sans JP" pitchFamily="34" charset="0"/>
+                <a:ea typeface="Noto Sans JP" pitchFamily="34" charset="-122"/>
+                <a:cs typeface="Noto Sans JP" pitchFamily="34" charset="-120"/>
               </a:rPr>
               <a:t>わからないところは、講座グループでいつでも質問してください。</a:t>
             </a:r>
-            <a:endParaRPr lang="en-US" sz="1500" dirty="0"/>
+            <a:endParaRPr lang="ja-JP" sz="1400" dirty="0"/>
           </a:p>
           <a:p>
             <a:pPr indent="0" marL="0">
-              <a:buNone/>
-            </a:pPr>
-            <a:r>
-              <a:rPr lang="en-US" sz="1500" dirty="0">
-                <a:solidFill>
-                  <a:schemeClr val="bg1"/>
-                </a:solidFill>
+              <a:spcAft>
+                <a:spcPts val="400"/>
+              </a:spcAft>
+              <a:buNone/>
+            </a:pPr>
+            <a:r>
+              <a:rPr lang="ja-JP" altLang="en-US" sz="1400" b="1" dirty="0">
+                <a:solidFill>
+                  <a:srgbClr val="1A1A1A"/>
+                </a:solidFill>
+                <a:latin typeface="Noto Sans JP" pitchFamily="34" charset="0"/>
+                <a:ea typeface="Noto Sans JP" pitchFamily="34" charset="-122"/>
+                <a:cs typeface="Noto Sans JP" pitchFamily="34" charset="-120"/>
               </a:rPr>
               <a:t>APIキーやパスワードは送らないでください。</a:t>
             </a:r>
-            <a:endParaRPr lang="en-US" sz="1500" dirty="0"/>
+            <a:endParaRPr lang="ja-JP" sz="1400" dirty="0"/>
           </a:p>
         </p:txBody>
       </p:sp>
@@ -6670,9 +6924,9 @@
 </file>
 
 <file path=ppt/theme/theme1.xml><?xml version="1.0" encoding="utf-8"?>
-<a:theme xmlns:a="http://schemas.openxmlformats.org/drawingml/2006/main" name="Manaberu">
+<a:theme xmlns:a="http://schemas.openxmlformats.org/drawingml/2006/main" name="SasaYell">
   <a:themeElements>
-    <a:clrScheme name="Manaberu">
+    <a:clrScheme name="SasaYell">
       <a:dk1>
         <a:srgbClr val="1A1A1A"/>
       </a:dk1>
@@ -6680,10 +6934,10 @@
         <a:srgbClr val="FFFFFF"/>
       </a:lt1>
       <a:dk2>
-        <a:srgbClr val="5A6872"/>
+        <a:srgbClr val="1A1A1A"/>
       </a:dk2>
       <a:lt2>
-        <a:srgbClr val="FFF6CC"/>
+        <a:srgbClr val="FFD600"/>
       </a:lt2>
       <a:accent1>
         <a:srgbClr val="FFD600"/>
@@ -6692,128 +6946,34 @@
         <a:srgbClr val="DD6420"/>
       </a:accent2>
       <a:accent3>
-        <a:srgbClr val="3370FF"/>
+        <a:srgbClr val="F5A623"/>
       </a:accent3>
       <a:accent4>
-        <a:srgbClr val="06C755"/>
+        <a:srgbClr val="1A1A1A"/>
       </a:accent4>
       <a:accent5>
-        <a:srgbClr val="E53935"/>
+        <a:srgbClr val="FFFFFF"/>
       </a:accent5>
       <a:accent6>
-        <a:srgbClr val="F5A623"/>
+        <a:srgbClr val="DD6420"/>
       </a:accent6>
       <a:hlink>
-        <a:srgbClr val="3370FF"/>
+        <a:srgbClr val="DD6420"/>
       </a:hlink>
       <a:folHlink>
-        <a:srgbClr val="6B4FBB"/>
+        <a:srgbClr val="F5A623"/>
       </a:folHlink>
     </a:clrScheme>
-    <a:fontScheme name="Manaberu">
+    <a:fontScheme name="SasaYell">
       <a:majorFont>
-        <a:latin typeface="Yu Gothic"/>
-        <a:ea typeface=""/>
+        <a:latin typeface="Dela Gothic One"/>
+        <a:ea typeface="けいふぉんと"/>
         <a:cs typeface=""/>
-        <a:font script="Jpan" typeface="游ゴシック Light"/>
-        <a:font script="Hang" typeface="맑은 고딕"/>
-        <a:font script="Hans" typeface="等线 Light"/>
-        <a:font script="Hant" typeface="新細明體"/>
-        <a:font script="Arab" typeface="Times New Roman"/>
-        <a:font script="Hebr" typeface="Times New Roman"/>
-        <a:font script="Thai" typeface="Angsana New"/>
-        <a:font script="Ethi" typeface="Nyala"/>
-        <a:font script="Beng" typeface="Vrinda"/>
-        <a:font script="Gujr" typeface="Shruti"/>
-        <a:font script="Khmr" typeface="MoolBoran"/>
-        <a:font script="Knda" typeface="Tunga"/>
-        <a:font script="Guru" typeface="Raavi"/>
-        <a:font script="Cans" typeface="Euphemia"/>
-        <a:font script="Cher" typeface="Plantagenet Cherokee"/>
-        <a:font script="Yiii" typeface="Microsoft Yi Baiti"/>
-        <a:font script="Tibt" typeface="Microsoft Himalaya"/>
-        <a:font script="Thaa" typeface="MV Boli"/>
-        <a:font script="Deva" typeface="Mangal"/>
-        <a:font script="Telu" typeface="Gautami"/>
-        <a:font script="Taml" typeface="Latha"/>
-        <a:font script="Syrc" typeface="Estrangelo Edessa"/>
-        <a:font script="Orya" typeface="Kalinga"/>
-        <a:font script="Mlym" typeface="Kartika"/>
-        <a:font script="Laoo" typeface="DokChampa"/>
-        <a:font script="Sinh" typeface="Iskoola Pota"/>
-        <a:font script="Mong" typeface="Mongolian Baiti"/>
-        <a:font script="Viet" typeface="Times New Roman"/>
-        <a:font script="Uigh" typeface="Microsoft Uighur"/>
-        <a:font script="Geor" typeface="Sylfaen"/>
-        <a:font script="Armn" typeface="Arial"/>
-        <a:font script="Bugi" typeface="Leelawadee UI"/>
-        <a:font script="Bopo" typeface="Microsoft JhengHei"/>
-        <a:font script="Java" typeface="Javanese Text"/>
-        <a:font script="Lisu" typeface="Segoe UI"/>
-        <a:font script="Mymr" typeface="Myanmar Text"/>
-        <a:font script="Nkoo" typeface="Ebrima"/>
-        <a:font script="Olck" typeface="Nirmala UI"/>
-        <a:font script="Osma" typeface="Ebrima"/>
-        <a:font script="Phag" typeface="Phagspa"/>
-        <a:font script="Syrn" typeface="Estrangelo Edessa"/>
-        <a:font script="Syrj" typeface="Estrangelo Edessa"/>
-        <a:font script="Syre" typeface="Estrangelo Edessa"/>
-        <a:font script="Sora" typeface="Nirmala UI"/>
-        <a:font script="Tale" typeface="Microsoft Tai Le"/>
-        <a:font script="Talu" typeface="Microsoft New Tai Lue"/>
-        <a:font script="Tfng" typeface="Ebrima"/>
       </a:majorFont>
       <a:minorFont>
-        <a:latin typeface="Yu Gothic"/>
-        <a:ea typeface=""/>
+        <a:latin typeface="Noto Sans JP"/>
+        <a:ea typeface="Noto Sans JP"/>
         <a:cs typeface=""/>
-        <a:font script="Jpan" typeface="游ゴシック"/>
-        <a:font script="Hang" typeface="맑은 고딕"/>
-        <a:font script="Hans" typeface="等线"/>
-        <a:font script="Hant" typeface="新細明體"/>
-        <a:font script="Arab" typeface="Arial"/>
-        <a:font script="Hebr" typeface="Arial"/>
-        <a:font script="Thai" typeface="Cordia New"/>
-        <a:font script="Ethi" typeface="Nyala"/>
-        <a:font script="Beng" typeface="Vrinda"/>
-        <a:font script="Gujr" typeface="Shruti"/>
-        <a:font script="Khmr" typeface="DaunPenh"/>
-        <a:font script="Knda" typeface="Tunga"/>
-        <a:font script="Guru" typeface="Raavi"/>
-        <a:font script="Cans" typeface="Euphemia"/>
-        <a:font script="Cher" typeface="Plantagenet Cherokee"/>
-        <a:font script="Yiii" typeface="Microsoft Yi Baiti"/>
-        <a:font script="Tibt" typeface="Microsoft Himalaya"/>
-        <a:font script="Thaa" typeface="MV Boli"/>
-        <a:font script="Deva" typeface="Mangal"/>
-        <a:font script="Telu" typeface="Gautami"/>
-        <a:font script="Taml" typeface="Latha"/>
-        <a:font script="Syrc" typeface="Estrangelo Edessa"/>
-        <a:font script="Orya" typeface="Kalinga"/>
-        <a:font script="Mlym" typeface="Kartika"/>
-        <a:font script="Laoo" typeface="DokChampa"/>
-        <a:font script="Sinh" typeface="Iskoola Pota"/>
-        <a:font script="Mong" typeface="Mongolian Baiti"/>
-        <a:font script="Viet" typeface="Arial"/>
-        <a:font script="Uigh" typeface="Microsoft Uighur"/>
-        <a:font script="Geor" typeface="Sylfaen"/>
-        <a:font script="Armn" typeface="Arial"/>
-        <a:font script="Bugi" typeface="Leelawadee UI"/>
-        <a:font script="Bopo" typeface="Microsoft JhengHei"/>
-        <a:font script="Java" typeface="Javanese Text"/>
-        <a:font script="Lisu" typeface="Segoe UI"/>
-        <a:font script="Mymr" typeface="Myanmar Text"/>
-        <a:font script="Nkoo" typeface="Ebrima"/>
-        <a:font script="Olck" typeface="Nirmala UI"/>
-        <a:font script="Osma" typeface="Ebrima"/>
-        <a:font script="Phag" typeface="Phagspa"/>
-        <a:font script="Syrn" typeface="Estrangelo Edessa"/>
-        <a:font script="Syrj" typeface="Estrangelo Edessa"/>
-        <a:font script="Syre" typeface="Estrangelo Edessa"/>
-        <a:font script="Sora" typeface="Nirmala UI"/>
-        <a:font script="Tale" typeface="Microsoft Tai Le"/>
-        <a:font script="Talu" typeface="Microsoft New Tai Lue"/>
-        <a:font script="Tfng" typeface="Ebrima"/>
       </a:minorFont>
     </a:fontScheme>
     <a:fmtScheme name="Office">
